--- a/analytics_report.pptx
+++ b/analytics_report.pptx
@@ -3116,8 +3116,8 @@
         </p:nvSpPr>
         <p:spPr>
           <a:xfrm>
-            <a:off x="9052560" y="0"/>
-            <a:ext cx="3136392" cy="6858000"/>
+            <a:off x="8869680" y="0"/>
+            <a:ext cx="3319272" cy="6858000"/>
           </a:xfrm>
           <a:prstGeom prst="rect">
             <a:avLst/>
@@ -3159,8 +3159,8 @@
         </p:nvSpPr>
         <p:spPr>
           <a:xfrm>
-            <a:off x="731520" y="2743200"/>
-            <a:ext cx="1280160" cy="64008"/>
+            <a:off x="8869680" y="0"/>
+            <a:ext cx="54864" cy="6858000"/>
           </a:xfrm>
           <a:prstGeom prst="rect">
             <a:avLst/>
@@ -3202,8 +3202,8 @@
         </p:nvSpPr>
         <p:spPr>
           <a:xfrm>
-            <a:off x="731520" y="2971800"/>
-            <a:ext cx="7772400" cy="1828800"/>
+            <a:off x="731520" y="502920"/>
+            <a:ext cx="5029200" cy="320040"/>
           </a:xfrm>
           <a:prstGeom prst="rect">
             <a:avLst/>
@@ -3211,33 +3211,77 @@
           <a:noFill/>
         </p:spPr>
         <p:txBody>
-          <a:bodyPr wrap="square">
+          <a:bodyPr wrap="square" lIns="73152" rIns="73152" tIns="36576" bIns="36576">
             <a:spAutoFit/>
           </a:bodyPr>
           <a:lstStyle/>
           <a:p>
-            <a:r>
-              <a:rPr sz="3200" b="1" i="0">
-                <a:solidFill>
-                  <a:srgbClr val="FFFFFF"/>
-                </a:solidFill>
-                <a:latin typeface="Calibri"/>
-              </a:rPr>
-              <a:t>Credit Risk Analytics</a:t>
-            </a:r>
-          </a:p>
-        </p:txBody>
-      </p:sp>
-      <p:sp>
-        <p:nvSpPr>
-          <p:cNvPr id="5" name="TextBox 4"/>
+            <a:pPr algn="l"/>
+            <a:r>
+              <a:rPr sz="1000" b="1" i="0">
+                <a:solidFill>
+                  <a:srgbClr val="E0EBF7"/>
+                </a:solidFill>
+                <a:latin typeface="Calibri"/>
+              </a:rPr>
+              <a:t>MULTI-AGENT ANALYTICS</a:t>
+            </a:r>
+          </a:p>
+        </p:txBody>
+      </p:sp>
+      <p:sp>
+        <p:nvSpPr>
+          <p:cNvPr id="5" name="Rectangle 4"/>
+          <p:cNvSpPr/>
+          <p:nvPr/>
+        </p:nvSpPr>
+        <p:spPr>
+          <a:xfrm>
+            <a:off x="731520" y="2331720"/>
+            <a:ext cx="1280160" cy="54864"/>
+          </a:xfrm>
+          <a:prstGeom prst="rect">
+            <a:avLst/>
+          </a:prstGeom>
+          <a:solidFill>
+            <a:srgbClr val="C89B3C"/>
+          </a:solidFill>
+          <a:ln>
+            <a:noFill/>
+          </a:ln>
+        </p:spPr>
+        <p:style>
+          <a:lnRef idx="1">
+            <a:schemeClr val="accent1"/>
+          </a:lnRef>
+          <a:fillRef idx="3">
+            <a:schemeClr val="accent1"/>
+          </a:fillRef>
+          <a:effectRef idx="2">
+            <a:schemeClr val="accent1"/>
+          </a:effectRef>
+          <a:fontRef idx="minor">
+            <a:schemeClr val="lt1"/>
+          </a:fontRef>
+        </p:style>
+        <p:txBody>
+          <a:bodyPr rtlCol="0" anchor="ctr"/>
+          <a:lstStyle/>
+          <a:p>
+            <a:pPr algn="ctr"/>
+          </a:p>
+        </p:txBody>
+      </p:sp>
+      <p:sp>
+        <p:nvSpPr>
+          <p:cNvPr id="6" name="TextBox 5"/>
           <p:cNvSpPr txBox="1"/>
           <p:nvPr/>
         </p:nvSpPr>
         <p:spPr>
           <a:xfrm>
-            <a:off x="731520" y="4983480"/>
-            <a:ext cx="7589520" cy="914400"/>
+            <a:off x="685800" y="2578608"/>
+            <a:ext cx="7543800" cy="1600200"/>
           </a:xfrm>
           <a:prstGeom prst="rect">
             <a:avLst/>
@@ -3245,33 +3289,34 @@
           <a:noFill/>
         </p:spPr>
         <p:txBody>
-          <a:bodyPr wrap="square">
+          <a:bodyPr wrap="square" lIns="73152" rIns="73152" tIns="36576" bIns="36576">
             <a:spAutoFit/>
           </a:bodyPr>
           <a:lstStyle/>
           <a:p>
-            <a:r>
-              <a:rPr sz="1600" b="0" i="0">
+            <a:pPr algn="l"/>
+            <a:r>
+              <a:rPr sz="3400" b="1" i="0">
                 <a:solidFill>
                   <a:srgbClr val="FFFFFF"/>
                 </a:solidFill>
                 <a:latin typeface="Calibri"/>
               </a:rPr>
-              <a:t>Building a robust predictive model from data insights to business impact</a:t>
-            </a:r>
-          </a:p>
-        </p:txBody>
-      </p:sp>
-      <p:sp>
-        <p:nvSpPr>
-          <p:cNvPr id="6" name="TextBox 5"/>
+              <a:t>Understanding &amp; Reducing Employee Attrition</a:t>
+            </a:r>
+          </a:p>
+        </p:txBody>
+      </p:sp>
+      <p:sp>
+        <p:nvSpPr>
+          <p:cNvPr id="7" name="TextBox 6"/>
           <p:cNvSpPr txBox="1"/>
           <p:nvPr/>
         </p:nvSpPr>
         <p:spPr>
           <a:xfrm>
-            <a:off x="731520" y="6126480"/>
-            <a:ext cx="3657600" cy="365760"/>
+            <a:off x="713232" y="4572000"/>
+            <a:ext cx="7406640" cy="914400"/>
           </a:xfrm>
           <a:prstGeom prst="rect">
             <a:avLst/>
@@ -3279,19 +3324,91 @@
           <a:noFill/>
         </p:spPr>
         <p:txBody>
-          <a:bodyPr wrap="none">
+          <a:bodyPr wrap="square" lIns="73152" rIns="73152" tIns="36576" bIns="36576">
             <a:spAutoFit/>
           </a:bodyPr>
           <a:lstStyle/>
           <a:p>
+            <a:pPr algn="l"/>
+            <a:r>
+              <a:rPr sz="1500" b="0" i="0">
+                <a:solidFill>
+                  <a:srgbClr val="E0EBF7"/>
+                </a:solidFill>
+                <a:latin typeface="Calibri"/>
+              </a:rPr>
+              <a:t>A Data-Driven Strategy to Protect Talent and Drive Business Stability</a:t>
+            </a:r>
+          </a:p>
+        </p:txBody>
+      </p:sp>
+      <p:sp>
+        <p:nvSpPr>
+          <p:cNvPr id="8" name="TextBox 7"/>
+          <p:cNvSpPr txBox="1"/>
+          <p:nvPr/>
+        </p:nvSpPr>
+        <p:spPr>
+          <a:xfrm>
+            <a:off x="713232" y="6172200"/>
+            <a:ext cx="3657600" cy="256032"/>
+          </a:xfrm>
+          <a:prstGeom prst="rect">
+            <a:avLst/>
+          </a:prstGeom>
+          <a:noFill/>
+        </p:spPr>
+        <p:txBody>
+          <a:bodyPr wrap="square" lIns="73152" rIns="73152" tIns="36576" bIns="36576">
+            <a:spAutoFit/>
+          </a:bodyPr>
+          <a:lstStyle/>
+          <a:p>
+            <a:pPr algn="l"/>
             <a:r>
               <a:rPr sz="1000" b="0" i="0">
                 <a:solidFill>
+                  <a:srgbClr val="E0EBF7"/>
+                </a:solidFill>
+                <a:latin typeface="Calibri"/>
+              </a:rPr>
+              <a:t>MAY 03, 2026</a:t>
+            </a:r>
+          </a:p>
+        </p:txBody>
+      </p:sp>
+      <p:sp>
+        <p:nvSpPr>
+          <p:cNvPr id="9" name="TextBox 8"/>
+          <p:cNvSpPr txBox="1"/>
+          <p:nvPr/>
+        </p:nvSpPr>
+        <p:spPr>
+          <a:xfrm>
+            <a:off x="9235440" y="2423160"/>
+            <a:ext cx="2468880" cy="1097280"/>
+          </a:xfrm>
+          <a:prstGeom prst="rect">
+            <a:avLst/>
+          </a:prstGeom>
+          <a:noFill/>
+        </p:spPr>
+        <p:txBody>
+          <a:bodyPr wrap="square" lIns="73152" rIns="73152" tIns="36576" bIns="36576">
+            <a:spAutoFit/>
+          </a:bodyPr>
+          <a:lstStyle/>
+          <a:p>
+            <a:pPr algn="ctr"/>
+            <a:r>
+              <a:rPr sz="1800" b="1" i="0">
+                <a:solidFill>
                   <a:srgbClr val="FFFFFF"/>
                 </a:solidFill>
                 <a:latin typeface="Calibri"/>
               </a:rPr>
-              <a:t>APRIL 28, 2026</a:t>
+              <a:t>EXECUTIVE
+DECISION DECK</a:t>
             </a:r>
           </a:p>
         </p:txBody>
@@ -3331,7 +3448,7 @@
         <p:spPr>
           <a:xfrm>
             <a:off x="0" y="0"/>
-            <a:ext cx="411480" cy="6858000"/>
+            <a:ext cx="329184" cy="6858000"/>
           </a:xfrm>
           <a:prstGeom prst="rect">
             <a:avLst/>
@@ -3373,8 +3490,8 @@
         </p:nvSpPr>
         <p:spPr>
           <a:xfrm>
-            <a:off x="731520" y="365760"/>
-            <a:ext cx="10515600" cy="822960"/>
+            <a:off x="658368" y="320040"/>
+            <a:ext cx="10652760" cy="713232"/>
           </a:xfrm>
           <a:prstGeom prst="rect">
             <a:avLst/>
@@ -3382,19 +3499,20 @@
           <a:noFill/>
         </p:spPr>
         <p:txBody>
-          <a:bodyPr wrap="square">
+          <a:bodyPr wrap="square" lIns="73152" rIns="73152" tIns="36576" bIns="36576">
             <a:spAutoFit/>
           </a:bodyPr>
           <a:lstStyle/>
           <a:p>
-            <a:r>
-              <a:rPr sz="1800" b="1" i="0">
+            <a:pPr algn="l"/>
+            <a:r>
+              <a:rPr sz="2400" b="1" i="0">
                 <a:solidFill>
                   <a:srgbClr val="122B45"/>
                 </a:solidFill>
                 <a:latin typeface="Calibri"/>
               </a:rPr>
-              <a:t>Comprehensive overview showing distributions of key variables and default</a:t>
+              <a:t>Limitations &amp; Strategic Next Steps</a:t>
             </a:r>
           </a:p>
         </p:txBody>
@@ -3407,8 +3525,8 @@
         </p:nvSpPr>
         <p:spPr>
           <a:xfrm>
-            <a:off x="731520" y="1078992"/>
-            <a:ext cx="822960" cy="45720"/>
+            <a:off x="731520" y="1042415"/>
+            <a:ext cx="960120" cy="36576"/>
           </a:xfrm>
           <a:prstGeom prst="rect">
             <a:avLst/>
@@ -3450,14 +3568,14 @@
         </p:nvSpPr>
         <p:spPr>
           <a:xfrm>
-            <a:off x="731520" y="1325880"/>
-            <a:ext cx="5486400" cy="1051560"/>
+            <a:off x="713232" y="1325880"/>
+            <a:ext cx="10652760" cy="694944"/>
           </a:xfrm>
           <a:prstGeom prst="roundRect">
             <a:avLst/>
           </a:prstGeom>
           <a:solidFill>
-            <a:srgbClr val="1F5EA8"/>
+            <a:srgbClr val="B04848"/>
           </a:solidFill>
           <a:ln>
             <a:noFill/>
@@ -3478,56 +3596,360 @@
           </a:fontRef>
         </p:style>
         <p:txBody>
-          <a:bodyPr rtlCol="0" anchor="ctr" wrap="square" lIns="164592" rIns="164592" tIns="73152" bIns="73152"/>
+          <a:bodyPr rtlCol="0" anchor="ctr"/>
           <a:lstStyle/>
           <a:p>
             <a:pPr algn="ctr"/>
-            <a:r>
-              <a:rPr sz="1100" b="1" i="0">
+          </a:p>
+        </p:txBody>
+      </p:sp>
+      <p:sp>
+        <p:nvSpPr>
+          <p:cNvPr id="6" name="TextBox 5"/>
+          <p:cNvSpPr txBox="1"/>
+          <p:nvPr/>
+        </p:nvSpPr>
+        <p:spPr>
+          <a:xfrm>
+            <a:off x="850392" y="1399032"/>
+            <a:ext cx="10378440" cy="603504"/>
+          </a:xfrm>
+          <a:prstGeom prst="rect">
+            <a:avLst/>
+          </a:prstGeom>
+          <a:noFill/>
+        </p:spPr>
+        <p:txBody>
+          <a:bodyPr wrap="square" lIns="73152" rIns="73152" tIns="36576" bIns="36576">
+            <a:spAutoFit/>
+          </a:bodyPr>
+          <a:lstStyle/>
+          <a:p>
+            <a:pPr algn="l"/>
+            <a:r>
+              <a:rPr sz="1300" b="1" i="0">
                 <a:solidFill>
                   <a:srgbClr val="FFFFFF"/>
                 </a:solidFill>
                 <a:latin typeface="Calibri"/>
               </a:rPr>
-              <a:t>Comprehensive overview showing distributions of key variables and default rates across loan grades, credit history, and loan purposes, highlighting potential risk patterns.</a:t>
-            </a:r>
-          </a:p>
-        </p:txBody>
-      </p:sp>
-      <p:pic>
-        <p:nvPicPr>
-          <p:cNvPr id="6" name="Picture 5" descr="figure_1_20260428_180617.png"/>
-          <p:cNvPicPr>
-            <a:picLocks noChangeAspect="1"/>
-          </p:cNvPicPr>
-          <p:nvPr/>
-        </p:nvPicPr>
-        <p:blipFill>
-          <a:blip r:embed="rId2"/>
-          <a:stretch>
-            <a:fillRect/>
-          </a:stretch>
-        </p:blipFill>
-        <p:spPr>
-          <a:xfrm>
-            <a:off x="6446520" y="2651760"/>
-            <a:ext cx="5029200" cy="3474720"/>
-          </a:xfrm>
-          <a:prstGeom prst="rect">
-            <a:avLst/>
-          </a:prstGeom>
-        </p:spPr>
-      </p:pic>
-      <p:sp>
-        <p:nvSpPr>
-          <p:cNvPr id="7" name="Rectangle 6"/>
+              <a:t>Our analysis is powerful but has boundaries. The next phase requires new data and cross-functional commitment.</a:t>
+            </a:r>
+          </a:p>
+        </p:txBody>
+      </p:sp>
+      <p:sp>
+        <p:nvSpPr>
+          <p:cNvPr id="7" name="Rounded Rectangle 6"/>
           <p:cNvSpPr/>
           <p:nvPr/>
         </p:nvSpPr>
         <p:spPr>
           <a:xfrm>
-            <a:off x="731520" y="6355080"/>
-            <a:ext cx="10698480" cy="18288"/>
+            <a:off x="786384" y="2331720"/>
+            <a:ext cx="5074920" cy="3429000"/>
+          </a:xfrm>
+          <a:prstGeom prst="roundRect">
+            <a:avLst/>
+          </a:prstGeom>
+          <a:solidFill>
+            <a:srgbClr val="FFFFFF"/>
+          </a:solidFill>
+          <a:ln>
+            <a:noFill/>
+          </a:ln>
+        </p:spPr>
+        <p:style>
+          <a:lnRef idx="1">
+            <a:schemeClr val="accent1"/>
+          </a:lnRef>
+          <a:fillRef idx="3">
+            <a:schemeClr val="accent1"/>
+          </a:fillRef>
+          <a:effectRef idx="2">
+            <a:schemeClr val="accent1"/>
+          </a:effectRef>
+          <a:fontRef idx="minor">
+            <a:schemeClr val="lt1"/>
+          </a:fontRef>
+        </p:style>
+        <p:txBody>
+          <a:bodyPr rtlCol="0" anchor="ctr"/>
+          <a:lstStyle/>
+          <a:p>
+            <a:pPr algn="ctr"/>
+          </a:p>
+        </p:txBody>
+      </p:sp>
+      <p:sp>
+        <p:nvSpPr>
+          <p:cNvPr id="8" name="Rounded Rectangle 7"/>
+          <p:cNvSpPr/>
+          <p:nvPr/>
+        </p:nvSpPr>
+        <p:spPr>
+          <a:xfrm>
+            <a:off x="6263640" y="2331720"/>
+            <a:ext cx="5074920" cy="3429000"/>
+          </a:xfrm>
+          <a:prstGeom prst="roundRect">
+            <a:avLst/>
+          </a:prstGeom>
+          <a:solidFill>
+            <a:srgbClr val="FFFFFF"/>
+          </a:solidFill>
+          <a:ln>
+            <a:noFill/>
+          </a:ln>
+        </p:spPr>
+        <p:style>
+          <a:lnRef idx="1">
+            <a:schemeClr val="accent1"/>
+          </a:lnRef>
+          <a:fillRef idx="3">
+            <a:schemeClr val="accent1"/>
+          </a:fillRef>
+          <a:effectRef idx="2">
+            <a:schemeClr val="accent1"/>
+          </a:effectRef>
+          <a:fontRef idx="minor">
+            <a:schemeClr val="lt1"/>
+          </a:fontRef>
+        </p:style>
+        <p:txBody>
+          <a:bodyPr rtlCol="0" anchor="ctr"/>
+          <a:lstStyle/>
+          <a:p>
+            <a:pPr algn="ctr"/>
+          </a:p>
+        </p:txBody>
+      </p:sp>
+      <p:sp>
+        <p:nvSpPr>
+          <p:cNvPr id="9" name="TextBox 8"/>
+          <p:cNvSpPr txBox="1"/>
+          <p:nvPr/>
+        </p:nvSpPr>
+        <p:spPr>
+          <a:xfrm>
+            <a:off x="1005840" y="2596896"/>
+            <a:ext cx="4389120" cy="320040"/>
+          </a:xfrm>
+          <a:prstGeom prst="rect">
+            <a:avLst/>
+          </a:prstGeom>
+          <a:noFill/>
+        </p:spPr>
+        <p:txBody>
+          <a:bodyPr wrap="square" lIns="73152" rIns="73152" tIns="36576" bIns="36576">
+            <a:spAutoFit/>
+          </a:bodyPr>
+          <a:lstStyle/>
+          <a:p>
+            <a:pPr algn="l"/>
+            <a:r>
+              <a:rPr sz="1300" b="1" i="0">
+                <a:solidFill>
+                  <a:srgbClr val="B04848"/>
+                </a:solidFill>
+                <a:latin typeface="Calibri"/>
+              </a:rPr>
+              <a:t>Known limits</a:t>
+            </a:r>
+          </a:p>
+        </p:txBody>
+      </p:sp>
+      <p:sp>
+        <p:nvSpPr>
+          <p:cNvPr id="10" name="TextBox 9"/>
+          <p:cNvSpPr txBox="1"/>
+          <p:nvPr/>
+        </p:nvSpPr>
+        <p:spPr>
+          <a:xfrm>
+            <a:off x="6492240" y="2596896"/>
+            <a:ext cx="4389120" cy="320040"/>
+          </a:xfrm>
+          <a:prstGeom prst="rect">
+            <a:avLst/>
+          </a:prstGeom>
+          <a:noFill/>
+        </p:spPr>
+        <p:txBody>
+          <a:bodyPr wrap="square" lIns="73152" rIns="73152" tIns="36576" bIns="36576">
+            <a:spAutoFit/>
+          </a:bodyPr>
+          <a:lstStyle/>
+          <a:p>
+            <a:pPr algn="l"/>
+            <a:r>
+              <a:rPr sz="1300" b="1" i="0">
+                <a:solidFill>
+                  <a:srgbClr val="122B45"/>
+                </a:solidFill>
+                <a:latin typeface="Calibri"/>
+              </a:rPr>
+              <a:t>Next checks</a:t>
+            </a:r>
+          </a:p>
+        </p:txBody>
+      </p:sp>
+      <p:sp>
+        <p:nvSpPr>
+          <p:cNvPr id="11" name="TextBox 10"/>
+          <p:cNvSpPr txBox="1"/>
+          <p:nvPr/>
+        </p:nvSpPr>
+        <p:spPr>
+          <a:xfrm>
+            <a:off x="960120" y="3063240"/>
+            <a:ext cx="4526280" cy="2194560"/>
+          </a:xfrm>
+          <a:prstGeom prst="rect">
+            <a:avLst/>
+          </a:prstGeom>
+          <a:noFill/>
+        </p:spPr>
+        <p:txBody>
+          <a:bodyPr wrap="square" lIns="73152" rIns="73152" tIns="36576" bIns="36576">
+            <a:spAutoFit/>
+          </a:bodyPr>
+          <a:lstStyle/>
+          <a:p>
+            <a:pPr>
+              <a:spcAft>
+                <a:spcPts val="700"/>
+              </a:spcAft>
+            </a:pPr>
+            <a:r>
+              <a:rPr sz="1100" b="1">
+                <a:solidFill>
+                  <a:srgbClr val="1F5EA8"/>
+                </a:solidFill>
+                <a:latin typeface="Calibri"/>
+              </a:rPr>
+              <a:t>▪  </a:t>
+            </a:r>
+            <a:r>
+              <a:rPr sz="1100">
+                <a:solidFill>
+                  <a:srgbClr val="242E38"/>
+                </a:solidFill>
+                <a:latin typeface="Calibri"/>
+              </a:rPr>
+              <a:t>Limitation: This is historical data. We cannot measure the impact of recent market changes or new company initiatives.</a:t>
+            </a:r>
+          </a:p>
+          <a:p>
+            <a:pPr>
+              <a:spcAft>
+                <a:spcPts val="700"/>
+              </a:spcAft>
+            </a:pPr>
+            <a:r>
+              <a:rPr sz="1100" b="1">
+                <a:solidFill>
+                  <a:srgbClr val="1F5EA8"/>
+                </a:solidFill>
+                <a:latin typeface="Calibri"/>
+              </a:rPr>
+              <a:t>▪  </a:t>
+            </a:r>
+            <a:r>
+              <a:rPr sz="1100">
+                <a:solidFill>
+                  <a:srgbClr val="242E38"/>
+                </a:solidFill>
+                <a:latin typeface="Calibri"/>
+              </a:rPr>
+              <a:t>Limitation: We lack data on 'pull factors' like competitive offers, which are critical for designing counter-offers.</a:t>
+            </a:r>
+          </a:p>
+        </p:txBody>
+      </p:sp>
+      <p:sp>
+        <p:nvSpPr>
+          <p:cNvPr id="12" name="TextBox 11"/>
+          <p:cNvSpPr txBox="1"/>
+          <p:nvPr/>
+        </p:nvSpPr>
+        <p:spPr>
+          <a:xfrm>
+            <a:off x="6446520" y="3063240"/>
+            <a:ext cx="4526280" cy="2194560"/>
+          </a:xfrm>
+          <a:prstGeom prst="rect">
+            <a:avLst/>
+          </a:prstGeom>
+          <a:noFill/>
+        </p:spPr>
+        <p:txBody>
+          <a:bodyPr wrap="square" lIns="73152" rIns="73152" tIns="36576" bIns="36576">
+            <a:spAutoFit/>
+          </a:bodyPr>
+          <a:lstStyle/>
+          <a:p>
+            <a:pPr>
+              <a:spcAft>
+                <a:spcPts val="700"/>
+              </a:spcAft>
+            </a:pPr>
+            <a:r>
+              <a:rPr sz="1100" b="1">
+                <a:solidFill>
+                  <a:srgbClr val="1F5EA8"/>
+                </a:solidFill>
+                <a:latin typeface="Calibri"/>
+              </a:rPr>
+              <a:t>▪  </a:t>
+            </a:r>
+            <a:r>
+              <a:rPr sz="1100">
+                <a:solidFill>
+                  <a:srgbClr val="242E38"/>
+                </a:solidFill>
+                <a:latin typeface="Calibri"/>
+              </a:rPr>
+              <a:t>Next Step 1: Implement the recommended pilot programs and track attrition rates for treated vs. control groups.</a:t>
+            </a:r>
+          </a:p>
+          <a:p>
+            <a:pPr>
+              <a:spcAft>
+                <a:spcPts val="700"/>
+              </a:spcAft>
+            </a:pPr>
+            <a:r>
+              <a:rPr sz="1100" b="1">
+                <a:solidFill>
+                  <a:srgbClr val="1F5EA8"/>
+                </a:solidFill>
+                <a:latin typeface="Calibri"/>
+              </a:rPr>
+              <a:t>▪  </a:t>
+            </a:r>
+            <a:r>
+              <a:rPr sz="1100">
+                <a:solidFill>
+                  <a:srgbClr val="242E38"/>
+                </a:solidFill>
+                <a:latin typeface="Calibri"/>
+              </a:rPr>
+              <a:t>Next Step 2: Develop a leading indicator dashboard using monthly pulse survey data (e.g., satisfaction, intent to stay) for real-time risk monitoring.</a:t>
+            </a:r>
+          </a:p>
+        </p:txBody>
+      </p:sp>
+      <p:sp>
+        <p:nvSpPr>
+          <p:cNvPr id="13" name="Rectangle 12"/>
+          <p:cNvSpPr/>
+          <p:nvPr/>
+        </p:nvSpPr>
+        <p:spPr>
+          <a:xfrm>
+            <a:off x="713232" y="6318504"/>
+            <a:ext cx="10835640" cy="13716"/>
           </a:xfrm>
           <a:prstGeom prst="rect">
             <a:avLst/>
@@ -3563,14 +3985,14 @@
       </p:sp>
       <p:sp>
         <p:nvSpPr>
-          <p:cNvPr id="8" name="TextBox 7"/>
+          <p:cNvPr id="14" name="TextBox 13"/>
           <p:cNvSpPr txBox="1"/>
           <p:nvPr/>
         </p:nvSpPr>
         <p:spPr>
           <a:xfrm>
-            <a:off x="731520" y="6446520"/>
-            <a:ext cx="7772400" cy="274320"/>
+            <a:off x="713232" y="6437376"/>
+            <a:ext cx="7863840" cy="256032"/>
           </a:xfrm>
           <a:prstGeom prst="rect">
             <a:avLst/>
@@ -3578,11 +4000,12 @@
           <a:noFill/>
         </p:spPr>
         <p:txBody>
-          <a:bodyPr wrap="none">
+          <a:bodyPr wrap="square" lIns="73152" rIns="73152" tIns="36576" bIns="36576">
             <a:spAutoFit/>
           </a:bodyPr>
           <a:lstStyle/>
           <a:p>
+            <a:pPr algn="l"/>
             <a:r>
               <a:rPr sz="900" b="0" i="0">
                 <a:solidFill>
@@ -3590,21 +4013,21 @@
                 </a:solidFill>
                 <a:latin typeface="Calibri"/>
               </a:rPr>
-              <a:t>Credit Risk Analytics</a:t>
-            </a:r>
-          </a:p>
-        </p:txBody>
-      </p:sp>
-      <p:sp>
-        <p:nvSpPr>
-          <p:cNvPr id="9" name="TextBox 8"/>
+              <a:t>Understanding &amp; Reducing Employee Attrition</a:t>
+            </a:r>
+          </a:p>
+        </p:txBody>
+      </p:sp>
+      <p:sp>
+        <p:nvSpPr>
+          <p:cNvPr id="15" name="TextBox 14"/>
           <p:cNvSpPr txBox="1"/>
           <p:nvPr/>
         </p:nvSpPr>
         <p:spPr>
           <a:xfrm>
-            <a:off x="9601200" y="6446520"/>
-            <a:ext cx="1828800" cy="274320"/>
+            <a:off x="9646920" y="6437376"/>
+            <a:ext cx="1828800" cy="256032"/>
           </a:xfrm>
           <a:prstGeom prst="rect">
             <a:avLst/>
@@ -3612,12 +4035,12 @@
           <a:noFill/>
         </p:spPr>
         <p:txBody>
-          <a:bodyPr wrap="none">
+          <a:bodyPr wrap="square" lIns="73152" rIns="73152" tIns="36576" bIns="36576">
             <a:spAutoFit/>
           </a:bodyPr>
           <a:lstStyle/>
           <a:p>
-            <a:pPr algn="ctr"/>
+            <a:pPr algn="r"/>
             <a:r>
               <a:rPr sz="900" b="0" i="0">
                 <a:solidFill>
@@ -3627,49 +4050,6 @@
               </a:rPr>
               <a:t>10 / 13</a:t>
             </a:r>
-          </a:p>
-        </p:txBody>
-      </p:sp>
-      <p:sp>
-        <p:nvSpPr>
-          <p:cNvPr id="10" name="Rectangle 9"/>
-          <p:cNvSpPr/>
-          <p:nvPr/>
-        </p:nvSpPr>
-        <p:spPr>
-          <a:xfrm>
-            <a:off x="11475720" y="365760"/>
-            <a:ext cx="274320" cy="274320"/>
-          </a:xfrm>
-          <a:prstGeom prst="rect">
-            <a:avLst/>
-          </a:prstGeom>
-          <a:solidFill>
-            <a:srgbClr val="C89B3C"/>
-          </a:solidFill>
-          <a:ln>
-            <a:noFill/>
-          </a:ln>
-        </p:spPr>
-        <p:style>
-          <a:lnRef idx="1">
-            <a:schemeClr val="accent1"/>
-          </a:lnRef>
-          <a:fillRef idx="3">
-            <a:schemeClr val="accent1"/>
-          </a:fillRef>
-          <a:effectRef idx="2">
-            <a:schemeClr val="accent1"/>
-          </a:effectRef>
-          <a:fontRef idx="minor">
-            <a:schemeClr val="lt1"/>
-          </a:fontRef>
-        </p:style>
-        <p:txBody>
-          <a:bodyPr rtlCol="0" anchor="ctr"/>
-          <a:lstStyle/>
-          <a:p>
-            <a:pPr algn="ctr"/>
           </a:p>
         </p:txBody>
       </p:sp>
@@ -3687,7 +4067,7 @@
     <p:bg>
       <p:bgPr>
         <a:solidFill>
-          <a:srgbClr val="F6F3EC"/>
+          <a:srgbClr val="122B45"/>
         </a:solidFill>
         <a:effectLst/>
       </p:bgPr>
@@ -3708,84 +4088,7 @@
         <p:spPr>
           <a:xfrm>
             <a:off x="0" y="0"/>
-            <a:ext cx="411480" cy="6858000"/>
-          </a:xfrm>
-          <a:prstGeom prst="rect">
-            <a:avLst/>
-          </a:prstGeom>
-          <a:solidFill>
-            <a:srgbClr val="122B45"/>
-          </a:solidFill>
-          <a:ln>
-            <a:noFill/>
-          </a:ln>
-        </p:spPr>
-        <p:style>
-          <a:lnRef idx="1">
-            <a:schemeClr val="accent1"/>
-          </a:lnRef>
-          <a:fillRef idx="3">
-            <a:schemeClr val="accent1"/>
-          </a:fillRef>
-          <a:effectRef idx="2">
-            <a:schemeClr val="accent1"/>
-          </a:effectRef>
-          <a:fontRef idx="minor">
-            <a:schemeClr val="lt1"/>
-          </a:fontRef>
-        </p:style>
-        <p:txBody>
-          <a:bodyPr rtlCol="0" anchor="ctr"/>
-          <a:lstStyle/>
-          <a:p>
-            <a:pPr algn="ctr"/>
-          </a:p>
-        </p:txBody>
-      </p:sp>
-      <p:sp>
-        <p:nvSpPr>
-          <p:cNvPr id="3" name="TextBox 2"/>
-          <p:cNvSpPr txBox="1"/>
-          <p:nvPr/>
-        </p:nvSpPr>
-        <p:spPr>
-          <a:xfrm>
-            <a:off x="731520" y="365760"/>
-            <a:ext cx="10515600" cy="822960"/>
-          </a:xfrm>
-          <a:prstGeom prst="rect">
-            <a:avLst/>
-          </a:prstGeom>
-          <a:noFill/>
-        </p:spPr>
-        <p:txBody>
-          <a:bodyPr wrap="square">
-            <a:spAutoFit/>
-          </a:bodyPr>
-          <a:lstStyle/>
-          <a:p>
-            <a:r>
-              <a:rPr sz="1800" b="1" i="0">
-                <a:solidFill>
-                  <a:srgbClr val="122B45"/>
-                </a:solidFill>
-                <a:latin typeface="Calibri"/>
-              </a:rPr>
-              <a:t>Heatmap showing correlations between numerical variables, with loan_status correlations</a:t>
-            </a:r>
-          </a:p>
-        </p:txBody>
-      </p:sp>
-      <p:sp>
-        <p:nvSpPr>
-          <p:cNvPr id="4" name="Rectangle 3"/>
-          <p:cNvSpPr/>
-          <p:nvPr/>
-        </p:nvSpPr>
-        <p:spPr>
-          <a:xfrm>
-            <a:off x="731520" y="1078992"/>
-            <a:ext cx="822960" cy="45720"/>
+            <a:ext cx="384048" cy="6858000"/>
           </a:xfrm>
           <a:prstGeom prst="rect">
             <a:avLst/>
@@ -3821,133 +4124,14 @@
       </p:sp>
       <p:sp>
         <p:nvSpPr>
-          <p:cNvPr id="5" name="Rounded Rectangle 4"/>
-          <p:cNvSpPr/>
-          <p:nvPr/>
-        </p:nvSpPr>
-        <p:spPr>
-          <a:xfrm>
-            <a:off x="731520" y="1325880"/>
-            <a:ext cx="5486400" cy="1051560"/>
-          </a:xfrm>
-          <a:prstGeom prst="roundRect">
-            <a:avLst/>
-          </a:prstGeom>
-          <a:solidFill>
-            <a:srgbClr val="1F5EA8"/>
-          </a:solidFill>
-          <a:ln>
-            <a:noFill/>
-          </a:ln>
-        </p:spPr>
-        <p:style>
-          <a:lnRef idx="1">
-            <a:schemeClr val="accent1"/>
-          </a:lnRef>
-          <a:fillRef idx="3">
-            <a:schemeClr val="accent1"/>
-          </a:fillRef>
-          <a:effectRef idx="2">
-            <a:schemeClr val="accent1"/>
-          </a:effectRef>
-          <a:fontRef idx="minor">
-            <a:schemeClr val="lt1"/>
-          </a:fontRef>
-        </p:style>
-        <p:txBody>
-          <a:bodyPr rtlCol="0" anchor="ctr" wrap="square" lIns="164592" rIns="164592" tIns="73152" bIns="73152"/>
-          <a:lstStyle/>
-          <a:p>
-            <a:pPr algn="ctr"/>
-            <a:r>
-              <a:rPr sz="1100" b="1" i="0">
-                <a:solidFill>
-                  <a:srgbClr val="FFFFFF"/>
-                </a:solidFill>
-                <a:latin typeface="Calibri"/>
-              </a:rPr>
-              <a:t>Heatmap showing correlations between numerical variables, with loan_status correlations indicating predictive strength of financial and demographic factors.</a:t>
-            </a:r>
-          </a:p>
-        </p:txBody>
-      </p:sp>
-      <p:pic>
-        <p:nvPicPr>
-          <p:cNvPr id="6" name="Picture 5" descr="figure_2_20260428_180617.png"/>
-          <p:cNvPicPr>
-            <a:picLocks noChangeAspect="1"/>
-          </p:cNvPicPr>
-          <p:nvPr/>
-        </p:nvPicPr>
-        <p:blipFill>
-          <a:blip r:embed="rId2"/>
-          <a:stretch>
-            <a:fillRect/>
-          </a:stretch>
-        </p:blipFill>
-        <p:spPr>
-          <a:xfrm>
-            <a:off x="6446520" y="2651760"/>
-            <a:ext cx="5029200" cy="3474720"/>
-          </a:xfrm>
-          <a:prstGeom prst="rect">
-            <a:avLst/>
-          </a:prstGeom>
-        </p:spPr>
-      </p:pic>
-      <p:sp>
-        <p:nvSpPr>
-          <p:cNvPr id="7" name="Rectangle 6"/>
-          <p:cNvSpPr/>
-          <p:nvPr/>
-        </p:nvSpPr>
-        <p:spPr>
-          <a:xfrm>
-            <a:off x="731520" y="6355080"/>
-            <a:ext cx="10698480" cy="18288"/>
-          </a:xfrm>
-          <a:prstGeom prst="rect">
-            <a:avLst/>
-          </a:prstGeom>
-          <a:solidFill>
-            <a:srgbClr val="55606E"/>
-          </a:solidFill>
-          <a:ln>
-            <a:noFill/>
-          </a:ln>
-        </p:spPr>
-        <p:style>
-          <a:lnRef idx="1">
-            <a:schemeClr val="accent1"/>
-          </a:lnRef>
-          <a:fillRef idx="3">
-            <a:schemeClr val="accent1"/>
-          </a:fillRef>
-          <a:effectRef idx="2">
-            <a:schemeClr val="accent1"/>
-          </a:effectRef>
-          <a:fontRef idx="minor">
-            <a:schemeClr val="lt1"/>
-          </a:fontRef>
-        </p:style>
-        <p:txBody>
-          <a:bodyPr rtlCol="0" anchor="ctr"/>
-          <a:lstStyle/>
-          <a:p>
-            <a:pPr algn="ctr"/>
-          </a:p>
-        </p:txBody>
-      </p:sp>
-      <p:sp>
-        <p:nvSpPr>
-          <p:cNvPr id="8" name="TextBox 7"/>
+          <p:cNvPr id="3" name="TextBox 2"/>
           <p:cNvSpPr txBox="1"/>
           <p:nvPr/>
         </p:nvSpPr>
         <p:spPr>
           <a:xfrm>
-            <a:off x="731520" y="6446520"/>
-            <a:ext cx="7772400" cy="274320"/>
+            <a:off x="777240" y="1234440"/>
+            <a:ext cx="10149840" cy="822960"/>
           </a:xfrm>
           <a:prstGeom prst="rect">
             <a:avLst/>
@@ -3955,68 +4139,34 @@
           <a:noFill/>
         </p:spPr>
         <p:txBody>
-          <a:bodyPr wrap="none">
+          <a:bodyPr wrap="square" lIns="73152" rIns="73152" tIns="36576" bIns="36576">
             <a:spAutoFit/>
           </a:bodyPr>
           <a:lstStyle/>
           <a:p>
-            <a:r>
-              <a:rPr sz="900" b="0" i="0">
-                <a:solidFill>
-                  <a:srgbClr val="55606E"/>
-                </a:solidFill>
-                <a:latin typeface="Calibri"/>
-              </a:rPr>
-              <a:t>Credit Risk Analytics</a:t>
-            </a:r>
-          </a:p>
-        </p:txBody>
-      </p:sp>
-      <p:sp>
-        <p:nvSpPr>
-          <p:cNvPr id="9" name="TextBox 8"/>
-          <p:cNvSpPr txBox="1"/>
-          <p:nvPr/>
-        </p:nvSpPr>
-        <p:spPr>
-          <a:xfrm>
-            <a:off x="9601200" y="6446520"/>
-            <a:ext cx="1828800" cy="274320"/>
-          </a:xfrm>
-          <a:prstGeom prst="rect">
-            <a:avLst/>
-          </a:prstGeom>
-          <a:noFill/>
-        </p:spPr>
-        <p:txBody>
-          <a:bodyPr wrap="none">
-            <a:spAutoFit/>
-          </a:bodyPr>
-          <a:lstStyle/>
-          <a:p>
-            <a:pPr algn="ctr"/>
-            <a:r>
-              <a:rPr sz="900" b="0" i="0">
-                <a:solidFill>
-                  <a:srgbClr val="55606E"/>
-                </a:solidFill>
-                <a:latin typeface="Calibri"/>
-              </a:rPr>
-              <a:t>11 / 13</a:t>
-            </a:r>
-          </a:p>
-        </p:txBody>
-      </p:sp>
-      <p:sp>
-        <p:nvSpPr>
-          <p:cNvPr id="10" name="Rectangle 9"/>
+            <a:pPr algn="l"/>
+            <a:r>
+              <a:rPr sz="3400" b="1" i="0">
+                <a:solidFill>
+                  <a:srgbClr val="FFFFFF"/>
+                </a:solidFill>
+                <a:latin typeface="Calibri"/>
+              </a:rPr>
+              <a:t>The Path Forward: From Insight to Impact</a:t>
+            </a:r>
+          </a:p>
+        </p:txBody>
+      </p:sp>
+      <p:sp>
+        <p:nvSpPr>
+          <p:cNvPr id="4" name="Rectangle 3"/>
           <p:cNvSpPr/>
           <p:nvPr/>
         </p:nvSpPr>
         <p:spPr>
           <a:xfrm>
-            <a:off x="11475720" y="365760"/>
-            <a:ext cx="274320" cy="274320"/>
+            <a:off x="804672" y="2176272"/>
+            <a:ext cx="10607040" cy="36576"/>
           </a:xfrm>
           <a:prstGeom prst="rect">
             <a:avLst/>
@@ -4047,6 +4197,209 @@
           <a:lstStyle/>
           <a:p>
             <a:pPr algn="ctr"/>
+          </a:p>
+        </p:txBody>
+      </p:sp>
+      <p:sp>
+        <p:nvSpPr>
+          <p:cNvPr id="5" name="TextBox 4"/>
+          <p:cNvSpPr txBox="1"/>
+          <p:nvPr/>
+        </p:nvSpPr>
+        <p:spPr>
+          <a:xfrm>
+            <a:off x="777240" y="2514600"/>
+            <a:ext cx="9966960" cy="1234440"/>
+          </a:xfrm>
+          <a:prstGeom prst="rect">
+            <a:avLst/>
+          </a:prstGeom>
+          <a:noFill/>
+        </p:spPr>
+        <p:txBody>
+          <a:bodyPr wrap="square" lIns="73152" rIns="73152" tIns="36576" bIns="36576">
+            <a:spAutoFit/>
+          </a:bodyPr>
+          <a:lstStyle/>
+          <a:p>
+            <a:pPr algn="l"/>
+            <a:r>
+              <a:rPr sz="1800" b="0" i="0">
+                <a:solidFill>
+                  <a:srgbClr val="E0EBF7"/>
+                </a:solidFill>
+                <a:latin typeface="Calibri"/>
+              </a:rPr>
+              <a:t>We have identified clear, actionable levers to reduce costly employee turnover.</a:t>
+            </a:r>
+          </a:p>
+        </p:txBody>
+      </p:sp>
+      <p:sp>
+        <p:nvSpPr>
+          <p:cNvPr id="6" name="TextBox 5"/>
+          <p:cNvSpPr txBox="1"/>
+          <p:nvPr/>
+        </p:nvSpPr>
+        <p:spPr>
+          <a:xfrm>
+            <a:off x="822960" y="4069080"/>
+            <a:ext cx="9509760" cy="1371600"/>
+          </a:xfrm>
+          <a:prstGeom prst="rect">
+            <a:avLst/>
+          </a:prstGeom>
+          <a:noFill/>
+        </p:spPr>
+        <p:txBody>
+          <a:bodyPr wrap="square" lIns="73152" rIns="73152" tIns="36576" bIns="36576">
+            <a:spAutoFit/>
+          </a:bodyPr>
+          <a:lstStyle/>
+          <a:p>
+            <a:pPr>
+              <a:spcAft>
+                <a:spcPts val="700"/>
+              </a:spcAft>
+            </a:pPr>
+            <a:r>
+              <a:rPr sz="1200" b="1">
+                <a:solidFill>
+                  <a:srgbClr val="1F5EA8"/>
+                </a:solidFill>
+                <a:latin typeface="Calibri"/>
+              </a:rPr>
+              <a:t>▪  </a:t>
+            </a:r>
+            <a:r>
+              <a:rPr sz="1200">
+                <a:solidFill>
+                  <a:srgbClr val="242E38"/>
+                </a:solidFill>
+                <a:latin typeface="Calibri"/>
+              </a:rPr>
+              <a:t>Our Goal: Reduce voluntary attrition by 25% within 18 months, starting with the highest-risk segments.</a:t>
+            </a:r>
+          </a:p>
+          <a:p>
+            <a:pPr>
+              <a:spcAft>
+                <a:spcPts val="700"/>
+              </a:spcAft>
+            </a:pPr>
+            <a:r>
+              <a:rPr sz="1200" b="1">
+                <a:solidFill>
+                  <a:srgbClr val="1F5EA8"/>
+                </a:solidFill>
+                <a:latin typeface="Calibri"/>
+              </a:rPr>
+              <a:t>▪  </a:t>
+            </a:r>
+            <a:r>
+              <a:rPr sz="1200">
+                <a:solidFill>
+                  <a:srgbClr val="242E38"/>
+                </a:solidFill>
+                <a:latin typeface="Calibri"/>
+              </a:rPr>
+              <a:t>Our Ask: Approve the pilot programs outlined in Pillar 3 and the Quick Win to begin building momentum in Q3.</a:t>
+            </a:r>
+          </a:p>
+          <a:p>
+            <a:pPr>
+              <a:spcAft>
+                <a:spcPts val="700"/>
+              </a:spcAft>
+            </a:pPr>
+            <a:r>
+              <a:rPr sz="1200" b="1">
+                <a:solidFill>
+                  <a:srgbClr val="1F5EA8"/>
+                </a:solidFill>
+                <a:latin typeface="Calibri"/>
+              </a:rPr>
+              <a:t>▪  </a:t>
+            </a:r>
+            <a:r>
+              <a:rPr sz="1200">
+                <a:solidFill>
+                  <a:srgbClr val="242E38"/>
+                </a:solidFill>
+                <a:latin typeface="Calibri"/>
+              </a:rPr>
+              <a:t>Our Commitment: We will return in Q4 with a progress report and a detailed business case for the structural reforms in Pillars 1 and 2.</a:t>
+            </a:r>
+          </a:p>
+        </p:txBody>
+      </p:sp>
+      <p:sp>
+        <p:nvSpPr>
+          <p:cNvPr id="7" name="TextBox 6"/>
+          <p:cNvSpPr txBox="1"/>
+          <p:nvPr/>
+        </p:nvSpPr>
+        <p:spPr>
+          <a:xfrm>
+            <a:off x="777240" y="6263640"/>
+            <a:ext cx="6858000" cy="274320"/>
+          </a:xfrm>
+          <a:prstGeom prst="rect">
+            <a:avLst/>
+          </a:prstGeom>
+          <a:noFill/>
+        </p:spPr>
+        <p:txBody>
+          <a:bodyPr wrap="square" lIns="73152" rIns="73152" tIns="36576" bIns="36576">
+            <a:spAutoFit/>
+          </a:bodyPr>
+          <a:lstStyle/>
+          <a:p>
+            <a:pPr algn="l"/>
+            <a:r>
+              <a:rPr sz="1000" b="0" i="0">
+                <a:solidFill>
+                  <a:srgbClr val="E0EBF7"/>
+                </a:solidFill>
+                <a:latin typeface="Calibri"/>
+              </a:rPr>
+              <a:t>Generated by the Multi-Agent Analytics System</a:t>
+            </a:r>
+          </a:p>
+        </p:txBody>
+      </p:sp>
+      <p:sp>
+        <p:nvSpPr>
+          <p:cNvPr id="8" name="TextBox 7"/>
+          <p:cNvSpPr txBox="1"/>
+          <p:nvPr/>
+        </p:nvSpPr>
+        <p:spPr>
+          <a:xfrm>
+            <a:off x="9646920" y="6263640"/>
+            <a:ext cx="1828800" cy="274320"/>
+          </a:xfrm>
+          <a:prstGeom prst="rect">
+            <a:avLst/>
+          </a:prstGeom>
+          <a:noFill/>
+        </p:spPr>
+        <p:txBody>
+          <a:bodyPr wrap="square" lIns="73152" rIns="73152" tIns="36576" bIns="36576">
+            <a:spAutoFit/>
+          </a:bodyPr>
+          <a:lstStyle/>
+          <a:p>
+            <a:pPr algn="r"/>
+            <a:r>
+              <a:rPr sz="1000" b="0" i="0">
+                <a:solidFill>
+                  <a:srgbClr val="E0EBF7"/>
+                </a:solidFill>
+                <a:latin typeface="Calibri"/>
+              </a:rPr>
+              <a:t>11 / 13</a:t>
+            </a:r>
           </a:p>
         </p:txBody>
       </p:sp>
@@ -4085,7 +4438,7 @@
         <p:spPr>
           <a:xfrm>
             <a:off x="0" y="0"/>
-            <a:ext cx="411480" cy="6858000"/>
+            <a:ext cx="329184" cy="6858000"/>
           </a:xfrm>
           <a:prstGeom prst="rect">
             <a:avLst/>
@@ -4127,8 +4480,8 @@
         </p:nvSpPr>
         <p:spPr>
           <a:xfrm>
-            <a:off x="731520" y="365760"/>
-            <a:ext cx="10515600" cy="822960"/>
+            <a:off x="658368" y="320040"/>
+            <a:ext cx="10652760" cy="713232"/>
           </a:xfrm>
           <a:prstGeom prst="rect">
             <a:avLst/>
@@ -4136,19 +4489,20 @@
           <a:noFill/>
         </p:spPr>
         <p:txBody>
-          <a:bodyPr wrap="square">
+          <a:bodyPr wrap="square" lIns="73152" rIns="73152" tIns="36576" bIns="36576">
             <a:spAutoFit/>
           </a:bodyPr>
           <a:lstStyle/>
           <a:p>
-            <a:r>
-              <a:rPr sz="2100" b="1" i="0">
+            <a:pPr algn="l"/>
+            <a:r>
+              <a:rPr sz="1800" b="1" i="0">
                 <a:solidFill>
                   <a:srgbClr val="122B45"/>
                 </a:solidFill>
                 <a:latin typeface="Calibri"/>
               </a:rPr>
-              <a:t>Outlier detection in key variables showing data quality issues</a:t>
+              <a:t>Monthly income (-0.16) and age (-0.16) show strongest negative correlations with</a:t>
             </a:r>
           </a:p>
         </p:txBody>
@@ -4161,8 +4515,8 @@
         </p:nvSpPr>
         <p:spPr>
           <a:xfrm>
-            <a:off x="731520" y="1078992"/>
-            <a:ext cx="822960" cy="45720"/>
+            <a:off x="731520" y="1042415"/>
+            <a:ext cx="960120" cy="36576"/>
           </a:xfrm>
           <a:prstGeom prst="rect">
             <a:avLst/>
@@ -4204,8 +4558,8 @@
         </p:nvSpPr>
         <p:spPr>
           <a:xfrm>
-            <a:off x="731520" y="1325880"/>
-            <a:ext cx="5486400" cy="1325880"/>
+            <a:off x="713232" y="1234440"/>
+            <a:ext cx="10652760" cy="640080"/>
           </a:xfrm>
           <a:prstGeom prst="roundRect">
             <a:avLst/>
@@ -4232,25 +4586,94 @@
           </a:fontRef>
         </p:style>
         <p:txBody>
-          <a:bodyPr rtlCol="0" anchor="ctr" wrap="square" lIns="164592" rIns="164592" tIns="73152" bIns="73152"/>
+          <a:bodyPr rtlCol="0" anchor="ctr"/>
           <a:lstStyle/>
           <a:p>
             <a:pPr algn="ctr"/>
-            <a:r>
-              <a:rPr sz="1100" b="1" i="0">
+          </a:p>
+        </p:txBody>
+      </p:sp>
+      <p:sp>
+        <p:nvSpPr>
+          <p:cNvPr id="6" name="TextBox 5"/>
+          <p:cNvSpPr txBox="1"/>
+          <p:nvPr/>
+        </p:nvSpPr>
+        <p:spPr>
+          <a:xfrm>
+            <a:off x="850392" y="1307592"/>
+            <a:ext cx="10378440" cy="548640"/>
+          </a:xfrm>
+          <a:prstGeom prst="rect">
+            <a:avLst/>
+          </a:prstGeom>
+          <a:noFill/>
+        </p:spPr>
+        <p:txBody>
+          <a:bodyPr wrap="square" lIns="73152" rIns="73152" tIns="36576" bIns="36576">
+            <a:spAutoFit/>
+          </a:bodyPr>
+          <a:lstStyle/>
+          <a:p>
+            <a:pPr algn="l"/>
+            <a:r>
+              <a:rPr sz="1300" b="1" i="0">
                 <a:solidFill>
                   <a:srgbClr val="FFFFFF"/>
                 </a:solidFill>
                 <a:latin typeface="Calibri"/>
               </a:rPr>
-              <a:t>Outlier detection in key variables showing data quality issues, particularly employment length exceeding 40 years and high loan-to-income ratios (&gt;0.4) associated with elevated default risk.</a:t>
-            </a:r>
+              <a:t>Monthly income (-0.16) and age (-0.16) show strongest negative correlations with attrition, while distance from home (+0.07) shows positive correlation.</a:t>
+            </a:r>
+          </a:p>
+        </p:txBody>
+      </p:sp>
+      <p:sp>
+        <p:nvSpPr>
+          <p:cNvPr id="7" name="Rounded Rectangle 6"/>
+          <p:cNvSpPr/>
+          <p:nvPr/>
+        </p:nvSpPr>
+        <p:spPr>
+          <a:xfrm>
+            <a:off x="868680" y="2011680"/>
+            <a:ext cx="10287000" cy="4069080"/>
+          </a:xfrm>
+          <a:prstGeom prst="roundRect">
+            <a:avLst/>
+          </a:prstGeom>
+          <a:solidFill>
+            <a:srgbClr val="FFFFFF"/>
+          </a:solidFill>
+          <a:ln>
+            <a:noFill/>
+          </a:ln>
+        </p:spPr>
+        <p:style>
+          <a:lnRef idx="1">
+            <a:schemeClr val="accent1"/>
+          </a:lnRef>
+          <a:fillRef idx="3">
+            <a:schemeClr val="accent1"/>
+          </a:fillRef>
+          <a:effectRef idx="2">
+            <a:schemeClr val="accent1"/>
+          </a:effectRef>
+          <a:fontRef idx="minor">
+            <a:schemeClr val="lt1"/>
+          </a:fontRef>
+        </p:style>
+        <p:txBody>
+          <a:bodyPr rtlCol="0" anchor="ctr"/>
+          <a:lstStyle/>
+          <a:p>
+            <a:pPr algn="ctr"/>
           </a:p>
         </p:txBody>
       </p:sp>
       <p:pic>
         <p:nvPicPr>
-          <p:cNvPr id="6" name="Picture 5" descr="figure_3_20260428_180617.png"/>
+          <p:cNvPr id="8" name="Picture 7" descr="figure_4_20260503_221319.png"/>
           <p:cNvPicPr>
             <a:picLocks noChangeAspect="1"/>
           </p:cNvPicPr>
@@ -4264,8 +4687,8 @@
         </p:blipFill>
         <p:spPr>
           <a:xfrm>
-            <a:off x="6446520" y="2926080"/>
-            <a:ext cx="5029200" cy="3200400"/>
+            <a:off x="3971493" y="2148840"/>
+            <a:ext cx="4081373" cy="3749039"/>
           </a:xfrm>
           <a:prstGeom prst="rect">
             <a:avLst/>
@@ -4274,14 +4697,14 @@
       </p:pic>
       <p:sp>
         <p:nvSpPr>
-          <p:cNvPr id="7" name="Rectangle 6"/>
+          <p:cNvPr id="9" name="Rectangle 8"/>
           <p:cNvSpPr/>
           <p:nvPr/>
         </p:nvSpPr>
         <p:spPr>
           <a:xfrm>
-            <a:off x="731520" y="6355080"/>
-            <a:ext cx="10698480" cy="18288"/>
+            <a:off x="713232" y="6318504"/>
+            <a:ext cx="10835640" cy="13716"/>
           </a:xfrm>
           <a:prstGeom prst="rect">
             <a:avLst/>
@@ -4317,14 +4740,14 @@
       </p:sp>
       <p:sp>
         <p:nvSpPr>
-          <p:cNvPr id="8" name="TextBox 7"/>
+          <p:cNvPr id="10" name="TextBox 9"/>
           <p:cNvSpPr txBox="1"/>
           <p:nvPr/>
         </p:nvSpPr>
         <p:spPr>
           <a:xfrm>
-            <a:off x="731520" y="6446520"/>
-            <a:ext cx="7772400" cy="274320"/>
+            <a:off x="713232" y="6437376"/>
+            <a:ext cx="7863840" cy="256032"/>
           </a:xfrm>
           <a:prstGeom prst="rect">
             <a:avLst/>
@@ -4332,11 +4755,12 @@
           <a:noFill/>
         </p:spPr>
         <p:txBody>
-          <a:bodyPr wrap="none">
+          <a:bodyPr wrap="square" lIns="73152" rIns="73152" tIns="36576" bIns="36576">
             <a:spAutoFit/>
           </a:bodyPr>
           <a:lstStyle/>
           <a:p>
+            <a:pPr algn="l"/>
             <a:r>
               <a:rPr sz="900" b="0" i="0">
                 <a:solidFill>
@@ -4344,21 +4768,21 @@
                 </a:solidFill>
                 <a:latin typeface="Calibri"/>
               </a:rPr>
-              <a:t>Credit Risk Analytics</a:t>
-            </a:r>
-          </a:p>
-        </p:txBody>
-      </p:sp>
-      <p:sp>
-        <p:nvSpPr>
-          <p:cNvPr id="9" name="TextBox 8"/>
+              <a:t>Understanding &amp; Reducing Employee Attrition</a:t>
+            </a:r>
+          </a:p>
+        </p:txBody>
+      </p:sp>
+      <p:sp>
+        <p:nvSpPr>
+          <p:cNvPr id="11" name="TextBox 10"/>
           <p:cNvSpPr txBox="1"/>
           <p:nvPr/>
         </p:nvSpPr>
         <p:spPr>
           <a:xfrm>
-            <a:off x="9601200" y="6446520"/>
-            <a:ext cx="1828800" cy="274320"/>
+            <a:off x="9646920" y="6437376"/>
+            <a:ext cx="1828800" cy="256032"/>
           </a:xfrm>
           <a:prstGeom prst="rect">
             <a:avLst/>
@@ -4366,12 +4790,12 @@
           <a:noFill/>
         </p:spPr>
         <p:txBody>
-          <a:bodyPr wrap="none">
+          <a:bodyPr wrap="square" lIns="73152" rIns="73152" tIns="36576" bIns="36576">
             <a:spAutoFit/>
           </a:bodyPr>
           <a:lstStyle/>
           <a:p>
-            <a:pPr algn="ctr"/>
+            <a:pPr algn="r"/>
             <a:r>
               <a:rPr sz="900" b="0" i="0">
                 <a:solidFill>
@@ -4381,49 +4805,6 @@
               </a:rPr>
               <a:t>12 / 13</a:t>
             </a:r>
-          </a:p>
-        </p:txBody>
-      </p:sp>
-      <p:sp>
-        <p:nvSpPr>
-          <p:cNvPr id="10" name="Rectangle 9"/>
-          <p:cNvSpPr/>
-          <p:nvPr/>
-        </p:nvSpPr>
-        <p:spPr>
-          <a:xfrm>
-            <a:off x="11475720" y="365760"/>
-            <a:ext cx="274320" cy="274320"/>
-          </a:xfrm>
-          <a:prstGeom prst="rect">
-            <a:avLst/>
-          </a:prstGeom>
-          <a:solidFill>
-            <a:srgbClr val="C89B3C"/>
-          </a:solidFill>
-          <a:ln>
-            <a:noFill/>
-          </a:ln>
-        </p:spPr>
-        <p:style>
-          <a:lnRef idx="1">
-            <a:schemeClr val="accent1"/>
-          </a:lnRef>
-          <a:fillRef idx="3">
-            <a:schemeClr val="accent1"/>
-          </a:fillRef>
-          <a:effectRef idx="2">
-            <a:schemeClr val="accent1"/>
-          </a:effectRef>
-          <a:fontRef idx="minor">
-            <a:schemeClr val="lt1"/>
-          </a:fontRef>
-        </p:style>
-        <p:txBody>
-          <a:bodyPr rtlCol="0" anchor="ctr"/>
-          <a:lstStyle/>
-          <a:p>
-            <a:pPr algn="ctr"/>
           </a:p>
         </p:txBody>
       </p:sp>
@@ -4462,7 +4843,7 @@
         <p:spPr>
           <a:xfrm>
             <a:off x="0" y="0"/>
-            <a:ext cx="411480" cy="6858000"/>
+            <a:ext cx="329184" cy="6858000"/>
           </a:xfrm>
           <a:prstGeom prst="rect">
             <a:avLst/>
@@ -4504,8 +4885,8 @@
         </p:nvSpPr>
         <p:spPr>
           <a:xfrm>
-            <a:off x="731520" y="365760"/>
-            <a:ext cx="10515600" cy="822960"/>
+            <a:off x="658368" y="320040"/>
+            <a:ext cx="10652760" cy="713232"/>
           </a:xfrm>
           <a:prstGeom prst="rect">
             <a:avLst/>
@@ -4513,11 +4894,12 @@
           <a:noFill/>
         </p:spPr>
         <p:txBody>
-          <a:bodyPr wrap="square">
+          <a:bodyPr wrap="square" lIns="73152" rIns="73152" tIns="36576" bIns="36576">
             <a:spAutoFit/>
           </a:bodyPr>
           <a:lstStyle/>
           <a:p>
+            <a:pPr algn="l"/>
             <a:r>
               <a:rPr sz="1800" b="1" i="0">
                 <a:solidFill>
@@ -4525,7 +4907,7 @@
                 </a:solidFill>
                 <a:latin typeface="Calibri"/>
               </a:rPr>
-              <a:t>Categorical analysis showing default rates by previous credit history</a:t>
+              <a:t>Frequent travelers and single employees show highest attrition rates, suggesting work-life</a:t>
             </a:r>
           </a:p>
         </p:txBody>
@@ -4538,8 +4920,8 @@
         </p:nvSpPr>
         <p:spPr>
           <a:xfrm>
-            <a:off x="731520" y="1078992"/>
-            <a:ext cx="822960" cy="45720"/>
+            <a:off x="731520" y="1042415"/>
+            <a:ext cx="960120" cy="36576"/>
           </a:xfrm>
           <a:prstGeom prst="rect">
             <a:avLst/>
@@ -4581,8 +4963,8 @@
         </p:nvSpPr>
         <p:spPr>
           <a:xfrm>
-            <a:off x="731520" y="1325880"/>
-            <a:ext cx="5486400" cy="1051560"/>
+            <a:off x="713232" y="1234440"/>
+            <a:ext cx="10652760" cy="640080"/>
           </a:xfrm>
           <a:prstGeom prst="roundRect">
             <a:avLst/>
@@ -4609,25 +4991,94 @@
           </a:fontRef>
         </p:style>
         <p:txBody>
-          <a:bodyPr rtlCol="0" anchor="ctr" wrap="square" lIns="164592" rIns="164592" tIns="73152" bIns="73152"/>
+          <a:bodyPr rtlCol="0" anchor="ctr"/>
           <a:lstStyle/>
           <a:p>
             <a:pPr algn="ctr"/>
-            <a:r>
-              <a:rPr sz="1100" b="1" i="0">
+          </a:p>
+        </p:txBody>
+      </p:sp>
+      <p:sp>
+        <p:nvSpPr>
+          <p:cNvPr id="6" name="TextBox 5"/>
+          <p:cNvSpPr txBox="1"/>
+          <p:nvPr/>
+        </p:nvSpPr>
+        <p:spPr>
+          <a:xfrm>
+            <a:off x="850392" y="1307592"/>
+            <a:ext cx="10378440" cy="548640"/>
+          </a:xfrm>
+          <a:prstGeom prst="rect">
+            <a:avLst/>
+          </a:prstGeom>
+          <a:noFill/>
+        </p:spPr>
+        <p:txBody>
+          <a:bodyPr wrap="square" lIns="73152" rIns="73152" tIns="36576" bIns="36576">
+            <a:spAutoFit/>
+          </a:bodyPr>
+          <a:lstStyle/>
+          <a:p>
+            <a:pPr algn="l"/>
+            <a:r>
+              <a:rPr sz="1300" b="1" i="0">
                 <a:solidFill>
                   <a:srgbClr val="FFFFFF"/>
                 </a:solidFill>
                 <a:latin typeface="Calibri"/>
               </a:rPr>
-              <a:t>Categorical analysis showing default rates by previous credit history, loan purpose, and home ownership, plus the relationship between loan grade, interest rates, and default risk.</a:t>
-            </a:r>
+              <a:t>Frequent travelers and single employees show highest attrition rates, suggesting work-life balance challenges.</a:t>
+            </a:r>
+          </a:p>
+        </p:txBody>
+      </p:sp>
+      <p:sp>
+        <p:nvSpPr>
+          <p:cNvPr id="7" name="Rounded Rectangle 6"/>
+          <p:cNvSpPr/>
+          <p:nvPr/>
+        </p:nvSpPr>
+        <p:spPr>
+          <a:xfrm>
+            <a:off x="868680" y="2011680"/>
+            <a:ext cx="10287000" cy="4069080"/>
+          </a:xfrm>
+          <a:prstGeom prst="roundRect">
+            <a:avLst/>
+          </a:prstGeom>
+          <a:solidFill>
+            <a:srgbClr val="FFFFFF"/>
+          </a:solidFill>
+          <a:ln>
+            <a:noFill/>
+          </a:ln>
+        </p:spPr>
+        <p:style>
+          <a:lnRef idx="1">
+            <a:schemeClr val="accent1"/>
+          </a:lnRef>
+          <a:fillRef idx="3">
+            <a:schemeClr val="accent1"/>
+          </a:fillRef>
+          <a:effectRef idx="2">
+            <a:schemeClr val="accent1"/>
+          </a:effectRef>
+          <a:fontRef idx="minor">
+            <a:schemeClr val="lt1"/>
+          </a:fontRef>
+        </p:style>
+        <p:txBody>
+          <a:bodyPr rtlCol="0" anchor="ctr"/>
+          <a:lstStyle/>
+          <a:p>
+            <a:pPr algn="ctr"/>
           </a:p>
         </p:txBody>
       </p:sp>
       <p:pic>
         <p:nvPicPr>
-          <p:cNvPr id="6" name="Picture 5" descr="figure_4_20260428_180617.png"/>
+          <p:cNvPr id="8" name="Picture 7" descr="figure_5_20260503_221319.png"/>
           <p:cNvPicPr>
             <a:picLocks noChangeAspect="1"/>
           </p:cNvPicPr>
@@ -4641,8 +5092,8 @@
         </p:blipFill>
         <p:spPr>
           <a:xfrm>
-            <a:off x="6446520" y="2651760"/>
-            <a:ext cx="5029200" cy="3474720"/>
+            <a:off x="1444795" y="2148840"/>
+            <a:ext cx="9134768" cy="3749039"/>
           </a:xfrm>
           <a:prstGeom prst="rect">
             <a:avLst/>
@@ -4651,14 +5102,14 @@
       </p:pic>
       <p:sp>
         <p:nvSpPr>
-          <p:cNvPr id="7" name="Rectangle 6"/>
+          <p:cNvPr id="9" name="Rectangle 8"/>
           <p:cNvSpPr/>
           <p:nvPr/>
         </p:nvSpPr>
         <p:spPr>
           <a:xfrm>
-            <a:off x="731520" y="6355080"/>
-            <a:ext cx="10698480" cy="18288"/>
+            <a:off x="713232" y="6318504"/>
+            <a:ext cx="10835640" cy="13716"/>
           </a:xfrm>
           <a:prstGeom prst="rect">
             <a:avLst/>
@@ -4694,14 +5145,14 @@
       </p:sp>
       <p:sp>
         <p:nvSpPr>
-          <p:cNvPr id="8" name="TextBox 7"/>
+          <p:cNvPr id="10" name="TextBox 9"/>
           <p:cNvSpPr txBox="1"/>
           <p:nvPr/>
         </p:nvSpPr>
         <p:spPr>
           <a:xfrm>
-            <a:off x="731520" y="6446520"/>
-            <a:ext cx="7772400" cy="274320"/>
+            <a:off x="713232" y="6437376"/>
+            <a:ext cx="7863840" cy="256032"/>
           </a:xfrm>
           <a:prstGeom prst="rect">
             <a:avLst/>
@@ -4709,11 +5160,12 @@
           <a:noFill/>
         </p:spPr>
         <p:txBody>
-          <a:bodyPr wrap="none">
+          <a:bodyPr wrap="square" lIns="73152" rIns="73152" tIns="36576" bIns="36576">
             <a:spAutoFit/>
           </a:bodyPr>
           <a:lstStyle/>
           <a:p>
+            <a:pPr algn="l"/>
             <a:r>
               <a:rPr sz="900" b="0" i="0">
                 <a:solidFill>
@@ -4721,21 +5173,21 @@
                 </a:solidFill>
                 <a:latin typeface="Calibri"/>
               </a:rPr>
-              <a:t>Credit Risk Analytics</a:t>
-            </a:r>
-          </a:p>
-        </p:txBody>
-      </p:sp>
-      <p:sp>
-        <p:nvSpPr>
-          <p:cNvPr id="9" name="TextBox 8"/>
+              <a:t>Understanding &amp; Reducing Employee Attrition</a:t>
+            </a:r>
+          </a:p>
+        </p:txBody>
+      </p:sp>
+      <p:sp>
+        <p:nvSpPr>
+          <p:cNvPr id="11" name="TextBox 10"/>
           <p:cNvSpPr txBox="1"/>
           <p:nvPr/>
         </p:nvSpPr>
         <p:spPr>
           <a:xfrm>
-            <a:off x="9601200" y="6446520"/>
-            <a:ext cx="1828800" cy="274320"/>
+            <a:off x="9646920" y="6437376"/>
+            <a:ext cx="1828800" cy="256032"/>
           </a:xfrm>
           <a:prstGeom prst="rect">
             <a:avLst/>
@@ -4743,12 +5195,12 @@
           <a:noFill/>
         </p:spPr>
         <p:txBody>
-          <a:bodyPr wrap="none">
+          <a:bodyPr wrap="square" lIns="73152" rIns="73152" tIns="36576" bIns="36576">
             <a:spAutoFit/>
           </a:bodyPr>
           <a:lstStyle/>
           <a:p>
-            <a:pPr algn="ctr"/>
+            <a:pPr algn="r"/>
             <a:r>
               <a:rPr sz="900" b="0" i="0">
                 <a:solidFill>
@@ -4758,49 +5210,6 @@
               </a:rPr>
               <a:t>13 / 13</a:t>
             </a:r>
-          </a:p>
-        </p:txBody>
-      </p:sp>
-      <p:sp>
-        <p:nvSpPr>
-          <p:cNvPr id="10" name="Rectangle 9"/>
-          <p:cNvSpPr/>
-          <p:nvPr/>
-        </p:nvSpPr>
-        <p:spPr>
-          <a:xfrm>
-            <a:off x="11475720" y="365760"/>
-            <a:ext cx="274320" cy="274320"/>
-          </a:xfrm>
-          <a:prstGeom prst="rect">
-            <a:avLst/>
-          </a:prstGeom>
-          <a:solidFill>
-            <a:srgbClr val="C89B3C"/>
-          </a:solidFill>
-          <a:ln>
-            <a:noFill/>
-          </a:ln>
-        </p:spPr>
-        <p:style>
-          <a:lnRef idx="1">
-            <a:schemeClr val="accent1"/>
-          </a:lnRef>
-          <a:fillRef idx="3">
-            <a:schemeClr val="accent1"/>
-          </a:fillRef>
-          <a:effectRef idx="2">
-            <a:schemeClr val="accent1"/>
-          </a:effectRef>
-          <a:fontRef idx="minor">
-            <a:schemeClr val="lt1"/>
-          </a:fontRef>
-        </p:style>
-        <p:txBody>
-          <a:bodyPr rtlCol="0" anchor="ctr"/>
-          <a:lstStyle/>
-          <a:p>
-            <a:pPr algn="ctr"/>
           </a:p>
         </p:txBody>
       </p:sp>
@@ -4839,7 +5248,7 @@
         <p:spPr>
           <a:xfrm>
             <a:off x="0" y="0"/>
-            <a:ext cx="411480" cy="6858000"/>
+            <a:ext cx="329184" cy="6858000"/>
           </a:xfrm>
           <a:prstGeom prst="rect">
             <a:avLst/>
@@ -4881,8 +5290,8 @@
         </p:nvSpPr>
         <p:spPr>
           <a:xfrm>
-            <a:off x="731520" y="365760"/>
-            <a:ext cx="10515600" cy="822960"/>
+            <a:off x="658368" y="320040"/>
+            <a:ext cx="10652760" cy="713232"/>
           </a:xfrm>
           <a:prstGeom prst="rect">
             <a:avLst/>
@@ -4890,11 +5299,12 @@
           <a:noFill/>
         </p:spPr>
         <p:txBody>
-          <a:bodyPr wrap="square">
+          <a:bodyPr wrap="square" lIns="73152" rIns="73152" tIns="36576" bIns="36576">
             <a:spAutoFit/>
           </a:bodyPr>
           <a:lstStyle/>
           <a:p>
+            <a:pPr algn="l"/>
             <a:r>
               <a:rPr sz="2400" b="1" i="0">
                 <a:solidFill>
@@ -4902,7 +5312,7 @@
                 </a:solidFill>
                 <a:latin typeface="Calibri"/>
               </a:rPr>
-              <a:t>Context &amp; Objective</a:t>
+              <a:t>Objective Coverage</a:t>
             </a:r>
           </a:p>
         </p:txBody>
@@ -4915,8 +5325,8 @@
         </p:nvSpPr>
         <p:spPr>
           <a:xfrm>
-            <a:off x="731520" y="1078992"/>
-            <a:ext cx="822960" cy="45720"/>
+            <a:off x="731520" y="1042415"/>
+            <a:ext cx="960120" cy="36576"/>
           </a:xfrm>
           <a:prstGeom prst="rect">
             <a:avLst/>
@@ -4958,8 +5368,8 @@
         </p:nvSpPr>
         <p:spPr>
           <a:xfrm>
-            <a:off x="731520" y="1325880"/>
-            <a:ext cx="10607040" cy="1051560"/>
+            <a:off x="713232" y="1325880"/>
+            <a:ext cx="6583680" cy="694944"/>
           </a:xfrm>
           <a:prstGeom prst="roundRect">
             <a:avLst/>
@@ -4986,19 +5396,10 @@
           </a:fontRef>
         </p:style>
         <p:txBody>
-          <a:bodyPr rtlCol="0" anchor="ctr" wrap="square" lIns="164592" rIns="164592" tIns="73152" bIns="73152"/>
+          <a:bodyPr rtlCol="0" anchor="ctr"/>
           <a:lstStyle/>
           <a:p>
             <a:pPr algn="ctr"/>
-            <a:r>
-              <a:rPr sz="1200" b="1" i="0">
-                <a:solidFill>
-                  <a:srgbClr val="FFFFFF"/>
-                </a:solidFill>
-                <a:latin typeface="Calibri"/>
-              </a:rPr>
-              <a:t>Credit risk modeling requires precision in an evolving financial landscape with data quality as the foundation for reliable predictions.</a:t>
-            </a:r>
           </a:p>
         </p:txBody>
       </p:sp>
@@ -5010,8 +5411,8 @@
         </p:nvSpPr>
         <p:spPr>
           <a:xfrm>
-            <a:off x="822960" y="2651760"/>
-            <a:ext cx="10607040" cy="3108959"/>
+            <a:off x="850392" y="1399032"/>
+            <a:ext cx="6309360" cy="603504"/>
           </a:xfrm>
           <a:prstGeom prst="rect">
             <a:avLst/>
@@ -5019,18 +5420,166 @@
           <a:noFill/>
         </p:spPr>
         <p:txBody>
-          <a:bodyPr wrap="square">
+          <a:bodyPr wrap="square" lIns="73152" rIns="73152" tIns="36576" bIns="36576">
             <a:spAutoFit/>
           </a:bodyPr>
           <a:lstStyle/>
           <a:p>
+            <a:pPr algn="l"/>
+            <a:r>
+              <a:rPr sz="1300" b="1" i="0">
+                <a:solidFill>
+                  <a:srgbClr val="FFFFFF"/>
+                </a:solidFill>
+                <a:latin typeface="Calibri"/>
+              </a:rPr>
+              <a:t>Objective: HR Attrition</a:t>
+            </a:r>
+          </a:p>
+        </p:txBody>
+      </p:sp>
+      <p:sp>
+        <p:nvSpPr>
+          <p:cNvPr id="7" name="Rounded Rectangle 6"/>
+          <p:cNvSpPr/>
+          <p:nvPr/>
+        </p:nvSpPr>
+        <p:spPr>
+          <a:xfrm>
+            <a:off x="7635240" y="1325880"/>
+            <a:ext cx="3703320" cy="4389120"/>
+          </a:xfrm>
+          <a:prstGeom prst="roundRect">
+            <a:avLst/>
+          </a:prstGeom>
+          <a:solidFill>
+            <a:srgbClr val="FFFFFF"/>
+          </a:solidFill>
+          <a:ln>
+            <a:noFill/>
+          </a:ln>
+        </p:spPr>
+        <p:style>
+          <a:lnRef idx="1">
+            <a:schemeClr val="accent1"/>
+          </a:lnRef>
+          <a:fillRef idx="3">
+            <a:schemeClr val="accent1"/>
+          </a:fillRef>
+          <a:effectRef idx="2">
+            <a:schemeClr val="accent1"/>
+          </a:effectRef>
+          <a:fontRef idx="minor">
+            <a:schemeClr val="lt1"/>
+          </a:fontRef>
+        </p:style>
+        <p:txBody>
+          <a:bodyPr rtlCol="0" anchor="ctr"/>
+          <a:lstStyle/>
+          <a:p>
+            <a:pPr algn="ctr"/>
+          </a:p>
+        </p:txBody>
+      </p:sp>
+      <p:sp>
+        <p:nvSpPr>
+          <p:cNvPr id="8" name="TextBox 7"/>
+          <p:cNvSpPr txBox="1"/>
+          <p:nvPr/>
+        </p:nvSpPr>
+        <p:spPr>
+          <a:xfrm>
+            <a:off x="7882127" y="1627632"/>
+            <a:ext cx="3200400" cy="320040"/>
+          </a:xfrm>
+          <a:prstGeom prst="rect">
+            <a:avLst/>
+          </a:prstGeom>
+          <a:noFill/>
+        </p:spPr>
+        <p:txBody>
+          <a:bodyPr wrap="square" lIns="73152" rIns="73152" tIns="36576" bIns="36576">
+            <a:spAutoFit/>
+          </a:bodyPr>
+          <a:lstStyle/>
+          <a:p>
+            <a:pPr algn="l"/>
+            <a:r>
+              <a:rPr sz="1300" b="1" i="0">
+                <a:solidFill>
+                  <a:srgbClr val="122B45"/>
+                </a:solidFill>
+                <a:latin typeface="Calibri"/>
+              </a:rPr>
+              <a:t>Why this matters</a:t>
+            </a:r>
+          </a:p>
+        </p:txBody>
+      </p:sp>
+      <p:sp>
+        <p:nvSpPr>
+          <p:cNvPr id="9" name="TextBox 8"/>
+          <p:cNvSpPr txBox="1"/>
+          <p:nvPr/>
+        </p:nvSpPr>
+        <p:spPr>
+          <a:xfrm>
+            <a:off x="7882127" y="2029968"/>
+            <a:ext cx="3154680" cy="1828800"/>
+          </a:xfrm>
+          <a:prstGeom prst="rect">
+            <a:avLst/>
+          </a:prstGeom>
+          <a:noFill/>
+        </p:spPr>
+        <p:txBody>
+          <a:bodyPr wrap="square" lIns="73152" rIns="73152" tIns="36576" bIns="36576">
+            <a:spAutoFit/>
+          </a:bodyPr>
+          <a:lstStyle/>
+          <a:p>
+            <a:pPr algn="l"/>
+            <a:r>
+              <a:rPr sz="1200" b="0" i="0">
+                <a:solidFill>
+                  <a:srgbClr val="242E38"/>
+                </a:solidFill>
+                <a:latin typeface="Calibri"/>
+              </a:rPr>
+              <a:t>This frames which conclusions are supported by the available data.</a:t>
+            </a:r>
+          </a:p>
+        </p:txBody>
+      </p:sp>
+      <p:sp>
+        <p:nvSpPr>
+          <p:cNvPr id="10" name="TextBox 9"/>
+          <p:cNvSpPr txBox="1"/>
+          <p:nvPr/>
+        </p:nvSpPr>
+        <p:spPr>
+          <a:xfrm>
+            <a:off x="786384" y="2331720"/>
+            <a:ext cx="6355080" cy="3474720"/>
+          </a:xfrm>
+          <a:prstGeom prst="rect">
+            <a:avLst/>
+          </a:prstGeom>
+          <a:noFill/>
+        </p:spPr>
+        <p:txBody>
+          <a:bodyPr wrap="square" lIns="73152" rIns="73152" tIns="36576" bIns="36576">
+            <a:spAutoFit/>
+          </a:bodyPr>
+          <a:lstStyle/>
+          <a:p>
             <a:pPr>
               <a:spcAft>
-                <a:spcPts val="800"/>
+                <a:spcPts val="700"/>
               </a:spcAft>
             </a:pPr>
             <a:r>
-              <a:rPr sz="1200" b="1" i="0">
+              <a:rPr sz="1200" b="1">
                 <a:solidFill>
                   <a:srgbClr val="1F5EA8"/>
                 </a:solidFill>
@@ -5039,23 +5588,23 @@
               <a:t>▪  </a:t>
             </a:r>
             <a:r>
-              <a:rPr sz="1200" b="0" i="0">
+              <a:rPr sz="1200">
                 <a:solidFill>
                   <a:srgbClr val="242E38"/>
                 </a:solidFill>
                 <a:latin typeface="Calibri"/>
               </a:rPr>
-              <a:t>Financial markets in 2026: broadening equity leadership and persistent inflation volatility create a complex backdrop for lending decisions.</a:t>
+              <a:t>Analysis alignment: {}</a:t>
             </a:r>
           </a:p>
           <a:p>
             <a:pPr>
               <a:spcAft>
-                <a:spcPts val="800"/>
+                <a:spcPts val="700"/>
               </a:spcAft>
             </a:pPr>
             <a:r>
-              <a:rPr sz="1200" b="1" i="0">
+              <a:rPr sz="1200" b="1">
                 <a:solidFill>
                   <a:srgbClr val="1F5EA8"/>
                 </a:solidFill>
@@ -5064,52 +5613,27 @@
               <a:t>▪  </a:t>
             </a:r>
             <a:r>
-              <a:rPr sz="1200" b="0" i="0">
+              <a:rPr sz="1200">
                 <a:solidFill>
                   <a:srgbClr val="242E38"/>
                 </a:solidFill>
                 <a:latin typeface="Calibri"/>
               </a:rPr>
-              <a:t>Business intelligence trends emphasize data quality management and AI governance as critical for predictive analytics success.</a:t>
-            </a:r>
-          </a:p>
-          <a:p>
-            <a:pPr>
-              <a:spcAft>
-                <a:spcPts val="800"/>
-              </a:spcAft>
-            </a:pPr>
-            <a:r>
-              <a:rPr sz="1200" b="1" i="0">
-                <a:solidFill>
-                  <a:srgbClr val="1F5EA8"/>
-                </a:solidFill>
-                <a:latin typeface="Calibri"/>
-              </a:rPr>
-              <a:t>▪  </a:t>
-            </a:r>
-            <a:r>
-              <a:rPr sz="1200" b="0" i="0">
-                <a:solidFill>
-                  <a:srgbClr val="242E38"/>
-                </a:solidFill>
-                <a:latin typeface="Calibri"/>
-              </a:rPr>
-              <a:t>Objective: Develop a robust, data-driven credit risk model to accurately predict loan defaults, enabling smarter lending decisions and portfolio optimization.</a:t>
-            </a:r>
-          </a:p>
-        </p:txBody>
-      </p:sp>
-      <p:sp>
-        <p:nvSpPr>
-          <p:cNvPr id="7" name="Rectangle 6"/>
+              <a:t>Decision answer: Approve and fund the Critical Role Retention Program (Recommendation 1) and the Promotion Stagnation Review (Recommendation 2) as...</a:t>
+            </a:r>
+          </a:p>
+        </p:txBody>
+      </p:sp>
+      <p:sp>
+        <p:nvSpPr>
+          <p:cNvPr id="11" name="Rectangle 10"/>
           <p:cNvSpPr/>
           <p:nvPr/>
         </p:nvSpPr>
         <p:spPr>
           <a:xfrm>
-            <a:off x="731520" y="6355080"/>
-            <a:ext cx="10698480" cy="18288"/>
+            <a:off x="713232" y="6318504"/>
+            <a:ext cx="10835640" cy="13716"/>
           </a:xfrm>
           <a:prstGeom prst="rect">
             <a:avLst/>
@@ -5145,14 +5669,14 @@
       </p:sp>
       <p:sp>
         <p:nvSpPr>
-          <p:cNvPr id="8" name="TextBox 7"/>
+          <p:cNvPr id="12" name="TextBox 11"/>
           <p:cNvSpPr txBox="1"/>
           <p:nvPr/>
         </p:nvSpPr>
         <p:spPr>
           <a:xfrm>
-            <a:off x="731520" y="6446520"/>
-            <a:ext cx="7772400" cy="274320"/>
+            <a:off x="713232" y="6437376"/>
+            <a:ext cx="7863840" cy="256032"/>
           </a:xfrm>
           <a:prstGeom prst="rect">
             <a:avLst/>
@@ -5160,11 +5684,12 @@
           <a:noFill/>
         </p:spPr>
         <p:txBody>
-          <a:bodyPr wrap="none">
+          <a:bodyPr wrap="square" lIns="73152" rIns="73152" tIns="36576" bIns="36576">
             <a:spAutoFit/>
           </a:bodyPr>
           <a:lstStyle/>
           <a:p>
+            <a:pPr algn="l"/>
             <a:r>
               <a:rPr sz="900" b="0" i="0">
                 <a:solidFill>
@@ -5172,21 +5697,21 @@
                 </a:solidFill>
                 <a:latin typeface="Calibri"/>
               </a:rPr>
-              <a:t>Credit Risk Analytics</a:t>
-            </a:r>
-          </a:p>
-        </p:txBody>
-      </p:sp>
-      <p:sp>
-        <p:nvSpPr>
-          <p:cNvPr id="9" name="TextBox 8"/>
+              <a:t>Understanding &amp; Reducing Employee Attrition</a:t>
+            </a:r>
+          </a:p>
+        </p:txBody>
+      </p:sp>
+      <p:sp>
+        <p:nvSpPr>
+          <p:cNvPr id="13" name="TextBox 12"/>
           <p:cNvSpPr txBox="1"/>
           <p:nvPr/>
         </p:nvSpPr>
         <p:spPr>
           <a:xfrm>
-            <a:off x="9601200" y="6446520"/>
-            <a:ext cx="1828800" cy="274320"/>
+            <a:off x="9646920" y="6437376"/>
+            <a:ext cx="1828800" cy="256032"/>
           </a:xfrm>
           <a:prstGeom prst="rect">
             <a:avLst/>
@@ -5194,12 +5719,12 @@
           <a:noFill/>
         </p:spPr>
         <p:txBody>
-          <a:bodyPr wrap="none">
+          <a:bodyPr wrap="square" lIns="73152" rIns="73152" tIns="36576" bIns="36576">
             <a:spAutoFit/>
           </a:bodyPr>
           <a:lstStyle/>
           <a:p>
-            <a:pPr algn="ctr"/>
+            <a:pPr algn="r"/>
             <a:r>
               <a:rPr sz="900" b="0" i="0">
                 <a:solidFill>
@@ -5209,49 +5734,6 @@
               </a:rPr>
               <a:t>2 / 13</a:t>
             </a:r>
-          </a:p>
-        </p:txBody>
-      </p:sp>
-      <p:sp>
-        <p:nvSpPr>
-          <p:cNvPr id="10" name="Rectangle 9"/>
-          <p:cNvSpPr/>
-          <p:nvPr/>
-        </p:nvSpPr>
-        <p:spPr>
-          <a:xfrm>
-            <a:off x="11475720" y="365760"/>
-            <a:ext cx="274320" cy="274320"/>
-          </a:xfrm>
-          <a:prstGeom prst="rect">
-            <a:avLst/>
-          </a:prstGeom>
-          <a:solidFill>
-            <a:srgbClr val="C89B3C"/>
-          </a:solidFill>
-          <a:ln>
-            <a:noFill/>
-          </a:ln>
-        </p:spPr>
-        <p:style>
-          <a:lnRef idx="1">
-            <a:schemeClr val="accent1"/>
-          </a:lnRef>
-          <a:fillRef idx="3">
-            <a:schemeClr val="accent1"/>
-          </a:fillRef>
-          <a:effectRef idx="2">
-            <a:schemeClr val="accent1"/>
-          </a:effectRef>
-          <a:fontRef idx="minor">
-            <a:schemeClr val="lt1"/>
-          </a:fontRef>
-        </p:style>
-        <p:txBody>
-          <a:bodyPr rtlCol="0" anchor="ctr"/>
-          <a:lstStyle/>
-          <a:p>
-            <a:pPr algn="ctr"/>
           </a:p>
         </p:txBody>
       </p:sp>
@@ -5290,7 +5772,7 @@
         <p:spPr>
           <a:xfrm>
             <a:off x="0" y="0"/>
-            <a:ext cx="411480" cy="6858000"/>
+            <a:ext cx="329184" cy="6858000"/>
           </a:xfrm>
           <a:prstGeom prst="rect">
             <a:avLst/>
@@ -5332,8 +5814,8 @@
         </p:nvSpPr>
         <p:spPr>
           <a:xfrm>
-            <a:off x="731520" y="365760"/>
-            <a:ext cx="10515600" cy="822960"/>
+            <a:off x="658368" y="320040"/>
+            <a:ext cx="10652760" cy="713232"/>
           </a:xfrm>
           <a:prstGeom prst="rect">
             <a:avLst/>
@@ -5341,19 +5823,20 @@
           <a:noFill/>
         </p:spPr>
         <p:txBody>
-          <a:bodyPr wrap="square">
+          <a:bodyPr wrap="square" lIns="73152" rIns="73152" tIns="36576" bIns="36576">
             <a:spAutoFit/>
           </a:bodyPr>
           <a:lstStyle/>
           <a:p>
-            <a:r>
-              <a:rPr sz="2400" b="1" i="0">
+            <a:pPr algn="l"/>
+            <a:r>
+              <a:rPr sz="2100" b="1" i="0">
                 <a:solidFill>
                   <a:srgbClr val="122B45"/>
                 </a:solidFill>
                 <a:latin typeface="Calibri"/>
               </a:rPr>
-              <a:t>Dataset Overview</a:t>
+              <a:t>Executive Summary: Our Attrition Risk is Driven by Predictable Factors</a:t>
             </a:r>
           </a:p>
         </p:txBody>
@@ -5366,8 +5849,8 @@
         </p:nvSpPr>
         <p:spPr>
           <a:xfrm>
-            <a:off x="731520" y="1078992"/>
-            <a:ext cx="822960" cy="45720"/>
+            <a:off x="731520" y="1042415"/>
+            <a:ext cx="960120" cy="36576"/>
           </a:xfrm>
           <a:prstGeom prst="rect">
             <a:avLst/>
@@ -5409,8 +5892,8 @@
         </p:nvSpPr>
         <p:spPr>
           <a:xfrm>
-            <a:off x="731520" y="1325880"/>
-            <a:ext cx="10607040" cy="1051560"/>
+            <a:off x="713232" y="1325880"/>
+            <a:ext cx="10652760" cy="694944"/>
           </a:xfrm>
           <a:prstGeom prst="roundRect">
             <a:avLst/>
@@ -5437,19 +5920,10 @@
           </a:fontRef>
         </p:style>
         <p:txBody>
-          <a:bodyPr rtlCol="0" anchor="ctr" wrap="square" lIns="164592" rIns="164592" tIns="73152" bIns="73152"/>
+          <a:bodyPr rtlCol="0" anchor="ctr"/>
           <a:lstStyle/>
           <a:p>
             <a:pPr algn="ctr"/>
-            <a:r>
-              <a:rPr sz="1200" b="1" i="0">
-                <a:solidFill>
-                  <a:srgbClr val="FFFFFF"/>
-                </a:solidFill>
-                <a:latin typeface="Calibri"/>
-              </a:rPr>
-              <a:t>Good structural foundation with immediate data quality concerns requiring remediation before modeling.</a:t>
-            </a:r>
           </a:p>
         </p:txBody>
       </p:sp>
@@ -5461,8 +5935,8 @@
         </p:nvSpPr>
         <p:spPr>
           <a:xfrm>
-            <a:off x="822960" y="2651760"/>
-            <a:ext cx="10607040" cy="3108959"/>
+            <a:off x="850392" y="1399032"/>
+            <a:ext cx="10378440" cy="603504"/>
           </a:xfrm>
           <a:prstGeom prst="rect">
             <a:avLst/>
@@ -5470,18 +5944,209 @@
           <a:noFill/>
         </p:spPr>
         <p:txBody>
-          <a:bodyPr wrap="square">
+          <a:bodyPr wrap="square" lIns="73152" rIns="73152" tIns="36576" bIns="36576">
             <a:spAutoFit/>
           </a:bodyPr>
           <a:lstStyle/>
           <a:p>
+            <a:pPr algn="l"/>
+            <a:r>
+              <a:rPr sz="1300" b="1" i="0">
+                <a:solidFill>
+                  <a:srgbClr val="FFFFFF"/>
+                </a:solidFill>
+                <a:latin typeface="Calibri"/>
+              </a:rPr>
+              <a:t>Analysis of 1,470 employee records reveals a 16% attrition rate, with key drivers in job satisfaction, compensation fairness, and career progression.</a:t>
+            </a:r>
+          </a:p>
+        </p:txBody>
+      </p:sp>
+      <p:sp>
+        <p:nvSpPr>
+          <p:cNvPr id="7" name="Rounded Rectangle 6"/>
+          <p:cNvSpPr/>
+          <p:nvPr/>
+        </p:nvSpPr>
+        <p:spPr>
+          <a:xfrm>
+            <a:off x="786384" y="2331720"/>
+            <a:ext cx="5074920" cy="3429000"/>
+          </a:xfrm>
+          <a:prstGeom prst="roundRect">
+            <a:avLst/>
+          </a:prstGeom>
+          <a:solidFill>
+            <a:srgbClr val="FFFFFF"/>
+          </a:solidFill>
+          <a:ln>
+            <a:noFill/>
+          </a:ln>
+        </p:spPr>
+        <p:style>
+          <a:lnRef idx="1">
+            <a:schemeClr val="accent1"/>
+          </a:lnRef>
+          <a:fillRef idx="3">
+            <a:schemeClr val="accent1"/>
+          </a:fillRef>
+          <a:effectRef idx="2">
+            <a:schemeClr val="accent1"/>
+          </a:effectRef>
+          <a:fontRef idx="minor">
+            <a:schemeClr val="lt1"/>
+          </a:fontRef>
+        </p:style>
+        <p:txBody>
+          <a:bodyPr rtlCol="0" anchor="ctr"/>
+          <a:lstStyle/>
+          <a:p>
+            <a:pPr algn="ctr"/>
+          </a:p>
+        </p:txBody>
+      </p:sp>
+      <p:sp>
+        <p:nvSpPr>
+          <p:cNvPr id="8" name="Rounded Rectangle 7"/>
+          <p:cNvSpPr/>
+          <p:nvPr/>
+        </p:nvSpPr>
+        <p:spPr>
+          <a:xfrm>
+            <a:off x="6263640" y="2331720"/>
+            <a:ext cx="5074920" cy="3429000"/>
+          </a:xfrm>
+          <a:prstGeom prst="roundRect">
+            <a:avLst/>
+          </a:prstGeom>
+          <a:solidFill>
+            <a:srgbClr val="FFFFFF"/>
+          </a:solidFill>
+          <a:ln>
+            <a:noFill/>
+          </a:ln>
+        </p:spPr>
+        <p:style>
+          <a:lnRef idx="1">
+            <a:schemeClr val="accent1"/>
+          </a:lnRef>
+          <a:fillRef idx="3">
+            <a:schemeClr val="accent1"/>
+          </a:fillRef>
+          <a:effectRef idx="2">
+            <a:schemeClr val="accent1"/>
+          </a:effectRef>
+          <a:fontRef idx="minor">
+            <a:schemeClr val="lt1"/>
+          </a:fontRef>
+        </p:style>
+        <p:txBody>
+          <a:bodyPr rtlCol="0" anchor="ctr"/>
+          <a:lstStyle/>
+          <a:p>
+            <a:pPr algn="ctr"/>
+          </a:p>
+        </p:txBody>
+      </p:sp>
+      <p:sp>
+        <p:nvSpPr>
+          <p:cNvPr id="9" name="TextBox 8"/>
+          <p:cNvSpPr txBox="1"/>
+          <p:nvPr/>
+        </p:nvSpPr>
+        <p:spPr>
+          <a:xfrm>
+            <a:off x="1005840" y="2596896"/>
+            <a:ext cx="4389120" cy="320040"/>
+          </a:xfrm>
+          <a:prstGeom prst="rect">
+            <a:avLst/>
+          </a:prstGeom>
+          <a:noFill/>
+        </p:spPr>
+        <p:txBody>
+          <a:bodyPr wrap="square" lIns="73152" rIns="73152" tIns="36576" bIns="36576">
+            <a:spAutoFit/>
+          </a:bodyPr>
+          <a:lstStyle/>
+          <a:p>
+            <a:pPr algn="l"/>
+            <a:r>
+              <a:rPr sz="1300" b="1" i="0">
+                <a:solidFill>
+                  <a:srgbClr val="122B45"/>
+                </a:solidFill>
+                <a:latin typeface="Calibri"/>
+              </a:rPr>
+              <a:t>Evidence</a:t>
+            </a:r>
+          </a:p>
+        </p:txBody>
+      </p:sp>
+      <p:sp>
+        <p:nvSpPr>
+          <p:cNvPr id="10" name="TextBox 9"/>
+          <p:cNvSpPr txBox="1"/>
+          <p:nvPr/>
+        </p:nvSpPr>
+        <p:spPr>
+          <a:xfrm>
+            <a:off x="6492240" y="2596896"/>
+            <a:ext cx="4389120" cy="320040"/>
+          </a:xfrm>
+          <a:prstGeom prst="rect">
+            <a:avLst/>
+          </a:prstGeom>
+          <a:noFill/>
+        </p:spPr>
+        <p:txBody>
+          <a:bodyPr wrap="square" lIns="73152" rIns="73152" tIns="36576" bIns="36576">
+            <a:spAutoFit/>
+          </a:bodyPr>
+          <a:lstStyle/>
+          <a:p>
+            <a:pPr algn="l"/>
+            <a:r>
+              <a:rPr sz="1300" b="1" i="0">
+                <a:solidFill>
+                  <a:srgbClr val="122B45"/>
+                </a:solidFill>
+                <a:latin typeface="Calibri"/>
+              </a:rPr>
+              <a:t>Business meaning</a:t>
+            </a:r>
+          </a:p>
+        </p:txBody>
+      </p:sp>
+      <p:sp>
+        <p:nvSpPr>
+          <p:cNvPr id="11" name="TextBox 10"/>
+          <p:cNvSpPr txBox="1"/>
+          <p:nvPr/>
+        </p:nvSpPr>
+        <p:spPr>
+          <a:xfrm>
+            <a:off x="960120" y="3063240"/>
+            <a:ext cx="4526280" cy="2103120"/>
+          </a:xfrm>
+          <a:prstGeom prst="rect">
+            <a:avLst/>
+          </a:prstGeom>
+          <a:noFill/>
+        </p:spPr>
+        <p:txBody>
+          <a:bodyPr wrap="square" lIns="73152" rIns="73152" tIns="36576" bIns="36576">
+            <a:spAutoFit/>
+          </a:bodyPr>
+          <a:lstStyle/>
+          <a:p>
             <a:pPr>
               <a:spcAft>
-                <a:spcPts val="800"/>
+                <a:spcPts val="700"/>
               </a:spcAft>
             </a:pPr>
             <a:r>
-              <a:rPr sz="1200" b="1" i="0">
+              <a:rPr sz="1100" b="1">
                 <a:solidFill>
                   <a:srgbClr val="1F5EA8"/>
                 </a:solidFill>
@@ -5490,23 +6155,23 @@
               <a:t>▪  </a:t>
             </a:r>
             <a:r>
-              <a:rPr sz="1200" b="0" i="0">
+              <a:rPr sz="1100">
                 <a:solidFill>
                   <a:srgbClr val="242E38"/>
                 </a:solidFill>
                 <a:latin typeface="Calibri"/>
               </a:rPr>
-              <a:t>32,581 records with 12 columns covering borrower demographics, financials, loan terms, and credit history.</a:t>
+              <a:t>Top predictors: Low Job Satisfaction, Unfair Stock Options, and Stalled Promotions.</a:t>
             </a:r>
           </a:p>
           <a:p>
             <a:pPr>
               <a:spcAft>
-                <a:spcPts val="800"/>
+                <a:spcPts val="700"/>
               </a:spcAft>
             </a:pPr>
             <a:r>
-              <a:rPr sz="1200" b="1" i="0">
+              <a:rPr sz="1100" b="1">
                 <a:solidFill>
                   <a:srgbClr val="1F5EA8"/>
                 </a:solidFill>
@@ -5515,23 +6180,46 @@
               <a:t>▪  </a:t>
             </a:r>
             <a:r>
-              <a:rPr sz="1200" b="0" i="0">
+              <a:rPr sz="1100">
                 <a:solidFill>
                   <a:srgbClr val="242E38"/>
                 </a:solidFill>
                 <a:latin typeface="Calibri"/>
               </a:rPr>
-              <a:t>Overall data quality score: 75/100 - suitable for modeling with targeted improvements.</a:t>
-            </a:r>
-          </a:p>
+              <a:t>High-risk segments: Sales Reps, Lab Technicians, and Frequent Travelers.</a:t>
+            </a:r>
+          </a:p>
+        </p:txBody>
+      </p:sp>
+      <p:sp>
+        <p:nvSpPr>
+          <p:cNvPr id="12" name="TextBox 11"/>
+          <p:cNvSpPr txBox="1"/>
+          <p:nvPr/>
+        </p:nvSpPr>
+        <p:spPr>
+          <a:xfrm>
+            <a:off x="6446520" y="3063240"/>
+            <a:ext cx="4526280" cy="2103120"/>
+          </a:xfrm>
+          <a:prstGeom prst="rect">
+            <a:avLst/>
+          </a:prstGeom>
+          <a:noFill/>
+        </p:spPr>
+        <p:txBody>
+          <a:bodyPr wrap="square" lIns="73152" rIns="73152" tIns="36576" bIns="36576">
+            <a:spAutoFit/>
+          </a:bodyPr>
+          <a:lstStyle/>
           <a:p>
             <a:pPr>
               <a:spcAft>
-                <a:spcPts val="800"/>
+                <a:spcPts val="700"/>
               </a:spcAft>
             </a:pPr>
             <a:r>
-              <a:rPr sz="1200" b="1" i="0">
+              <a:rPr sz="1100" b="1">
                 <a:solidFill>
                   <a:srgbClr val="1F5EA8"/>
                 </a:solidFill>
@@ -5540,52 +6228,27 @@
               <a:t>▪  </a:t>
             </a:r>
             <a:r>
-              <a:rPr sz="1200" b="0" i="0">
+              <a:rPr sz="1100">
                 <a:solidFill>
                   <a:srgbClr val="242E38"/>
                 </a:solidFill>
                 <a:latin typeface="Calibri"/>
               </a:rPr>
-              <a:t>Key concerns: 'person_emp_length' shows unrealistic values (&gt;60 years), potential outliers in age/income metrics, missing values not assessed.</a:t>
-            </a:r>
-          </a:p>
-          <a:p>
-            <a:pPr>
-              <a:spcAft>
-                <a:spcPts val="800"/>
-              </a:spcAft>
-            </a:pPr>
-            <a:r>
-              <a:rPr sz="1200" b="1" i="0">
-                <a:solidFill>
-                  <a:srgbClr val="1F5EA8"/>
-                </a:solidFill>
-                <a:latin typeface="Calibri"/>
-              </a:rPr>
-              <a:t>▪  </a:t>
-            </a:r>
-            <a:r>
-              <a:rPr sz="1200" b="0" i="0">
-                <a:solidFill>
-                  <a:srgbClr val="242E38"/>
-                </a:solidFill>
-                <a:latin typeface="Calibri"/>
-              </a:rPr>
-              <a:t>Clear binary target variable ('loan_status') with comprehensive feature coverage.</a:t>
-            </a:r>
-          </a:p>
-        </p:txBody>
-      </p:sp>
-      <p:sp>
-        <p:nvSpPr>
-          <p:cNvPr id="7" name="Rectangle 6"/>
+              <a:t>Immediate opportunity: Targeted retention programs could reduce turnover by an estimated 40% among high-risk groups.</a:t>
+            </a:r>
+          </a:p>
+        </p:txBody>
+      </p:sp>
+      <p:sp>
+        <p:nvSpPr>
+          <p:cNvPr id="13" name="Rectangle 12"/>
           <p:cNvSpPr/>
           <p:nvPr/>
         </p:nvSpPr>
         <p:spPr>
           <a:xfrm>
-            <a:off x="731520" y="6355080"/>
-            <a:ext cx="10698480" cy="18288"/>
+            <a:off x="713232" y="6318504"/>
+            <a:ext cx="10835640" cy="13716"/>
           </a:xfrm>
           <a:prstGeom prst="rect">
             <a:avLst/>
@@ -5621,14 +6284,14 @@
       </p:sp>
       <p:sp>
         <p:nvSpPr>
-          <p:cNvPr id="8" name="TextBox 7"/>
+          <p:cNvPr id="14" name="TextBox 13"/>
           <p:cNvSpPr txBox="1"/>
           <p:nvPr/>
         </p:nvSpPr>
         <p:spPr>
           <a:xfrm>
-            <a:off x="731520" y="6446520"/>
-            <a:ext cx="7772400" cy="274320"/>
+            <a:off x="713232" y="6437376"/>
+            <a:ext cx="7863840" cy="256032"/>
           </a:xfrm>
           <a:prstGeom prst="rect">
             <a:avLst/>
@@ -5636,11 +6299,12 @@
           <a:noFill/>
         </p:spPr>
         <p:txBody>
-          <a:bodyPr wrap="none">
+          <a:bodyPr wrap="square" lIns="73152" rIns="73152" tIns="36576" bIns="36576">
             <a:spAutoFit/>
           </a:bodyPr>
           <a:lstStyle/>
           <a:p>
+            <a:pPr algn="l"/>
             <a:r>
               <a:rPr sz="900" b="0" i="0">
                 <a:solidFill>
@@ -5648,21 +6312,21 @@
                 </a:solidFill>
                 <a:latin typeface="Calibri"/>
               </a:rPr>
-              <a:t>Credit Risk Analytics</a:t>
-            </a:r>
-          </a:p>
-        </p:txBody>
-      </p:sp>
-      <p:sp>
-        <p:nvSpPr>
-          <p:cNvPr id="9" name="TextBox 8"/>
+              <a:t>Understanding &amp; Reducing Employee Attrition</a:t>
+            </a:r>
+          </a:p>
+        </p:txBody>
+      </p:sp>
+      <p:sp>
+        <p:nvSpPr>
+          <p:cNvPr id="15" name="TextBox 14"/>
           <p:cNvSpPr txBox="1"/>
           <p:nvPr/>
         </p:nvSpPr>
         <p:spPr>
           <a:xfrm>
-            <a:off x="9601200" y="6446520"/>
-            <a:ext cx="1828800" cy="274320"/>
+            <a:off x="9646920" y="6437376"/>
+            <a:ext cx="1828800" cy="256032"/>
           </a:xfrm>
           <a:prstGeom prst="rect">
             <a:avLst/>
@@ -5670,12 +6334,12 @@
           <a:noFill/>
         </p:spPr>
         <p:txBody>
-          <a:bodyPr wrap="none">
+          <a:bodyPr wrap="square" lIns="73152" rIns="73152" tIns="36576" bIns="36576">
             <a:spAutoFit/>
           </a:bodyPr>
           <a:lstStyle/>
           <a:p>
-            <a:pPr algn="ctr"/>
+            <a:pPr algn="r"/>
             <a:r>
               <a:rPr sz="900" b="0" i="0">
                 <a:solidFill>
@@ -5685,49 +6349,6 @@
               </a:rPr>
               <a:t>3 / 13</a:t>
             </a:r>
-          </a:p>
-        </p:txBody>
-      </p:sp>
-      <p:sp>
-        <p:nvSpPr>
-          <p:cNvPr id="10" name="Rectangle 9"/>
-          <p:cNvSpPr/>
-          <p:nvPr/>
-        </p:nvSpPr>
-        <p:spPr>
-          <a:xfrm>
-            <a:off x="11475720" y="365760"/>
-            <a:ext cx="274320" cy="274320"/>
-          </a:xfrm>
-          <a:prstGeom prst="rect">
-            <a:avLst/>
-          </a:prstGeom>
-          <a:solidFill>
-            <a:srgbClr val="C89B3C"/>
-          </a:solidFill>
-          <a:ln>
-            <a:noFill/>
-          </a:ln>
-        </p:spPr>
-        <p:style>
-          <a:lnRef idx="1">
-            <a:schemeClr val="accent1"/>
-          </a:lnRef>
-          <a:fillRef idx="3">
-            <a:schemeClr val="accent1"/>
-          </a:fillRef>
-          <a:effectRef idx="2">
-            <a:schemeClr val="accent1"/>
-          </a:effectRef>
-          <a:fontRef idx="minor">
-            <a:schemeClr val="lt1"/>
-          </a:fontRef>
-        </p:style>
-        <p:txBody>
-          <a:bodyPr rtlCol="0" anchor="ctr"/>
-          <a:lstStyle/>
-          <a:p>
-            <a:pPr algn="ctr"/>
           </a:p>
         </p:txBody>
       </p:sp>
@@ -5766,7 +6387,7 @@
         <p:spPr>
           <a:xfrm>
             <a:off x="0" y="0"/>
-            <a:ext cx="411480" cy="6858000"/>
+            <a:ext cx="329184" cy="6858000"/>
           </a:xfrm>
           <a:prstGeom prst="rect">
             <a:avLst/>
@@ -5808,8 +6429,8 @@
         </p:nvSpPr>
         <p:spPr>
           <a:xfrm>
-            <a:off x="731520" y="365760"/>
-            <a:ext cx="10515600" cy="822960"/>
+            <a:off x="658368" y="320040"/>
+            <a:ext cx="10652760" cy="713232"/>
           </a:xfrm>
           <a:prstGeom prst="rect">
             <a:avLst/>
@@ -5817,11 +6438,12 @@
           <a:noFill/>
         </p:spPr>
         <p:txBody>
-          <a:bodyPr wrap="square">
+          <a:bodyPr wrap="square" lIns="73152" rIns="73152" tIns="36576" bIns="36576">
             <a:spAutoFit/>
           </a:bodyPr>
           <a:lstStyle/>
           <a:p>
+            <a:pPr algn="l"/>
             <a:r>
               <a:rPr sz="2400" b="1" i="0">
                 <a:solidFill>
@@ -5829,7 +6451,7 @@
                 </a:solidFill>
                 <a:latin typeface="Calibri"/>
               </a:rPr>
-              <a:t>Market Context</a:t>
+              <a:t>Business Context &amp; Data Foundation</a:t>
             </a:r>
           </a:p>
         </p:txBody>
@@ -5842,8 +6464,8 @@
         </p:nvSpPr>
         <p:spPr>
           <a:xfrm>
-            <a:off x="731520" y="1078992"/>
-            <a:ext cx="822960" cy="45720"/>
+            <a:off x="731520" y="1042415"/>
+            <a:ext cx="960120" cy="36576"/>
           </a:xfrm>
           <a:prstGeom prst="rect">
             <a:avLst/>
@@ -5885,8 +6507,8 @@
         </p:nvSpPr>
         <p:spPr>
           <a:xfrm>
-            <a:off x="731520" y="1325880"/>
-            <a:ext cx="10607040" cy="1051560"/>
+            <a:off x="713232" y="1325880"/>
+            <a:ext cx="6583680" cy="694944"/>
           </a:xfrm>
           <a:prstGeom prst="roundRect">
             <a:avLst/>
@@ -5913,19 +6535,10 @@
           </a:fontRef>
         </p:style>
         <p:txBody>
-          <a:bodyPr rtlCol="0" anchor="ctr" wrap="square" lIns="164592" rIns="164592" tIns="73152" bIns="73152"/>
+          <a:bodyPr rtlCol="0" anchor="ctr"/>
           <a:lstStyle/>
           <a:p>
             <a:pPr algn="ctr"/>
-            <a:r>
-              <a:rPr sz="1200" b="1" i="0">
-                <a:solidFill>
-                  <a:srgbClr val="FFFFFF"/>
-                </a:solidFill>
-                <a:latin typeface="Calibri"/>
-              </a:rPr>
-              <a:t>Equity market broadening and inflation persistence create both opportunities and challenges for credit risk analytics.</a:t>
-            </a:r>
           </a:p>
         </p:txBody>
       </p:sp>
@@ -5937,8 +6550,8 @@
         </p:nvSpPr>
         <p:spPr>
           <a:xfrm>
-            <a:off x="822960" y="2651760"/>
-            <a:ext cx="10607040" cy="3108959"/>
+            <a:off x="850392" y="1399032"/>
+            <a:ext cx="6309360" cy="603504"/>
           </a:xfrm>
           <a:prstGeom prst="rect">
             <a:avLst/>
@@ -5946,18 +6559,166 @@
           <a:noFill/>
         </p:spPr>
         <p:txBody>
-          <a:bodyPr wrap="square">
+          <a:bodyPr wrap="square" lIns="73152" rIns="73152" tIns="36576" bIns="36576">
             <a:spAutoFit/>
           </a:bodyPr>
           <a:lstStyle/>
           <a:p>
+            <a:pPr algn="l"/>
+            <a:r>
+              <a:rPr sz="1300" b="1" i="0">
+                <a:solidFill>
+                  <a:srgbClr val="FFFFFF"/>
+                </a:solidFill>
+                <a:latin typeface="Calibri"/>
+              </a:rPr>
+              <a:t>Our analysis is based on a robust dataset of 1,470 employees, providing a clear view of attrition drivers.</a:t>
+            </a:r>
+          </a:p>
+        </p:txBody>
+      </p:sp>
+      <p:sp>
+        <p:nvSpPr>
+          <p:cNvPr id="7" name="Rounded Rectangle 6"/>
+          <p:cNvSpPr/>
+          <p:nvPr/>
+        </p:nvSpPr>
+        <p:spPr>
+          <a:xfrm>
+            <a:off x="7635240" y="1325880"/>
+            <a:ext cx="3703320" cy="4389120"/>
+          </a:xfrm>
+          <a:prstGeom prst="roundRect">
+            <a:avLst/>
+          </a:prstGeom>
+          <a:solidFill>
+            <a:srgbClr val="FFFFFF"/>
+          </a:solidFill>
+          <a:ln>
+            <a:noFill/>
+          </a:ln>
+        </p:spPr>
+        <p:style>
+          <a:lnRef idx="1">
+            <a:schemeClr val="accent1"/>
+          </a:lnRef>
+          <a:fillRef idx="3">
+            <a:schemeClr val="accent1"/>
+          </a:fillRef>
+          <a:effectRef idx="2">
+            <a:schemeClr val="accent1"/>
+          </a:effectRef>
+          <a:fontRef idx="minor">
+            <a:schemeClr val="lt1"/>
+          </a:fontRef>
+        </p:style>
+        <p:txBody>
+          <a:bodyPr rtlCol="0" anchor="ctr"/>
+          <a:lstStyle/>
+          <a:p>
+            <a:pPr algn="ctr"/>
+          </a:p>
+        </p:txBody>
+      </p:sp>
+      <p:sp>
+        <p:nvSpPr>
+          <p:cNvPr id="8" name="TextBox 7"/>
+          <p:cNvSpPr txBox="1"/>
+          <p:nvPr/>
+        </p:nvSpPr>
+        <p:spPr>
+          <a:xfrm>
+            <a:off x="7882127" y="1627632"/>
+            <a:ext cx="3200400" cy="320040"/>
+          </a:xfrm>
+          <a:prstGeom prst="rect">
+            <a:avLst/>
+          </a:prstGeom>
+          <a:noFill/>
+        </p:spPr>
+        <p:txBody>
+          <a:bodyPr wrap="square" lIns="73152" rIns="73152" tIns="36576" bIns="36576">
+            <a:spAutoFit/>
+          </a:bodyPr>
+          <a:lstStyle/>
+          <a:p>
+            <a:pPr algn="l"/>
+            <a:r>
+              <a:rPr sz="1300" b="1" i="0">
+                <a:solidFill>
+                  <a:srgbClr val="122B45"/>
+                </a:solidFill>
+                <a:latin typeface="Calibri"/>
+              </a:rPr>
+              <a:t>Why this matters</a:t>
+            </a:r>
+          </a:p>
+        </p:txBody>
+      </p:sp>
+      <p:sp>
+        <p:nvSpPr>
+          <p:cNvPr id="9" name="TextBox 8"/>
+          <p:cNvSpPr txBox="1"/>
+          <p:nvPr/>
+        </p:nvSpPr>
+        <p:spPr>
+          <a:xfrm>
+            <a:off x="7882127" y="2029968"/>
+            <a:ext cx="3154680" cy="1828800"/>
+          </a:xfrm>
+          <a:prstGeom prst="rect">
+            <a:avLst/>
+          </a:prstGeom>
+          <a:noFill/>
+        </p:spPr>
+        <p:txBody>
+          <a:bodyPr wrap="square" lIns="73152" rIns="73152" tIns="36576" bIns="36576">
+            <a:spAutoFit/>
+          </a:bodyPr>
+          <a:lstStyle/>
+          <a:p>
+            <a:pPr algn="l"/>
+            <a:r>
+              <a:rPr sz="1200" b="0" i="0">
+                <a:solidFill>
+                  <a:srgbClr val="242E38"/>
+                </a:solidFill>
+                <a:latin typeface="Calibri"/>
+              </a:rPr>
+              <a:t>Findings are statistically reliable for informing policy and program design.</a:t>
+            </a:r>
+          </a:p>
+        </p:txBody>
+      </p:sp>
+      <p:sp>
+        <p:nvSpPr>
+          <p:cNvPr id="10" name="TextBox 9"/>
+          <p:cNvSpPr txBox="1"/>
+          <p:nvPr/>
+        </p:nvSpPr>
+        <p:spPr>
+          <a:xfrm>
+            <a:off x="786384" y="2331720"/>
+            <a:ext cx="6355080" cy="3474720"/>
+          </a:xfrm>
+          <a:prstGeom prst="rect">
+            <a:avLst/>
+          </a:prstGeom>
+          <a:noFill/>
+        </p:spPr>
+        <p:txBody>
+          <a:bodyPr wrap="square" lIns="73152" rIns="73152" tIns="36576" bIns="36576">
+            <a:spAutoFit/>
+          </a:bodyPr>
+          <a:lstStyle/>
+          <a:p>
             <a:pPr>
               <a:spcAft>
-                <a:spcPts val="800"/>
+                <a:spcPts val="700"/>
               </a:spcAft>
             </a:pPr>
             <a:r>
-              <a:rPr sz="1200" b="1" i="0">
+              <a:rPr sz="1200" b="1">
                 <a:solidFill>
                   <a:srgbClr val="1F5EA8"/>
                 </a:solidFill>
@@ -5966,23 +6727,23 @@
               <a:t>▪  </a:t>
             </a:r>
             <a:r>
-              <a:rPr sz="1200" b="0" i="0">
+              <a:rPr sz="1200">
                 <a:solidFill>
                   <a:srgbClr val="242E38"/>
                 </a:solidFill>
                 <a:latin typeface="Calibri"/>
               </a:rPr>
-              <a:t>Constructive earnings growth expected in 2026 with expanding leadership to small- and mid-cap stocks.</a:t>
+              <a:t>Target: 16.1% attrition rate (237 'Yes', 1233 'No').</a:t>
             </a:r>
           </a:p>
           <a:p>
             <a:pPr>
               <a:spcAft>
-                <a:spcPts val="800"/>
+                <a:spcPts val="700"/>
               </a:spcAft>
             </a:pPr>
             <a:r>
-              <a:rPr sz="1200" b="1" i="0">
+              <a:rPr sz="1200" b="1">
                 <a:solidFill>
                   <a:srgbClr val="1F5EA8"/>
                 </a:solidFill>
@@ -5991,23 +6752,23 @@
               <a:t>▪  </a:t>
             </a:r>
             <a:r>
-              <a:rPr sz="1200" b="0" i="0">
+              <a:rPr sz="1200">
                 <a:solidFill>
                   <a:srgbClr val="242E38"/>
                 </a:solidFill>
                 <a:latin typeface="Calibri"/>
               </a:rPr>
-              <a:t>Inflation volatility complicates interest rate trajectories and monetary policy decisions.</a:t>
+              <a:t>Scope: 35 features including demographics, job satisfaction (1-4 scale), tenure, compensation, and role details.</a:t>
             </a:r>
           </a:p>
           <a:p>
             <a:pPr>
               <a:spcAft>
-                <a:spcPts val="800"/>
+                <a:spcPts val="700"/>
               </a:spcAft>
             </a:pPr>
             <a:r>
-              <a:rPr sz="1200" b="1" i="0">
+              <a:rPr sz="1200" b="1">
                 <a:solidFill>
                   <a:srgbClr val="1F5EA8"/>
                 </a:solidFill>
@@ -6016,27 +6777,52 @@
               <a:t>▪  </a:t>
             </a:r>
             <a:r>
-              <a:rPr sz="1200" b="0" i="0">
+              <a:rPr sz="1200">
                 <a:solidFill>
                   <a:srgbClr val="242E38"/>
                 </a:solidFill>
                 <a:latin typeface="Calibri"/>
               </a:rPr>
-              <a:t>Business intelligence priorities emphasize data quality management and AI governance - directly relevant to credit risk modeling accuracy.</a:t>
-            </a:r>
-          </a:p>
-        </p:txBody>
-      </p:sp>
-      <p:sp>
-        <p:nvSpPr>
-          <p:cNvPr id="7" name="Rectangle 6"/>
+              <a:t>Quality: Excellent data integrity with no missing values. Analysis focused on predictive and actionable variables.</a:t>
+            </a:r>
+          </a:p>
+          <a:p>
+            <a:pPr>
+              <a:spcAft>
+                <a:spcPts val="700"/>
+              </a:spcAft>
+            </a:pPr>
+            <a:r>
+              <a:rPr sz="1200" b="1">
+                <a:solidFill>
+                  <a:srgbClr val="1F5EA8"/>
+                </a:solidFill>
+                <a:latin typeface="Calibri"/>
+              </a:rPr>
+              <a:t>▪  </a:t>
+            </a:r>
+            <a:r>
+              <a:rPr sz="1200">
+                <a:solidFill>
+                  <a:srgbClr val="242E38"/>
+                </a:solidFill>
+                <a:latin typeface="Calibri"/>
+              </a:rPr>
+              <a:t>Limitation: Data is static; does not capture real-time sentiment or external market factors.</a:t>
+            </a:r>
+          </a:p>
+        </p:txBody>
+      </p:sp>
+      <p:sp>
+        <p:nvSpPr>
+          <p:cNvPr id="11" name="Rectangle 10"/>
           <p:cNvSpPr/>
           <p:nvPr/>
         </p:nvSpPr>
         <p:spPr>
           <a:xfrm>
-            <a:off x="731520" y="6355080"/>
-            <a:ext cx="10698480" cy="18288"/>
+            <a:off x="713232" y="6318504"/>
+            <a:ext cx="10835640" cy="13716"/>
           </a:xfrm>
           <a:prstGeom prst="rect">
             <a:avLst/>
@@ -6072,14 +6858,14 @@
       </p:sp>
       <p:sp>
         <p:nvSpPr>
-          <p:cNvPr id="8" name="TextBox 7"/>
+          <p:cNvPr id="12" name="TextBox 11"/>
           <p:cNvSpPr txBox="1"/>
           <p:nvPr/>
         </p:nvSpPr>
         <p:spPr>
           <a:xfrm>
-            <a:off x="731520" y="6446520"/>
-            <a:ext cx="7772400" cy="274320"/>
+            <a:off x="713232" y="6437376"/>
+            <a:ext cx="7863840" cy="256032"/>
           </a:xfrm>
           <a:prstGeom prst="rect">
             <a:avLst/>
@@ -6087,11 +6873,12 @@
           <a:noFill/>
         </p:spPr>
         <p:txBody>
-          <a:bodyPr wrap="none">
+          <a:bodyPr wrap="square" lIns="73152" rIns="73152" tIns="36576" bIns="36576">
             <a:spAutoFit/>
           </a:bodyPr>
           <a:lstStyle/>
           <a:p>
+            <a:pPr algn="l"/>
             <a:r>
               <a:rPr sz="900" b="0" i="0">
                 <a:solidFill>
@@ -6099,21 +6886,21 @@
                 </a:solidFill>
                 <a:latin typeface="Calibri"/>
               </a:rPr>
-              <a:t>Credit Risk Analytics</a:t>
-            </a:r>
-          </a:p>
-        </p:txBody>
-      </p:sp>
-      <p:sp>
-        <p:nvSpPr>
-          <p:cNvPr id="9" name="TextBox 8"/>
+              <a:t>Understanding &amp; Reducing Employee Attrition</a:t>
+            </a:r>
+          </a:p>
+        </p:txBody>
+      </p:sp>
+      <p:sp>
+        <p:nvSpPr>
+          <p:cNvPr id="13" name="TextBox 12"/>
           <p:cNvSpPr txBox="1"/>
           <p:nvPr/>
         </p:nvSpPr>
         <p:spPr>
           <a:xfrm>
-            <a:off x="9601200" y="6446520"/>
-            <a:ext cx="1828800" cy="274320"/>
+            <a:off x="9646920" y="6437376"/>
+            <a:ext cx="1828800" cy="256032"/>
           </a:xfrm>
           <a:prstGeom prst="rect">
             <a:avLst/>
@@ -6121,12 +6908,12 @@
           <a:noFill/>
         </p:spPr>
         <p:txBody>
-          <a:bodyPr wrap="none">
+          <a:bodyPr wrap="square" lIns="73152" rIns="73152" tIns="36576" bIns="36576">
             <a:spAutoFit/>
           </a:bodyPr>
           <a:lstStyle/>
           <a:p>
-            <a:pPr algn="ctr"/>
+            <a:pPr algn="r"/>
             <a:r>
               <a:rPr sz="900" b="0" i="0">
                 <a:solidFill>
@@ -6136,49 +6923,6 @@
               </a:rPr>
               <a:t>4 / 13</a:t>
             </a:r>
-          </a:p>
-        </p:txBody>
-      </p:sp>
-      <p:sp>
-        <p:nvSpPr>
-          <p:cNvPr id="10" name="Rectangle 9"/>
-          <p:cNvSpPr/>
-          <p:nvPr/>
-        </p:nvSpPr>
-        <p:spPr>
-          <a:xfrm>
-            <a:off x="11475720" y="365760"/>
-            <a:ext cx="274320" cy="274320"/>
-          </a:xfrm>
-          <a:prstGeom prst="rect">
-            <a:avLst/>
-          </a:prstGeom>
-          <a:solidFill>
-            <a:srgbClr val="C89B3C"/>
-          </a:solidFill>
-          <a:ln>
-            <a:noFill/>
-          </a:ln>
-        </p:spPr>
-        <p:style>
-          <a:lnRef idx="1">
-            <a:schemeClr val="accent1"/>
-          </a:lnRef>
-          <a:fillRef idx="3">
-            <a:schemeClr val="accent1"/>
-          </a:fillRef>
-          <a:effectRef idx="2">
-            <a:schemeClr val="accent1"/>
-          </a:effectRef>
-          <a:fontRef idx="minor">
-            <a:schemeClr val="lt1"/>
-          </a:fontRef>
-        </p:style>
-        <p:txBody>
-          <a:bodyPr rtlCol="0" anchor="ctr"/>
-          <a:lstStyle/>
-          <a:p>
-            <a:pPr algn="ctr"/>
           </a:p>
         </p:txBody>
       </p:sp>
@@ -6217,7 +6961,7 @@
         <p:spPr>
           <a:xfrm>
             <a:off x="0" y="0"/>
-            <a:ext cx="411480" cy="6858000"/>
+            <a:ext cx="329184" cy="6858000"/>
           </a:xfrm>
           <a:prstGeom prst="rect">
             <a:avLst/>
@@ -6259,8 +7003,8 @@
         </p:nvSpPr>
         <p:spPr>
           <a:xfrm>
-            <a:off x="731520" y="365760"/>
-            <a:ext cx="10515600" cy="822960"/>
+            <a:off x="658368" y="320040"/>
+            <a:ext cx="10652760" cy="713232"/>
           </a:xfrm>
           <a:prstGeom prst="rect">
             <a:avLst/>
@@ -6268,19 +7012,20 @@
           <a:noFill/>
         </p:spPr>
         <p:txBody>
-          <a:bodyPr wrap="square">
+          <a:bodyPr wrap="square" lIns="73152" rIns="73152" tIns="36576" bIns="36576">
             <a:spAutoFit/>
           </a:bodyPr>
           <a:lstStyle/>
           <a:p>
-            <a:r>
-              <a:rPr sz="2400" b="1" i="0">
+            <a:pPr algn="l"/>
+            <a:r>
+              <a:rPr sz="2100" b="1" i="0">
                 <a:solidFill>
                   <a:srgbClr val="122B45"/>
                 </a:solidFill>
                 <a:latin typeface="Calibri"/>
               </a:rPr>
-              <a:t>Analysis Plan</a:t>
+              <a:t>Key Finding 1: Job Satisfaction is the Strongest Predictor of Stay or Leave</a:t>
             </a:r>
           </a:p>
         </p:txBody>
@@ -6293,8 +7038,8 @@
         </p:nvSpPr>
         <p:spPr>
           <a:xfrm>
-            <a:off x="731520" y="1078992"/>
-            <a:ext cx="822960" cy="45720"/>
+            <a:off x="731520" y="1042415"/>
+            <a:ext cx="960120" cy="36576"/>
           </a:xfrm>
           <a:prstGeom prst="rect">
             <a:avLst/>
@@ -6336,8 +7081,8 @@
         </p:nvSpPr>
         <p:spPr>
           <a:xfrm>
-            <a:off x="731520" y="1325880"/>
-            <a:ext cx="10607040" cy="777240"/>
+            <a:off x="713232" y="1234440"/>
+            <a:ext cx="10652760" cy="640080"/>
           </a:xfrm>
           <a:prstGeom prst="roundRect">
             <a:avLst/>
@@ -6364,19 +7109,10 @@
           </a:fontRef>
         </p:style>
         <p:txBody>
-          <a:bodyPr rtlCol="0" anchor="ctr" wrap="square" lIns="164592" rIns="164592" tIns="73152" bIns="73152"/>
+          <a:bodyPr rtlCol="0" anchor="ctr"/>
           <a:lstStyle/>
           <a:p>
             <a:pPr algn="ctr"/>
-            <a:r>
-              <a:rPr sz="1200" b="1" i="0">
-                <a:solidFill>
-                  <a:srgbClr val="FFFFFF"/>
-                </a:solidFill>
-                <a:latin typeface="Calibri"/>
-              </a:rPr>
-              <a:t>Systematic approach addressing data quality, feature engineering, and model development.</a:t>
-            </a:r>
           </a:p>
         </p:txBody>
       </p:sp>
@@ -6388,8 +7124,8 @@
         </p:nvSpPr>
         <p:spPr>
           <a:xfrm>
-            <a:off x="822960" y="2377440"/>
-            <a:ext cx="10607040" cy="3383280"/>
+            <a:off x="850392" y="1307592"/>
+            <a:ext cx="10378440" cy="548640"/>
           </a:xfrm>
           <a:prstGeom prst="rect">
             <a:avLst/>
@@ -6397,147 +7133,136 @@
           <a:noFill/>
         </p:spPr>
         <p:txBody>
-          <a:bodyPr wrap="square">
+          <a:bodyPr wrap="square" lIns="73152" rIns="73152" tIns="36576" bIns="36576">
             <a:spAutoFit/>
           </a:bodyPr>
           <a:lstStyle/>
           <a:p>
-            <a:pPr>
-              <a:spcAft>
-                <a:spcPts val="800"/>
-              </a:spcAft>
-            </a:pPr>
-            <a:r>
-              <a:rPr sz="1100" b="1" i="0">
-                <a:solidFill>
-                  <a:srgbClr val="1F5EA8"/>
-                </a:solidFill>
-                <a:latin typeface="Calibri"/>
-              </a:rPr>
-              <a:t>▪  </a:t>
-            </a:r>
-            <a:r>
-              <a:rPr sz="1100" b="0" i="0">
-                <a:solidFill>
-                  <a:srgbClr val="242E38"/>
-                </a:solidFill>
-                <a:latin typeface="Calibri"/>
-              </a:rPr>
-              <a:t>Phase 1: Data Quality Remediation - validate employment length values, analyze outlier distributions, check for missing values.</a:t>
-            </a:r>
-          </a:p>
-          <a:p>
-            <a:pPr>
-              <a:spcAft>
-                <a:spcPts val="800"/>
-              </a:spcAft>
-            </a:pPr>
-            <a:r>
-              <a:rPr sz="1100" b="1" i="0">
-                <a:solidFill>
-                  <a:srgbClr val="1F5EA8"/>
-                </a:solidFill>
-                <a:latin typeface="Calibri"/>
-              </a:rPr>
-              <a:t>▪  </a:t>
-            </a:r>
-            <a:r>
-              <a:rPr sz="1100" b="0" i="0">
-                <a:solidFill>
-                  <a:srgbClr val="242E38"/>
-                </a:solidFill>
-                <a:latin typeface="Calibri"/>
-              </a:rPr>
-              <a:t>Phase 2: Exploratory Analysis - examine loan grade/interest rate correlation, default history/target relationship, income percentage distribution.</a:t>
-            </a:r>
-          </a:p>
-          <a:p>
-            <a:pPr>
-              <a:spcAft>
-                <a:spcPts val="800"/>
-              </a:spcAft>
-            </a:pPr>
-            <a:r>
-              <a:rPr sz="1100" b="1" i="0">
-                <a:solidFill>
-                  <a:srgbClr val="1F5EA8"/>
-                </a:solidFill>
-                <a:latin typeface="Calibri"/>
-              </a:rPr>
-              <a:t>▪  </a:t>
-            </a:r>
-            <a:r>
-              <a:rPr sz="1100" b="0" i="0">
-                <a:solidFill>
-                  <a:srgbClr val="242E38"/>
-                </a:solidFill>
-                <a:latin typeface="Calibri"/>
-              </a:rPr>
-              <a:t>Phase 3: Feature Engineering - profile categorical variables (home ownership, loan intent, grade), validate target balance.</a:t>
-            </a:r>
-          </a:p>
-          <a:p>
-            <a:pPr>
-              <a:spcAft>
-                <a:spcPts val="800"/>
-              </a:spcAft>
-            </a:pPr>
-            <a:r>
-              <a:rPr sz="1100" b="1" i="0">
-                <a:solidFill>
-                  <a:srgbClr val="1F5EA8"/>
-                </a:solidFill>
-                <a:latin typeface="Calibri"/>
-              </a:rPr>
-              <a:t>▪  </a:t>
-            </a:r>
-            <a:r>
-              <a:rPr sz="1100" b="0" i="0">
-                <a:solidFill>
-                  <a:srgbClr val="242E38"/>
-                </a:solidFill>
-                <a:latin typeface="Calibri"/>
-              </a:rPr>
-              <a:t>Phase 4: Predictive Modeling - develop and validate multiple model approaches with cross-validation.</a:t>
-            </a:r>
-          </a:p>
-          <a:p>
-            <a:pPr>
-              <a:spcAft>
-                <a:spcPts val="800"/>
-              </a:spcAft>
-            </a:pPr>
-            <a:r>
-              <a:rPr sz="1100" b="1" i="0">
-                <a:solidFill>
-                  <a:srgbClr val="1F5EA8"/>
-                </a:solidFill>
-                <a:latin typeface="Calibri"/>
-              </a:rPr>
-              <a:t>▪  </a:t>
-            </a:r>
-            <a:r>
-              <a:rPr sz="1100" b="0" i="0">
-                <a:solidFill>
-                  <a:srgbClr val="242E38"/>
-                </a:solidFill>
-                <a:latin typeface="Calibri"/>
-              </a:rPr>
-              <a:t>Outlier Analysis: { "age_outliers_count": 1494, "age_outliers_pct": 4.585494613425002, "emp_length_outliers_count": 853, "emp_length_outliers_pct": 2.618090298026457, "emp_length_over_40_count": 3, "loan_ratio_outliers_count": 651,...</a:t>
-            </a:r>
-          </a:p>
-        </p:txBody>
-      </p:sp>
-      <p:sp>
-        <p:nvSpPr>
-          <p:cNvPr id="7" name="Rectangle 6"/>
+            <a:pPr algn="l"/>
+            <a:r>
+              <a:rPr sz="1300" b="1" i="0">
+                <a:solidFill>
+                  <a:srgbClr val="FFFFFF"/>
+                </a:solidFill>
+                <a:latin typeface="Calibri"/>
+              </a:rPr>
+              <a:t>Employees with the lowest Job Satisfaction are 3.5x more likely to attrit than those with the highest satisfaction.</a:t>
+            </a:r>
+          </a:p>
+        </p:txBody>
+      </p:sp>
+      <p:sp>
+        <p:nvSpPr>
+          <p:cNvPr id="7" name="Rounded Rectangle 6"/>
           <p:cNvSpPr/>
           <p:nvPr/>
         </p:nvSpPr>
         <p:spPr>
           <a:xfrm>
-            <a:off x="731520" y="6355080"/>
-            <a:ext cx="10698480" cy="18288"/>
+            <a:off x="868680" y="2011680"/>
+            <a:ext cx="10287000" cy="4069080"/>
+          </a:xfrm>
+          <a:prstGeom prst="roundRect">
+            <a:avLst/>
+          </a:prstGeom>
+          <a:solidFill>
+            <a:srgbClr val="FFFFFF"/>
+          </a:solidFill>
+          <a:ln>
+            <a:noFill/>
+          </a:ln>
+        </p:spPr>
+        <p:style>
+          <a:lnRef idx="1">
+            <a:schemeClr val="accent1"/>
+          </a:lnRef>
+          <a:fillRef idx="3">
+            <a:schemeClr val="accent1"/>
+          </a:fillRef>
+          <a:effectRef idx="2">
+            <a:schemeClr val="accent1"/>
+          </a:effectRef>
+          <a:fontRef idx="minor">
+            <a:schemeClr val="lt1"/>
+          </a:fontRef>
+        </p:style>
+        <p:txBody>
+          <a:bodyPr rtlCol="0" anchor="ctr"/>
+          <a:lstStyle/>
+          <a:p>
+            <a:pPr algn="ctr"/>
+          </a:p>
+        </p:txBody>
+      </p:sp>
+      <p:pic>
+        <p:nvPicPr>
+          <p:cNvPr id="8" name="Picture 7" descr="figure_1_20260503_221319.png"/>
+          <p:cNvPicPr>
+            <a:picLocks noChangeAspect="1"/>
+          </p:cNvPicPr>
+          <p:nvPr/>
+        </p:nvPicPr>
+        <p:blipFill>
+          <a:blip r:embed="rId2"/>
+          <a:stretch>
+            <a:fillRect/>
+          </a:stretch>
+        </p:blipFill>
+        <p:spPr>
+          <a:xfrm>
+            <a:off x="2219645" y="2148840"/>
+            <a:ext cx="7585069" cy="3749039"/>
+          </a:xfrm>
+          <a:prstGeom prst="rect">
+            <a:avLst/>
+          </a:prstGeom>
+        </p:spPr>
+      </p:pic>
+      <p:sp>
+        <p:nvSpPr>
+          <p:cNvPr id="9" name="TextBox 8"/>
+          <p:cNvSpPr txBox="1"/>
+          <p:nvPr/>
+        </p:nvSpPr>
+        <p:spPr>
+          <a:xfrm>
+            <a:off x="1005840" y="5870448"/>
+            <a:ext cx="9966960" cy="256032"/>
+          </a:xfrm>
+          <a:prstGeom prst="rect">
+            <a:avLst/>
+          </a:prstGeom>
+          <a:noFill/>
+        </p:spPr>
+        <p:txBody>
+          <a:bodyPr wrap="square" lIns="73152" rIns="73152" tIns="36576" bIns="36576">
+            <a:spAutoFit/>
+          </a:bodyPr>
+          <a:lstStyle/>
+          <a:p>
+            <a:pPr algn="ctr"/>
+            <a:r>
+              <a:rPr sz="1000" b="0" i="1">
+                <a:solidFill>
+                  <a:srgbClr val="55606E"/>
+                </a:solidFill>
+                <a:latin typeface="Calibri"/>
+              </a:rPr>
+              <a:t>Job Satisfaction, Stock Option Level, and Years Since Last Promotion are the top three attrition signals.</a:t>
+            </a:r>
+          </a:p>
+        </p:txBody>
+      </p:sp>
+      <p:sp>
+        <p:nvSpPr>
+          <p:cNvPr id="10" name="Rectangle 9"/>
+          <p:cNvSpPr/>
+          <p:nvPr/>
+        </p:nvSpPr>
+        <p:spPr>
+          <a:xfrm>
+            <a:off x="713232" y="6318504"/>
+            <a:ext cx="10835640" cy="13716"/>
           </a:xfrm>
           <a:prstGeom prst="rect">
             <a:avLst/>
@@ -6573,14 +7298,14 @@
       </p:sp>
       <p:sp>
         <p:nvSpPr>
-          <p:cNvPr id="8" name="TextBox 7"/>
+          <p:cNvPr id="11" name="TextBox 10"/>
           <p:cNvSpPr txBox="1"/>
           <p:nvPr/>
         </p:nvSpPr>
         <p:spPr>
           <a:xfrm>
-            <a:off x="731520" y="6446520"/>
-            <a:ext cx="7772400" cy="274320"/>
+            <a:off x="713232" y="6437376"/>
+            <a:ext cx="7863840" cy="256032"/>
           </a:xfrm>
           <a:prstGeom prst="rect">
             <a:avLst/>
@@ -6588,11 +7313,12 @@
           <a:noFill/>
         </p:spPr>
         <p:txBody>
-          <a:bodyPr wrap="none">
+          <a:bodyPr wrap="square" lIns="73152" rIns="73152" tIns="36576" bIns="36576">
             <a:spAutoFit/>
           </a:bodyPr>
           <a:lstStyle/>
           <a:p>
+            <a:pPr algn="l"/>
             <a:r>
               <a:rPr sz="900" b="0" i="0">
                 <a:solidFill>
@@ -6600,21 +7326,21 @@
                 </a:solidFill>
                 <a:latin typeface="Calibri"/>
               </a:rPr>
-              <a:t>Credit Risk Analytics</a:t>
-            </a:r>
-          </a:p>
-        </p:txBody>
-      </p:sp>
-      <p:sp>
-        <p:nvSpPr>
-          <p:cNvPr id="9" name="TextBox 8"/>
+              <a:t>Understanding &amp; Reducing Employee Attrition</a:t>
+            </a:r>
+          </a:p>
+        </p:txBody>
+      </p:sp>
+      <p:sp>
+        <p:nvSpPr>
+          <p:cNvPr id="12" name="TextBox 11"/>
           <p:cNvSpPr txBox="1"/>
           <p:nvPr/>
         </p:nvSpPr>
         <p:spPr>
           <a:xfrm>
-            <a:off x="9601200" y="6446520"/>
-            <a:ext cx="1828800" cy="274320"/>
+            <a:off x="9646920" y="6437376"/>
+            <a:ext cx="1828800" cy="256032"/>
           </a:xfrm>
           <a:prstGeom prst="rect">
             <a:avLst/>
@@ -6622,12 +7348,12 @@
           <a:noFill/>
         </p:spPr>
         <p:txBody>
-          <a:bodyPr wrap="none">
+          <a:bodyPr wrap="square" lIns="73152" rIns="73152" tIns="36576" bIns="36576">
             <a:spAutoFit/>
           </a:bodyPr>
           <a:lstStyle/>
           <a:p>
-            <a:pPr algn="ctr"/>
+            <a:pPr algn="r"/>
             <a:r>
               <a:rPr sz="900" b="0" i="0">
                 <a:solidFill>
@@ -6637,49 +7363,6 @@
               </a:rPr>
               <a:t>5 / 13</a:t>
             </a:r>
-          </a:p>
-        </p:txBody>
-      </p:sp>
-      <p:sp>
-        <p:nvSpPr>
-          <p:cNvPr id="10" name="Rectangle 9"/>
-          <p:cNvSpPr/>
-          <p:nvPr/>
-        </p:nvSpPr>
-        <p:spPr>
-          <a:xfrm>
-            <a:off x="11475720" y="365760"/>
-            <a:ext cx="274320" cy="274320"/>
-          </a:xfrm>
-          <a:prstGeom prst="rect">
-            <a:avLst/>
-          </a:prstGeom>
-          <a:solidFill>
-            <a:srgbClr val="C89B3C"/>
-          </a:solidFill>
-          <a:ln>
-            <a:noFill/>
-          </a:ln>
-        </p:spPr>
-        <p:style>
-          <a:lnRef idx="1">
-            <a:schemeClr val="accent1"/>
-          </a:lnRef>
-          <a:fillRef idx="3">
-            <a:schemeClr val="accent1"/>
-          </a:fillRef>
-          <a:effectRef idx="2">
-            <a:schemeClr val="accent1"/>
-          </a:effectRef>
-          <a:fontRef idx="minor">
-            <a:schemeClr val="lt1"/>
-          </a:fontRef>
-        </p:style>
-        <p:txBody>
-          <a:bodyPr rtlCol="0" anchor="ctr"/>
-          <a:lstStyle/>
-          <a:p>
-            <a:pPr algn="ctr"/>
           </a:p>
         </p:txBody>
       </p:sp>
@@ -6718,7 +7401,7 @@
         <p:spPr>
           <a:xfrm>
             <a:off x="0" y="0"/>
-            <a:ext cx="411480" cy="6858000"/>
+            <a:ext cx="329184" cy="6858000"/>
           </a:xfrm>
           <a:prstGeom prst="rect">
             <a:avLst/>
@@ -6760,8 +7443,8 @@
         </p:nvSpPr>
         <p:spPr>
           <a:xfrm>
-            <a:off x="731520" y="365760"/>
-            <a:ext cx="10515600" cy="822960"/>
+            <a:off x="658368" y="320040"/>
+            <a:ext cx="10652760" cy="713232"/>
           </a:xfrm>
           <a:prstGeom prst="rect">
             <a:avLst/>
@@ -6769,19 +7452,20 @@
           <a:noFill/>
         </p:spPr>
         <p:txBody>
-          <a:bodyPr wrap="square">
+          <a:bodyPr wrap="square" lIns="73152" rIns="73152" tIns="36576" bIns="36576">
             <a:spAutoFit/>
           </a:bodyPr>
           <a:lstStyle/>
           <a:p>
-            <a:r>
-              <a:rPr sz="2400" b="1" i="0">
+            <a:pPr algn="l"/>
+            <a:r>
+              <a:rPr sz="1800" b="1" i="0">
                 <a:solidFill>
                   <a:srgbClr val="122B45"/>
                 </a:solidFill>
                 <a:latin typeface="Calibri"/>
               </a:rPr>
-              <a:t>Key Findings</a:t>
+              <a:t>Key Finding 2: Attrition Risk is Concentrated in Specific Roles and Lifestyles</a:t>
             </a:r>
           </a:p>
         </p:txBody>
@@ -6794,8 +7478,8 @@
         </p:nvSpPr>
         <p:spPr>
           <a:xfrm>
-            <a:off x="731520" y="1078992"/>
-            <a:ext cx="822960" cy="45720"/>
+            <a:off x="731520" y="1042415"/>
+            <a:ext cx="960120" cy="36576"/>
           </a:xfrm>
           <a:prstGeom prst="rect">
             <a:avLst/>
@@ -6837,8 +7521,8 @@
         </p:nvSpPr>
         <p:spPr>
           <a:xfrm>
-            <a:off x="731520" y="1325880"/>
-            <a:ext cx="10607040" cy="1051560"/>
+            <a:off x="713232" y="1234440"/>
+            <a:ext cx="10652760" cy="640080"/>
           </a:xfrm>
           <a:prstGeom prst="roundRect">
             <a:avLst/>
@@ -6865,19 +7549,10 @@
           </a:fontRef>
         </p:style>
         <p:txBody>
-          <a:bodyPr rtlCol="0" anchor="ctr" wrap="square" lIns="164592" rIns="164592" tIns="73152" bIns="73152"/>
+          <a:bodyPr rtlCol="0" anchor="ctr"/>
           <a:lstStyle/>
           <a:p>
             <a:pPr algn="ctr"/>
-            <a:r>
-              <a:rPr sz="1200" b="1" i="0">
-                <a:solidFill>
-                  <a:srgbClr val="FFFFFF"/>
-                </a:solidFill>
-                <a:latin typeface="Calibri"/>
-              </a:rPr>
-              <a:t>Data quality issues are manageable but require immediate attention to ensure model reliability.</a:t>
-            </a:r>
           </a:p>
         </p:txBody>
       </p:sp>
@@ -6889,8 +7564,8 @@
         </p:nvSpPr>
         <p:spPr>
           <a:xfrm>
-            <a:off x="822960" y="2651760"/>
-            <a:ext cx="10607040" cy="3108959"/>
+            <a:off x="850392" y="1307592"/>
+            <a:ext cx="10378440" cy="548640"/>
           </a:xfrm>
           <a:prstGeom prst="rect">
             <a:avLst/>
@@ -6898,18 +7573,233 @@
           <a:noFill/>
         </p:spPr>
         <p:txBody>
-          <a:bodyPr wrap="square">
+          <a:bodyPr wrap="square" lIns="73152" rIns="73152" tIns="36576" bIns="36576">
             <a:spAutoFit/>
           </a:bodyPr>
           <a:lstStyle/>
           <a:p>
+            <a:pPr algn="l"/>
+            <a:r>
+              <a:rPr sz="1300" b="1" i="0">
+                <a:solidFill>
+                  <a:srgbClr val="FFFFFF"/>
+                </a:solidFill>
+                <a:latin typeface="Calibri"/>
+              </a:rPr>
+              <a:t>Sales Representatives and Laboratory Technicians show attrition rates 70-80% above the company average.</a:t>
+            </a:r>
+          </a:p>
+        </p:txBody>
+      </p:sp>
+      <p:sp>
+        <p:nvSpPr>
+          <p:cNvPr id="7" name="Rounded Rectangle 6"/>
+          <p:cNvSpPr/>
+          <p:nvPr/>
+        </p:nvSpPr>
+        <p:spPr>
+          <a:xfrm>
+            <a:off x="822960" y="2057400"/>
+            <a:ext cx="6537960" cy="3840480"/>
+          </a:xfrm>
+          <a:prstGeom prst="roundRect">
+            <a:avLst/>
+          </a:prstGeom>
+          <a:solidFill>
+            <a:srgbClr val="FFFFFF"/>
+          </a:solidFill>
+          <a:ln>
+            <a:noFill/>
+          </a:ln>
+        </p:spPr>
+        <p:style>
+          <a:lnRef idx="1">
+            <a:schemeClr val="accent1"/>
+          </a:lnRef>
+          <a:fillRef idx="3">
+            <a:schemeClr val="accent1"/>
+          </a:fillRef>
+          <a:effectRef idx="2">
+            <a:schemeClr val="accent1"/>
+          </a:effectRef>
+          <a:fontRef idx="minor">
+            <a:schemeClr val="lt1"/>
+          </a:fontRef>
+        </p:style>
+        <p:txBody>
+          <a:bodyPr rtlCol="0" anchor="ctr"/>
+          <a:lstStyle/>
+          <a:p>
+            <a:pPr algn="ctr"/>
+          </a:p>
+        </p:txBody>
+      </p:sp>
+      <p:pic>
+        <p:nvPicPr>
+          <p:cNvPr id="8" name="Picture 7" descr="figure_2_20260503_221319.png"/>
+          <p:cNvPicPr>
+            <a:picLocks noChangeAspect="1"/>
+          </p:cNvPicPr>
+          <p:nvPr/>
+        </p:nvPicPr>
+        <p:blipFill>
+          <a:blip r:embed="rId2"/>
+          <a:stretch>
+            <a:fillRect/>
+          </a:stretch>
+        </p:blipFill>
+        <p:spPr>
+          <a:xfrm>
+            <a:off x="1679796" y="2212848"/>
+            <a:ext cx="4815142" cy="3429000"/>
+          </a:xfrm>
+          <a:prstGeom prst="rect">
+            <a:avLst/>
+          </a:prstGeom>
+        </p:spPr>
+      </p:pic>
+      <p:sp>
+        <p:nvSpPr>
+          <p:cNvPr id="9" name="TextBox 8"/>
+          <p:cNvSpPr txBox="1"/>
+          <p:nvPr/>
+        </p:nvSpPr>
+        <p:spPr>
+          <a:xfrm>
+            <a:off x="1005840" y="5650992"/>
+            <a:ext cx="6172200" cy="256032"/>
+          </a:xfrm>
+          <a:prstGeom prst="rect">
+            <a:avLst/>
+          </a:prstGeom>
+          <a:noFill/>
+        </p:spPr>
+        <p:txBody>
+          <a:bodyPr wrap="square" lIns="73152" rIns="73152" tIns="36576" bIns="36576">
+            <a:spAutoFit/>
+          </a:bodyPr>
+          <a:lstStyle/>
+          <a:p>
+            <a:pPr algn="l"/>
+            <a:r>
+              <a:rPr sz="900" b="0" i="1">
+                <a:solidFill>
+                  <a:srgbClr val="55606E"/>
+                </a:solidFill>
+                <a:latin typeface="Calibri"/>
+              </a:rPr>
+              <a:t>Attrition is not evenly distributed; it clusters in frontline and highly specialized operational roles.</a:t>
+            </a:r>
+          </a:p>
+        </p:txBody>
+      </p:sp>
+      <p:sp>
+        <p:nvSpPr>
+          <p:cNvPr id="10" name="Rounded Rectangle 9"/>
+          <p:cNvSpPr/>
+          <p:nvPr/>
+        </p:nvSpPr>
+        <p:spPr>
+          <a:xfrm>
+            <a:off x="7635240" y="2057400"/>
+            <a:ext cx="3703320" cy="3840480"/>
+          </a:xfrm>
+          <a:prstGeom prst="roundRect">
+            <a:avLst/>
+          </a:prstGeom>
+          <a:solidFill>
+            <a:srgbClr val="FFFFFF"/>
+          </a:solidFill>
+          <a:ln>
+            <a:noFill/>
+          </a:ln>
+        </p:spPr>
+        <p:style>
+          <a:lnRef idx="1">
+            <a:schemeClr val="accent1"/>
+          </a:lnRef>
+          <a:fillRef idx="3">
+            <a:schemeClr val="accent1"/>
+          </a:fillRef>
+          <a:effectRef idx="2">
+            <a:schemeClr val="accent1"/>
+          </a:effectRef>
+          <a:fontRef idx="minor">
+            <a:schemeClr val="lt1"/>
+          </a:fontRef>
+        </p:style>
+        <p:txBody>
+          <a:bodyPr rtlCol="0" anchor="ctr"/>
+          <a:lstStyle/>
+          <a:p>
+            <a:pPr algn="ctr"/>
+          </a:p>
+        </p:txBody>
+      </p:sp>
+      <p:sp>
+        <p:nvSpPr>
+          <p:cNvPr id="11" name="TextBox 10"/>
+          <p:cNvSpPr txBox="1"/>
+          <p:nvPr/>
+        </p:nvSpPr>
+        <p:spPr>
+          <a:xfrm>
+            <a:off x="7882127" y="2331720"/>
+            <a:ext cx="3200400" cy="320040"/>
+          </a:xfrm>
+          <a:prstGeom prst="rect">
+            <a:avLst/>
+          </a:prstGeom>
+          <a:noFill/>
+        </p:spPr>
+        <p:txBody>
+          <a:bodyPr wrap="square" lIns="73152" rIns="73152" tIns="36576" bIns="36576">
+            <a:spAutoFit/>
+          </a:bodyPr>
+          <a:lstStyle/>
+          <a:p>
+            <a:pPr algn="l"/>
+            <a:r>
+              <a:rPr sz="1300" b="1" i="0">
+                <a:solidFill>
+                  <a:srgbClr val="122B45"/>
+                </a:solidFill>
+                <a:latin typeface="Calibri"/>
+              </a:rPr>
+              <a:t>Takeaways</a:t>
+            </a:r>
+          </a:p>
+        </p:txBody>
+      </p:sp>
+      <p:sp>
+        <p:nvSpPr>
+          <p:cNvPr id="12" name="TextBox 11"/>
+          <p:cNvSpPr txBox="1"/>
+          <p:nvPr/>
+        </p:nvSpPr>
+        <p:spPr>
+          <a:xfrm>
+            <a:off x="7845552" y="2743200"/>
+            <a:ext cx="3246120" cy="2651760"/>
+          </a:xfrm>
+          <a:prstGeom prst="rect">
+            <a:avLst/>
+          </a:prstGeom>
+          <a:noFill/>
+        </p:spPr>
+        <p:txBody>
+          <a:bodyPr wrap="square" lIns="73152" rIns="73152" tIns="36576" bIns="36576">
+            <a:spAutoFit/>
+          </a:bodyPr>
+          <a:lstStyle/>
+          <a:p>
             <a:pPr>
               <a:spcAft>
-                <a:spcPts val="800"/>
+                <a:spcPts val="700"/>
               </a:spcAft>
             </a:pPr>
             <a:r>
-              <a:rPr sz="1300" b="1" i="0">
+              <a:rPr sz="1100" b="1">
                 <a:solidFill>
                   <a:srgbClr val="1F5EA8"/>
                 </a:solidFill>
@@ -6918,23 +7808,23 @@
               <a:t>▪  </a:t>
             </a:r>
             <a:r>
-              <a:rPr sz="1300" b="0" i="0">
+              <a:rPr sz="1100">
                 <a:solidFill>
                   <a:srgbClr val="242E38"/>
                 </a:solidFill>
                 <a:latin typeface="Calibri"/>
               </a:rPr>
-              <a:t>Employment length data entry errors (values &gt;60 years) need correction - likely impacts income stability assessment.</a:t>
+              <a:t>Role Risk: Sales Reps (24% attrition), Lab Techs (23% attrition) vs. Company Avg (16%).</a:t>
             </a:r>
           </a:p>
           <a:p>
             <a:pPr>
               <a:spcAft>
-                <a:spcPts val="800"/>
+                <a:spcPts val="700"/>
               </a:spcAft>
             </a:pPr>
             <a:r>
-              <a:rPr sz="1300" b="1" i="0">
+              <a:rPr sz="1100" b="1">
                 <a:solidFill>
                   <a:srgbClr val="1F5EA8"/>
                 </a:solidFill>
@@ -6943,23 +7833,23 @@
               <a:t>▪  </a:t>
             </a:r>
             <a:r>
-              <a:rPr sz="1300" b="0" i="0">
+              <a:rPr sz="1100">
                 <a:solidFill>
                   <a:srgbClr val="242E38"/>
                 </a:solidFill>
                 <a:latin typeface="Calibri"/>
               </a:rPr>
-              <a:t>Outlier analysis needed for age and income metrics - could skew model predictions if not addressed.</a:t>
+              <a:t>Travel Impact: Employees who travel frequently are 50% more likely to leave.</a:t>
             </a:r>
           </a:p>
           <a:p>
             <a:pPr>
               <a:spcAft>
-                <a:spcPts val="800"/>
+                <a:spcPts val="700"/>
               </a:spcAft>
             </a:pPr>
             <a:r>
-              <a:rPr sz="1300" b="1" i="0">
+              <a:rPr sz="1100" b="1">
                 <a:solidFill>
                   <a:srgbClr val="1F5EA8"/>
                 </a:solidFill>
@@ -6968,52 +7858,27 @@
               <a:t>▪  </a:t>
             </a:r>
             <a:r>
-              <a:rPr sz="1300" b="0" i="0">
+              <a:rPr sz="1100">
                 <a:solidFill>
                   <a:srgbClr val="242E38"/>
                 </a:solidFill>
                 <a:latin typeface="Calibri"/>
               </a:rPr>
-              <a:t>Categorical variables appear clean with expected values - strong foundation for feature engineering.</a:t>
-            </a:r>
-          </a:p>
-          <a:p>
-            <a:pPr>
-              <a:spcAft>
-                <a:spcPts val="800"/>
-              </a:spcAft>
-            </a:pPr>
-            <a:r>
-              <a:rPr sz="1300" b="1" i="0">
-                <a:solidFill>
-                  <a:srgbClr val="1F5EA8"/>
-                </a:solidFill>
-                <a:latin typeface="Calibri"/>
-              </a:rPr>
-              <a:t>▪  </a:t>
-            </a:r>
-            <a:r>
-              <a:rPr sz="1300" b="0" i="0">
-                <a:solidFill>
-                  <a:srgbClr val="242E38"/>
-                </a:solidFill>
-                <a:latin typeface="Calibri"/>
-              </a:rPr>
-              <a:t>Clear target variable with comprehensive feature coverage supports robust model development.</a:t>
-            </a:r>
-          </a:p>
-        </p:txBody>
-      </p:sp>
-      <p:sp>
-        <p:nvSpPr>
-          <p:cNvPr id="7" name="Rectangle 6"/>
+              <a:t>Tenure Paradox: Both very new employees (&lt;2 years) and long-tenured employees (&gt;15 years) show elevated risk, but for different reasons.</a:t>
+            </a:r>
+          </a:p>
+        </p:txBody>
+      </p:sp>
+      <p:sp>
+        <p:nvSpPr>
+          <p:cNvPr id="13" name="Rectangle 12"/>
           <p:cNvSpPr/>
           <p:nvPr/>
         </p:nvSpPr>
         <p:spPr>
           <a:xfrm>
-            <a:off x="731520" y="6355080"/>
-            <a:ext cx="10698480" cy="18288"/>
+            <a:off x="713232" y="6318504"/>
+            <a:ext cx="10835640" cy="13716"/>
           </a:xfrm>
           <a:prstGeom prst="rect">
             <a:avLst/>
@@ -7049,14 +7914,14 @@
       </p:sp>
       <p:sp>
         <p:nvSpPr>
-          <p:cNvPr id="8" name="TextBox 7"/>
+          <p:cNvPr id="14" name="TextBox 13"/>
           <p:cNvSpPr txBox="1"/>
           <p:nvPr/>
         </p:nvSpPr>
         <p:spPr>
           <a:xfrm>
-            <a:off x="731520" y="6446520"/>
-            <a:ext cx="7772400" cy="274320"/>
+            <a:off x="713232" y="6437376"/>
+            <a:ext cx="7863840" cy="256032"/>
           </a:xfrm>
           <a:prstGeom prst="rect">
             <a:avLst/>
@@ -7064,11 +7929,12 @@
           <a:noFill/>
         </p:spPr>
         <p:txBody>
-          <a:bodyPr wrap="none">
+          <a:bodyPr wrap="square" lIns="73152" rIns="73152" tIns="36576" bIns="36576">
             <a:spAutoFit/>
           </a:bodyPr>
           <a:lstStyle/>
           <a:p>
+            <a:pPr algn="l"/>
             <a:r>
               <a:rPr sz="900" b="0" i="0">
                 <a:solidFill>
@@ -7076,21 +7942,21 @@
                 </a:solidFill>
                 <a:latin typeface="Calibri"/>
               </a:rPr>
-              <a:t>Credit Risk Analytics</a:t>
-            </a:r>
-          </a:p>
-        </p:txBody>
-      </p:sp>
-      <p:sp>
-        <p:nvSpPr>
-          <p:cNvPr id="9" name="TextBox 8"/>
+              <a:t>Understanding &amp; Reducing Employee Attrition</a:t>
+            </a:r>
+          </a:p>
+        </p:txBody>
+      </p:sp>
+      <p:sp>
+        <p:nvSpPr>
+          <p:cNvPr id="15" name="TextBox 14"/>
           <p:cNvSpPr txBox="1"/>
           <p:nvPr/>
         </p:nvSpPr>
         <p:spPr>
           <a:xfrm>
-            <a:off x="9601200" y="6446520"/>
-            <a:ext cx="1828800" cy="274320"/>
+            <a:off x="9646920" y="6437376"/>
+            <a:ext cx="1828800" cy="256032"/>
           </a:xfrm>
           <a:prstGeom prst="rect">
             <a:avLst/>
@@ -7098,12 +7964,12 @@
           <a:noFill/>
         </p:spPr>
         <p:txBody>
-          <a:bodyPr wrap="none">
+          <a:bodyPr wrap="square" lIns="73152" rIns="73152" tIns="36576" bIns="36576">
             <a:spAutoFit/>
           </a:bodyPr>
           <a:lstStyle/>
           <a:p>
-            <a:pPr algn="ctr"/>
+            <a:pPr algn="r"/>
             <a:r>
               <a:rPr sz="900" b="0" i="0">
                 <a:solidFill>
@@ -7113,49 +7979,6 @@
               </a:rPr>
               <a:t>6 / 13</a:t>
             </a:r>
-          </a:p>
-        </p:txBody>
-      </p:sp>
-      <p:sp>
-        <p:nvSpPr>
-          <p:cNvPr id="10" name="Rectangle 9"/>
-          <p:cNvSpPr/>
-          <p:nvPr/>
-        </p:nvSpPr>
-        <p:spPr>
-          <a:xfrm>
-            <a:off x="11475720" y="365760"/>
-            <a:ext cx="274320" cy="274320"/>
-          </a:xfrm>
-          <a:prstGeom prst="rect">
-            <a:avLst/>
-          </a:prstGeom>
-          <a:solidFill>
-            <a:srgbClr val="C89B3C"/>
-          </a:solidFill>
-          <a:ln>
-            <a:noFill/>
-          </a:ln>
-        </p:spPr>
-        <p:style>
-          <a:lnRef idx="1">
-            <a:schemeClr val="accent1"/>
-          </a:lnRef>
-          <a:fillRef idx="3">
-            <a:schemeClr val="accent1"/>
-          </a:fillRef>
-          <a:effectRef idx="2">
-            <a:schemeClr val="accent1"/>
-          </a:effectRef>
-          <a:fontRef idx="minor">
-            <a:schemeClr val="lt1"/>
-          </a:fontRef>
-        </p:style>
-        <p:txBody>
-          <a:bodyPr rtlCol="0" anchor="ctr"/>
-          <a:lstStyle/>
-          <a:p>
-            <a:pPr algn="ctr"/>
           </a:p>
         </p:txBody>
       </p:sp>
@@ -7194,7 +8017,7 @@
         <p:spPr>
           <a:xfrm>
             <a:off x="0" y="0"/>
-            <a:ext cx="411480" cy="6858000"/>
+            <a:ext cx="329184" cy="6858000"/>
           </a:xfrm>
           <a:prstGeom prst="rect">
             <a:avLst/>
@@ -7236,8 +8059,8 @@
         </p:nvSpPr>
         <p:spPr>
           <a:xfrm>
-            <a:off x="731520" y="365760"/>
-            <a:ext cx="10515600" cy="822960"/>
+            <a:off x="658368" y="320040"/>
+            <a:ext cx="10652760" cy="713232"/>
           </a:xfrm>
           <a:prstGeom prst="rect">
             <a:avLst/>
@@ -7245,19 +8068,20 @@
           <a:noFill/>
         </p:spPr>
         <p:txBody>
-          <a:bodyPr wrap="square">
+          <a:bodyPr wrap="square" lIns="73152" rIns="73152" tIns="36576" bIns="36576">
             <a:spAutoFit/>
           </a:bodyPr>
           <a:lstStyle/>
           <a:p>
-            <a:r>
-              <a:rPr sz="2400" b="1" i="0">
+            <a:pPr algn="l"/>
+            <a:r>
+              <a:rPr sz="1800" b="1" i="0">
                 <a:solidFill>
                   <a:srgbClr val="122B45"/>
                 </a:solidFill>
                 <a:latin typeface="Calibri"/>
               </a:rPr>
-              <a:t>Business Implications</a:t>
+              <a:t>Key Finding 3: Compensation Fairness &amp; Career Progression Are Critical Retention Levers</a:t>
             </a:r>
           </a:p>
         </p:txBody>
@@ -7270,8 +8094,8 @@
         </p:nvSpPr>
         <p:spPr>
           <a:xfrm>
-            <a:off x="731520" y="1078992"/>
-            <a:ext cx="822960" cy="45720"/>
+            <a:off x="731520" y="1042415"/>
+            <a:ext cx="960120" cy="36576"/>
           </a:xfrm>
           <a:prstGeom prst="rect">
             <a:avLst/>
@@ -7313,8 +8137,8 @@
         </p:nvSpPr>
         <p:spPr>
           <a:xfrm>
-            <a:off x="731520" y="1325880"/>
-            <a:ext cx="10607040" cy="1051560"/>
+            <a:off x="713232" y="1325880"/>
+            <a:ext cx="10652760" cy="694944"/>
           </a:xfrm>
           <a:prstGeom prst="roundRect">
             <a:avLst/>
@@ -7341,19 +8165,10 @@
           </a:fontRef>
         </p:style>
         <p:txBody>
-          <a:bodyPr rtlCol="0" anchor="ctr" wrap="square" lIns="164592" rIns="164592" tIns="73152" bIns="73152"/>
+          <a:bodyPr rtlCol="0" anchor="ctr"/>
           <a:lstStyle/>
           <a:p>
             <a:pPr algn="ctr"/>
-            <a:r>
-              <a:rPr sz="1200" b="1" i="0">
-                <a:solidFill>
-                  <a:srgbClr val="FFFFFF"/>
-                </a:solidFill>
-                <a:latin typeface="Calibri"/>
-              </a:rPr>
-              <a:t>Reliable credit risk modeling enables competitive advantage through better lending decisions and portfolio management.</a:t>
-            </a:r>
           </a:p>
         </p:txBody>
       </p:sp>
@@ -7365,8 +8180,8 @@
         </p:nvSpPr>
         <p:spPr>
           <a:xfrm>
-            <a:off x="822960" y="2651760"/>
-            <a:ext cx="10607040" cy="3108959"/>
+            <a:off x="850392" y="1399032"/>
+            <a:ext cx="10378440" cy="603504"/>
           </a:xfrm>
           <a:prstGeom prst="rect">
             <a:avLst/>
@@ -7374,18 +8189,209 @@
           <a:noFill/>
         </p:spPr>
         <p:txBody>
-          <a:bodyPr wrap="square">
+          <a:bodyPr wrap="square" lIns="73152" rIns="73152" tIns="36576" bIns="36576">
             <a:spAutoFit/>
           </a:bodyPr>
           <a:lstStyle/>
           <a:p>
+            <a:pPr algn="l"/>
+            <a:r>
+              <a:rPr sz="1300" b="1" i="0">
+                <a:solidFill>
+                  <a:srgbClr val="FFFFFF"/>
+                </a:solidFill>
+                <a:latin typeface="Calibri"/>
+              </a:rPr>
+              <a:t>Perceived inequity in stock options and stagnation in role/pay are powerful push factors.</a:t>
+            </a:r>
+          </a:p>
+        </p:txBody>
+      </p:sp>
+      <p:sp>
+        <p:nvSpPr>
+          <p:cNvPr id="7" name="Rounded Rectangle 6"/>
+          <p:cNvSpPr/>
+          <p:nvPr/>
+        </p:nvSpPr>
+        <p:spPr>
+          <a:xfrm>
+            <a:off x="786384" y="2331720"/>
+            <a:ext cx="5074920" cy="3429000"/>
+          </a:xfrm>
+          <a:prstGeom prst="roundRect">
+            <a:avLst/>
+          </a:prstGeom>
+          <a:solidFill>
+            <a:srgbClr val="FFFFFF"/>
+          </a:solidFill>
+          <a:ln>
+            <a:noFill/>
+          </a:ln>
+        </p:spPr>
+        <p:style>
+          <a:lnRef idx="1">
+            <a:schemeClr val="accent1"/>
+          </a:lnRef>
+          <a:fillRef idx="3">
+            <a:schemeClr val="accent1"/>
+          </a:fillRef>
+          <a:effectRef idx="2">
+            <a:schemeClr val="accent1"/>
+          </a:effectRef>
+          <a:fontRef idx="minor">
+            <a:schemeClr val="lt1"/>
+          </a:fontRef>
+        </p:style>
+        <p:txBody>
+          <a:bodyPr rtlCol="0" anchor="ctr"/>
+          <a:lstStyle/>
+          <a:p>
+            <a:pPr algn="ctr"/>
+          </a:p>
+        </p:txBody>
+      </p:sp>
+      <p:sp>
+        <p:nvSpPr>
+          <p:cNvPr id="8" name="Rounded Rectangle 7"/>
+          <p:cNvSpPr/>
+          <p:nvPr/>
+        </p:nvSpPr>
+        <p:spPr>
+          <a:xfrm>
+            <a:off x="6263640" y="2331720"/>
+            <a:ext cx="5074920" cy="3429000"/>
+          </a:xfrm>
+          <a:prstGeom prst="roundRect">
+            <a:avLst/>
+          </a:prstGeom>
+          <a:solidFill>
+            <a:srgbClr val="FFFFFF"/>
+          </a:solidFill>
+          <a:ln>
+            <a:noFill/>
+          </a:ln>
+        </p:spPr>
+        <p:style>
+          <a:lnRef idx="1">
+            <a:schemeClr val="accent1"/>
+          </a:lnRef>
+          <a:fillRef idx="3">
+            <a:schemeClr val="accent1"/>
+          </a:fillRef>
+          <a:effectRef idx="2">
+            <a:schemeClr val="accent1"/>
+          </a:effectRef>
+          <a:fontRef idx="minor">
+            <a:schemeClr val="lt1"/>
+          </a:fontRef>
+        </p:style>
+        <p:txBody>
+          <a:bodyPr rtlCol="0" anchor="ctr"/>
+          <a:lstStyle/>
+          <a:p>
+            <a:pPr algn="ctr"/>
+          </a:p>
+        </p:txBody>
+      </p:sp>
+      <p:sp>
+        <p:nvSpPr>
+          <p:cNvPr id="9" name="TextBox 8"/>
+          <p:cNvSpPr txBox="1"/>
+          <p:nvPr/>
+        </p:nvSpPr>
+        <p:spPr>
+          <a:xfrm>
+            <a:off x="1005840" y="2596896"/>
+            <a:ext cx="4389120" cy="320040"/>
+          </a:xfrm>
+          <a:prstGeom prst="rect">
+            <a:avLst/>
+          </a:prstGeom>
+          <a:noFill/>
+        </p:spPr>
+        <p:txBody>
+          <a:bodyPr wrap="square" lIns="73152" rIns="73152" tIns="36576" bIns="36576">
+            <a:spAutoFit/>
+          </a:bodyPr>
+          <a:lstStyle/>
+          <a:p>
+            <a:pPr algn="l"/>
+            <a:r>
+              <a:rPr sz="1300" b="1" i="0">
+                <a:solidFill>
+                  <a:srgbClr val="122B45"/>
+                </a:solidFill>
+                <a:latin typeface="Calibri"/>
+              </a:rPr>
+              <a:t>Evidence</a:t>
+            </a:r>
+          </a:p>
+        </p:txBody>
+      </p:sp>
+      <p:sp>
+        <p:nvSpPr>
+          <p:cNvPr id="10" name="TextBox 9"/>
+          <p:cNvSpPr txBox="1"/>
+          <p:nvPr/>
+        </p:nvSpPr>
+        <p:spPr>
+          <a:xfrm>
+            <a:off x="6492240" y="2596896"/>
+            <a:ext cx="4389120" cy="320040"/>
+          </a:xfrm>
+          <a:prstGeom prst="rect">
+            <a:avLst/>
+          </a:prstGeom>
+          <a:noFill/>
+        </p:spPr>
+        <p:txBody>
+          <a:bodyPr wrap="square" lIns="73152" rIns="73152" tIns="36576" bIns="36576">
+            <a:spAutoFit/>
+          </a:bodyPr>
+          <a:lstStyle/>
+          <a:p>
+            <a:pPr algn="l"/>
+            <a:r>
+              <a:rPr sz="1300" b="1" i="0">
+                <a:solidFill>
+                  <a:srgbClr val="122B45"/>
+                </a:solidFill>
+                <a:latin typeface="Calibri"/>
+              </a:rPr>
+              <a:t>Business meaning</a:t>
+            </a:r>
+          </a:p>
+        </p:txBody>
+      </p:sp>
+      <p:sp>
+        <p:nvSpPr>
+          <p:cNvPr id="11" name="TextBox 10"/>
+          <p:cNvSpPr txBox="1"/>
+          <p:nvPr/>
+        </p:nvSpPr>
+        <p:spPr>
+          <a:xfrm>
+            <a:off x="960120" y="3063240"/>
+            <a:ext cx="4526280" cy="2103120"/>
+          </a:xfrm>
+          <a:prstGeom prst="rect">
+            <a:avLst/>
+          </a:prstGeom>
+          <a:noFill/>
+        </p:spPr>
+        <p:txBody>
+          <a:bodyPr wrap="square" lIns="73152" rIns="73152" tIns="36576" bIns="36576">
+            <a:spAutoFit/>
+          </a:bodyPr>
+          <a:lstStyle/>
+          <a:p>
             <a:pPr>
               <a:spcAft>
-                <a:spcPts val="800"/>
+                <a:spcPts val="700"/>
               </a:spcAft>
             </a:pPr>
             <a:r>
-              <a:rPr sz="1300" b="1" i="0">
+              <a:rPr sz="1100" b="1">
                 <a:solidFill>
                   <a:srgbClr val="1F5EA8"/>
                 </a:solidFill>
@@ -7394,23 +8400,23 @@
               <a:t>▪  </a:t>
             </a:r>
             <a:r>
-              <a:rPr sz="1300" b="0" i="0">
+              <a:rPr sz="1100">
                 <a:solidFill>
                   <a:srgbClr val="242E38"/>
                 </a:solidFill>
                 <a:latin typeface="Calibri"/>
               </a:rPr>
-              <a:t>Improved default prediction accuracy directly impacts profitability through reduced bad debt and optimized interest rates.</a:t>
+              <a:t>Column 1 - Equity: Employees with Stock Option Level '0' (none) have 2x the attrition risk of those with any options. This is the #2 model driver.</a:t>
             </a:r>
           </a:p>
           <a:p>
             <a:pPr>
               <a:spcAft>
-                <a:spcPts val="800"/>
+                <a:spcPts val="700"/>
               </a:spcAft>
             </a:pPr>
             <a:r>
-              <a:rPr sz="1300" b="1" i="0">
+              <a:rPr sz="1100" b="1">
                 <a:solidFill>
                   <a:srgbClr val="1F5EA8"/>
                 </a:solidFill>
@@ -7419,23 +8425,46 @@
               <a:t>▪  </a:t>
             </a:r>
             <a:r>
-              <a:rPr sz="1300" b="0" i="0">
+              <a:rPr sz="1100">
                 <a:solidFill>
                   <a:srgbClr val="242E38"/>
                 </a:solidFill>
                 <a:latin typeface="Calibri"/>
               </a:rPr>
-              <a:t>Data quality remediation ensures regulatory compliance and model transparency in evolving AI governance landscape.</a:t>
-            </a:r>
-          </a:p>
+              <a:t>Column 2 - Progression: Employees with 5+ years since their last promotion have a 22% attrition rate. This risk compounds with tenure.</a:t>
+            </a:r>
+          </a:p>
+        </p:txBody>
+      </p:sp>
+      <p:sp>
+        <p:nvSpPr>
+          <p:cNvPr id="12" name="TextBox 11"/>
+          <p:cNvSpPr txBox="1"/>
+          <p:nvPr/>
+        </p:nvSpPr>
+        <p:spPr>
+          <a:xfrm>
+            <a:off x="6446520" y="3063240"/>
+            <a:ext cx="4526280" cy="2103120"/>
+          </a:xfrm>
+          <a:prstGeom prst="rect">
+            <a:avLst/>
+          </a:prstGeom>
+          <a:noFill/>
+        </p:spPr>
+        <p:txBody>
+          <a:bodyPr wrap="square" lIns="73152" rIns="73152" tIns="36576" bIns="36576">
+            <a:spAutoFit/>
+          </a:bodyPr>
+          <a:lstStyle/>
           <a:p>
             <a:pPr>
               <a:spcAft>
-                <a:spcPts val="800"/>
+                <a:spcPts val="700"/>
               </a:spcAft>
             </a:pPr>
             <a:r>
-              <a:rPr sz="1300" b="1" i="0">
+              <a:rPr sz="1100" b="1">
                 <a:solidFill>
                   <a:srgbClr val="1F5EA8"/>
                 </a:solidFill>
@@ -7444,52 +8473,27 @@
               <a:t>▪  </a:t>
             </a:r>
             <a:r>
-              <a:rPr sz="1300" b="0" i="0">
+              <a:rPr sz="1100">
                 <a:solidFill>
                   <a:srgbClr val="242E38"/>
                 </a:solidFill>
                 <a:latin typeface="Calibri"/>
               </a:rPr>
-              <a:t>Market context awareness allows dynamic adjustment of risk thresholds based on economic conditions.</a:t>
-            </a:r>
-          </a:p>
-          <a:p>
-            <a:pPr>
-              <a:spcAft>
-                <a:spcPts val="800"/>
-              </a:spcAft>
-            </a:pPr>
-            <a:r>
-              <a:rPr sz="1300" b="1" i="0">
-                <a:solidFill>
-                  <a:srgbClr val="1F5EA8"/>
-                </a:solidFill>
-                <a:latin typeface="Calibri"/>
-              </a:rPr>
-              <a:t>▪  </a:t>
-            </a:r>
-            <a:r>
-              <a:rPr sz="1300" b="0" i="0">
-                <a:solidFill>
-                  <a:srgbClr val="242E38"/>
-                </a:solidFill>
-                <a:latin typeface="Calibri"/>
-              </a:rPr>
-              <a:t>Robust model supports expansion into broader market segments as equity leadership broadens.</a:t>
-            </a:r>
-          </a:p>
-        </p:txBody>
-      </p:sp>
-      <p:sp>
-        <p:nvSpPr>
-          <p:cNvPr id="7" name="Rectangle 6"/>
+              <a:t>Retention is not just about base pay. Total rewards fairness and visible career paths are essential.</a:t>
+            </a:r>
+          </a:p>
+        </p:txBody>
+      </p:sp>
+      <p:sp>
+        <p:nvSpPr>
+          <p:cNvPr id="13" name="Rectangle 12"/>
           <p:cNvSpPr/>
           <p:nvPr/>
         </p:nvSpPr>
         <p:spPr>
           <a:xfrm>
-            <a:off x="731520" y="6355080"/>
-            <a:ext cx="10698480" cy="18288"/>
+            <a:off x="713232" y="6318504"/>
+            <a:ext cx="10835640" cy="13716"/>
           </a:xfrm>
           <a:prstGeom prst="rect">
             <a:avLst/>
@@ -7525,14 +8529,14 @@
       </p:sp>
       <p:sp>
         <p:nvSpPr>
-          <p:cNvPr id="8" name="TextBox 7"/>
+          <p:cNvPr id="14" name="TextBox 13"/>
           <p:cNvSpPr txBox="1"/>
           <p:nvPr/>
         </p:nvSpPr>
         <p:spPr>
           <a:xfrm>
-            <a:off x="731520" y="6446520"/>
-            <a:ext cx="7772400" cy="274320"/>
+            <a:off x="713232" y="6437376"/>
+            <a:ext cx="7863840" cy="256032"/>
           </a:xfrm>
           <a:prstGeom prst="rect">
             <a:avLst/>
@@ -7540,11 +8544,12 @@
           <a:noFill/>
         </p:spPr>
         <p:txBody>
-          <a:bodyPr wrap="none">
+          <a:bodyPr wrap="square" lIns="73152" rIns="73152" tIns="36576" bIns="36576">
             <a:spAutoFit/>
           </a:bodyPr>
           <a:lstStyle/>
           <a:p>
+            <a:pPr algn="l"/>
             <a:r>
               <a:rPr sz="900" b="0" i="0">
                 <a:solidFill>
@@ -7552,21 +8557,21 @@
                 </a:solidFill>
                 <a:latin typeface="Calibri"/>
               </a:rPr>
-              <a:t>Credit Risk Analytics</a:t>
-            </a:r>
-          </a:p>
-        </p:txBody>
-      </p:sp>
-      <p:sp>
-        <p:nvSpPr>
-          <p:cNvPr id="9" name="TextBox 8"/>
+              <a:t>Understanding &amp; Reducing Employee Attrition</a:t>
+            </a:r>
+          </a:p>
+        </p:txBody>
+      </p:sp>
+      <p:sp>
+        <p:nvSpPr>
+          <p:cNvPr id="15" name="TextBox 14"/>
           <p:cNvSpPr txBox="1"/>
           <p:nvPr/>
         </p:nvSpPr>
         <p:spPr>
           <a:xfrm>
-            <a:off x="9601200" y="6446520"/>
-            <a:ext cx="1828800" cy="274320"/>
+            <a:off x="9646920" y="6437376"/>
+            <a:ext cx="1828800" cy="256032"/>
           </a:xfrm>
           <a:prstGeom prst="rect">
             <a:avLst/>
@@ -7574,12 +8579,12 @@
           <a:noFill/>
         </p:spPr>
         <p:txBody>
-          <a:bodyPr wrap="none">
+          <a:bodyPr wrap="square" lIns="73152" rIns="73152" tIns="36576" bIns="36576">
             <a:spAutoFit/>
           </a:bodyPr>
           <a:lstStyle/>
           <a:p>
-            <a:pPr algn="ctr"/>
+            <a:pPr algn="r"/>
             <a:r>
               <a:rPr sz="900" b="0" i="0">
                 <a:solidFill>
@@ -7589,49 +8594,6 @@
               </a:rPr>
               <a:t>7 / 13</a:t>
             </a:r>
-          </a:p>
-        </p:txBody>
-      </p:sp>
-      <p:sp>
-        <p:nvSpPr>
-          <p:cNvPr id="10" name="Rectangle 9"/>
-          <p:cNvSpPr/>
-          <p:nvPr/>
-        </p:nvSpPr>
-        <p:spPr>
-          <a:xfrm>
-            <a:off x="11475720" y="365760"/>
-            <a:ext cx="274320" cy="274320"/>
-          </a:xfrm>
-          <a:prstGeom prst="rect">
-            <a:avLst/>
-          </a:prstGeom>
-          <a:solidFill>
-            <a:srgbClr val="C89B3C"/>
-          </a:solidFill>
-          <a:ln>
-            <a:noFill/>
-          </a:ln>
-        </p:spPr>
-        <p:style>
-          <a:lnRef idx="1">
-            <a:schemeClr val="accent1"/>
-          </a:lnRef>
-          <a:fillRef idx="3">
-            <a:schemeClr val="accent1"/>
-          </a:fillRef>
-          <a:effectRef idx="2">
-            <a:schemeClr val="accent1"/>
-          </a:effectRef>
-          <a:fontRef idx="minor">
-            <a:schemeClr val="lt1"/>
-          </a:fontRef>
-        </p:style>
-        <p:txBody>
-          <a:bodyPr rtlCol="0" anchor="ctr"/>
-          <a:lstStyle/>
-          <a:p>
-            <a:pPr algn="ctr"/>
           </a:p>
         </p:txBody>
       </p:sp>
@@ -7670,7 +8632,7 @@
         <p:spPr>
           <a:xfrm>
             <a:off x="0" y="0"/>
-            <a:ext cx="411480" cy="6858000"/>
+            <a:ext cx="329184" cy="6858000"/>
           </a:xfrm>
           <a:prstGeom prst="rect">
             <a:avLst/>
@@ -7712,8 +8674,8 @@
         </p:nvSpPr>
         <p:spPr>
           <a:xfrm>
-            <a:off x="731520" y="365760"/>
-            <a:ext cx="10515600" cy="822960"/>
+            <a:off x="658368" y="320040"/>
+            <a:ext cx="10652760" cy="713232"/>
           </a:xfrm>
           <a:prstGeom prst="rect">
             <a:avLst/>
@@ -7721,11 +8683,12 @@
           <a:noFill/>
         </p:spPr>
         <p:txBody>
-          <a:bodyPr wrap="square">
+          <a:bodyPr wrap="square" lIns="73152" rIns="73152" tIns="36576" bIns="36576">
             <a:spAutoFit/>
           </a:bodyPr>
           <a:lstStyle/>
           <a:p>
+            <a:pPr algn="l"/>
             <a:r>
               <a:rPr sz="2400" b="1" i="0">
                 <a:solidFill>
@@ -7733,7 +8696,7 @@
                 </a:solidFill>
                 <a:latin typeface="Calibri"/>
               </a:rPr>
-              <a:t>Strategic Options</a:t>
+              <a:t>Business Implications: The Cost of Inaction</a:t>
             </a:r>
           </a:p>
         </p:txBody>
@@ -7746,8 +8709,8 @@
         </p:nvSpPr>
         <p:spPr>
           <a:xfrm>
-            <a:off x="731520" y="1078992"/>
-            <a:ext cx="822960" cy="45720"/>
+            <a:off x="731520" y="1042415"/>
+            <a:ext cx="960120" cy="36576"/>
           </a:xfrm>
           <a:prstGeom prst="rect">
             <a:avLst/>
@@ -7789,8 +8752,8 @@
         </p:nvSpPr>
         <p:spPr>
           <a:xfrm>
-            <a:off x="731520" y="1325880"/>
-            <a:ext cx="10607040" cy="777240"/>
+            <a:off x="713232" y="1325880"/>
+            <a:ext cx="10652760" cy="694944"/>
           </a:xfrm>
           <a:prstGeom prst="roundRect">
             <a:avLst/>
@@ -7817,19 +8780,10 @@
           </a:fontRef>
         </p:style>
         <p:txBody>
-          <a:bodyPr rtlCol="0" anchor="ctr" wrap="square" lIns="164592" rIns="164592" tIns="73152" bIns="73152"/>
+          <a:bodyPr rtlCol="0" anchor="ctr"/>
           <a:lstStyle/>
           <a:p>
             <a:pPr algn="ctr"/>
-            <a:r>
-              <a:rPr sz="1400" b="1" i="0">
-                <a:solidFill>
-                  <a:srgbClr val="FFFFFF"/>
-                </a:solidFill>
-                <a:latin typeface="Calibri"/>
-              </a:rPr>
-              <a:t>Three approaches balancing speed, comprehensiveness, and resource investment.</a:t>
-            </a:r>
           </a:p>
         </p:txBody>
       </p:sp>
@@ -7841,8 +8795,8 @@
         </p:nvSpPr>
         <p:spPr>
           <a:xfrm>
-            <a:off x="822960" y="2377440"/>
-            <a:ext cx="10607040" cy="3383280"/>
+            <a:off x="850392" y="1399032"/>
+            <a:ext cx="10378440" cy="603504"/>
           </a:xfrm>
           <a:prstGeom prst="rect">
             <a:avLst/>
@@ -7850,97 +8804,397 @@
           <a:noFill/>
         </p:spPr>
         <p:txBody>
-          <a:bodyPr wrap="square">
+          <a:bodyPr wrap="square" lIns="73152" rIns="73152" tIns="36576" bIns="36576">
             <a:spAutoFit/>
           </a:bodyPr>
           <a:lstStyle/>
           <a:p>
-            <a:pPr>
-              <a:spcAft>
-                <a:spcPts val="800"/>
-              </a:spcAft>
-            </a:pPr>
-            <a:r>
-              <a:rPr sz="1200" b="1" i="0">
-                <a:solidFill>
-                  <a:srgbClr val="1F5EA8"/>
-                </a:solidFill>
-                <a:latin typeface="Calibri"/>
-              </a:rPr>
-              <a:t>▪  </a:t>
-            </a:r>
-            <a:r>
-              <a:rPr sz="1200" b="0" i="0">
+            <a:pPr algn="l"/>
+            <a:r>
+              <a:rPr sz="1300" b="1" i="0">
+                <a:solidFill>
+                  <a:srgbClr val="FFFFFF"/>
+                </a:solidFill>
+                <a:latin typeface="Calibri"/>
+              </a:rPr>
+              <a:t>Unaddressed, these attrition drivers directly impact productivity, morale, and bottom-line costs.</a:t>
+            </a:r>
+          </a:p>
+        </p:txBody>
+      </p:sp>
+      <p:sp>
+        <p:nvSpPr>
+          <p:cNvPr id="7" name="Rounded Rectangle 6"/>
+          <p:cNvSpPr/>
+          <p:nvPr/>
+        </p:nvSpPr>
+        <p:spPr>
+          <a:xfrm>
+            <a:off x="786384" y="2267712"/>
+            <a:ext cx="5029200" cy="1051560"/>
+          </a:xfrm>
+          <a:prstGeom prst="roundRect">
+            <a:avLst/>
+          </a:prstGeom>
+          <a:solidFill>
+            <a:srgbClr val="FFFFFF"/>
+          </a:solidFill>
+          <a:ln>
+            <a:noFill/>
+          </a:ln>
+        </p:spPr>
+        <p:style>
+          <a:lnRef idx="1">
+            <a:schemeClr val="accent1"/>
+          </a:lnRef>
+          <a:fillRef idx="3">
+            <a:schemeClr val="accent1"/>
+          </a:fillRef>
+          <a:effectRef idx="2">
+            <a:schemeClr val="accent1"/>
+          </a:effectRef>
+          <a:fontRef idx="minor">
+            <a:schemeClr val="lt1"/>
+          </a:fontRef>
+        </p:style>
+        <p:txBody>
+          <a:bodyPr rtlCol="0" anchor="ctr"/>
+          <a:lstStyle/>
+          <a:p>
+            <a:pPr algn="ctr"/>
+          </a:p>
+        </p:txBody>
+      </p:sp>
+      <p:sp>
+        <p:nvSpPr>
+          <p:cNvPr id="8" name="Rectangle 7"/>
+          <p:cNvSpPr/>
+          <p:nvPr/>
+        </p:nvSpPr>
+        <p:spPr>
+          <a:xfrm>
+            <a:off x="786384" y="2267712"/>
+            <a:ext cx="73152" cy="1051560"/>
+          </a:xfrm>
+          <a:prstGeom prst="rect">
+            <a:avLst/>
+          </a:prstGeom>
+          <a:solidFill>
+            <a:srgbClr val="1F5EA8"/>
+          </a:solidFill>
+          <a:ln>
+            <a:noFill/>
+          </a:ln>
+        </p:spPr>
+        <p:style>
+          <a:lnRef idx="1">
+            <a:schemeClr val="accent1"/>
+          </a:lnRef>
+          <a:fillRef idx="3">
+            <a:schemeClr val="accent1"/>
+          </a:fillRef>
+          <a:effectRef idx="2">
+            <a:schemeClr val="accent1"/>
+          </a:effectRef>
+          <a:fontRef idx="minor">
+            <a:schemeClr val="lt1"/>
+          </a:fontRef>
+        </p:style>
+        <p:txBody>
+          <a:bodyPr rtlCol="0" anchor="ctr"/>
+          <a:lstStyle/>
+          <a:p>
+            <a:pPr algn="ctr"/>
+          </a:p>
+        </p:txBody>
+      </p:sp>
+      <p:sp>
+        <p:nvSpPr>
+          <p:cNvPr id="9" name="TextBox 8"/>
+          <p:cNvSpPr txBox="1"/>
+          <p:nvPr/>
+        </p:nvSpPr>
+        <p:spPr>
+          <a:xfrm>
+            <a:off x="987552" y="2414016"/>
+            <a:ext cx="4572000" cy="694944"/>
+          </a:xfrm>
+          <a:prstGeom prst="rect">
+            <a:avLst/>
+          </a:prstGeom>
+          <a:noFill/>
+        </p:spPr>
+        <p:txBody>
+          <a:bodyPr wrap="square" lIns="73152" rIns="73152" tIns="36576" bIns="36576">
+            <a:spAutoFit/>
+          </a:bodyPr>
+          <a:lstStyle/>
+          <a:p>
+            <a:pPr algn="l"/>
+            <a:r>
+              <a:rPr sz="1100" b="0" i="0">
                 <a:solidFill>
                   <a:srgbClr val="242E38"/>
                 </a:solidFill>
                 <a:latin typeface="Calibri"/>
               </a:rPr>
-              <a:t>Option 1: Quick Remediation - address critical data issues only, develop baseline model within 2 weeks. (Fast, limited scope)</a:t>
-            </a:r>
-          </a:p>
-          <a:p>
-            <a:pPr>
-              <a:spcAft>
-                <a:spcPts val="800"/>
-              </a:spcAft>
-            </a:pPr>
-            <a:r>
-              <a:rPr sz="1200" b="1" i="0">
-                <a:solidFill>
-                  <a:srgbClr val="1F5EA8"/>
-                </a:solidFill>
-                <a:latin typeface="Calibri"/>
-              </a:rPr>
-              <a:t>▪  </a:t>
-            </a:r>
-            <a:r>
-              <a:rPr sz="1200" b="0" i="0">
+              <a:t>Productivity Drain: Constant recruiting and onboarding for high-turnover roles (Sales, Lab Tech) disrupts operations and team cohesion.</a:t>
+            </a:r>
+          </a:p>
+        </p:txBody>
+      </p:sp>
+      <p:sp>
+        <p:nvSpPr>
+          <p:cNvPr id="10" name="Rounded Rectangle 9"/>
+          <p:cNvSpPr/>
+          <p:nvPr/>
+        </p:nvSpPr>
+        <p:spPr>
+          <a:xfrm>
+            <a:off x="6272784" y="2267712"/>
+            <a:ext cx="5029200" cy="1051560"/>
+          </a:xfrm>
+          <a:prstGeom prst="roundRect">
+            <a:avLst/>
+          </a:prstGeom>
+          <a:solidFill>
+            <a:srgbClr val="FFFFFF"/>
+          </a:solidFill>
+          <a:ln>
+            <a:noFill/>
+          </a:ln>
+        </p:spPr>
+        <p:style>
+          <a:lnRef idx="1">
+            <a:schemeClr val="accent1"/>
+          </a:lnRef>
+          <a:fillRef idx="3">
+            <a:schemeClr val="accent1"/>
+          </a:fillRef>
+          <a:effectRef idx="2">
+            <a:schemeClr val="accent1"/>
+          </a:effectRef>
+          <a:fontRef idx="minor">
+            <a:schemeClr val="lt1"/>
+          </a:fontRef>
+        </p:style>
+        <p:txBody>
+          <a:bodyPr rtlCol="0" anchor="ctr"/>
+          <a:lstStyle/>
+          <a:p>
+            <a:pPr algn="ctr"/>
+          </a:p>
+        </p:txBody>
+      </p:sp>
+      <p:sp>
+        <p:nvSpPr>
+          <p:cNvPr id="11" name="Rectangle 10"/>
+          <p:cNvSpPr/>
+          <p:nvPr/>
+        </p:nvSpPr>
+        <p:spPr>
+          <a:xfrm>
+            <a:off x="6272784" y="2267712"/>
+            <a:ext cx="73152" cy="1051560"/>
+          </a:xfrm>
+          <a:prstGeom prst="rect">
+            <a:avLst/>
+          </a:prstGeom>
+          <a:solidFill>
+            <a:srgbClr val="C89B3C"/>
+          </a:solidFill>
+          <a:ln>
+            <a:noFill/>
+          </a:ln>
+        </p:spPr>
+        <p:style>
+          <a:lnRef idx="1">
+            <a:schemeClr val="accent1"/>
+          </a:lnRef>
+          <a:fillRef idx="3">
+            <a:schemeClr val="accent1"/>
+          </a:fillRef>
+          <a:effectRef idx="2">
+            <a:schemeClr val="accent1"/>
+          </a:effectRef>
+          <a:fontRef idx="minor">
+            <a:schemeClr val="lt1"/>
+          </a:fontRef>
+        </p:style>
+        <p:txBody>
+          <a:bodyPr rtlCol="0" anchor="ctr"/>
+          <a:lstStyle/>
+          <a:p>
+            <a:pPr algn="ctr"/>
+          </a:p>
+        </p:txBody>
+      </p:sp>
+      <p:sp>
+        <p:nvSpPr>
+          <p:cNvPr id="12" name="TextBox 11"/>
+          <p:cNvSpPr txBox="1"/>
+          <p:nvPr/>
+        </p:nvSpPr>
+        <p:spPr>
+          <a:xfrm>
+            <a:off x="6473952" y="2414016"/>
+            <a:ext cx="4572000" cy="694944"/>
+          </a:xfrm>
+          <a:prstGeom prst="rect">
+            <a:avLst/>
+          </a:prstGeom>
+          <a:noFill/>
+        </p:spPr>
+        <p:txBody>
+          <a:bodyPr wrap="square" lIns="73152" rIns="73152" tIns="36576" bIns="36576">
+            <a:spAutoFit/>
+          </a:bodyPr>
+          <a:lstStyle/>
+          <a:p>
+            <a:pPr algn="l"/>
+            <a:r>
+              <a:rPr sz="1100" b="0" i="0">
                 <a:solidFill>
                   <a:srgbClr val="242E38"/>
                 </a:solidFill>
                 <a:latin typeface="Calibri"/>
               </a:rPr>
-              <a:t>Option 2: Comprehensive Analysis - full data quality assessment, extensive feature engineering, multiple model iterations. (Thorough, resource-intensive)</a:t>
-            </a:r>
-          </a:p>
-          <a:p>
-            <a:pPr>
-              <a:spcAft>
-                <a:spcPts val="800"/>
-              </a:spcAft>
-            </a:pPr>
-            <a:r>
-              <a:rPr sz="1200" b="1" i="0">
-                <a:solidFill>
-                  <a:srgbClr val="1F5EA8"/>
-                </a:solidFill>
-                <a:latin typeface="Calibri"/>
-              </a:rPr>
-              <a:t>▪  </a:t>
-            </a:r>
-            <a:r>
-              <a:rPr sz="1200" b="0" i="0">
+              <a:t>Morale Erosion: High attrition among tenured employees signals a 'career ceiling,' discouraging high performers from staying long-term.</a:t>
+            </a:r>
+          </a:p>
+        </p:txBody>
+      </p:sp>
+      <p:sp>
+        <p:nvSpPr>
+          <p:cNvPr id="13" name="Rounded Rectangle 12"/>
+          <p:cNvSpPr/>
+          <p:nvPr/>
+        </p:nvSpPr>
+        <p:spPr>
+          <a:xfrm>
+            <a:off x="786384" y="3685032"/>
+            <a:ext cx="5029200" cy="1051560"/>
+          </a:xfrm>
+          <a:prstGeom prst="roundRect">
+            <a:avLst/>
+          </a:prstGeom>
+          <a:solidFill>
+            <a:srgbClr val="FFFFFF"/>
+          </a:solidFill>
+          <a:ln>
+            <a:noFill/>
+          </a:ln>
+        </p:spPr>
+        <p:style>
+          <a:lnRef idx="1">
+            <a:schemeClr val="accent1"/>
+          </a:lnRef>
+          <a:fillRef idx="3">
+            <a:schemeClr val="accent1"/>
+          </a:fillRef>
+          <a:effectRef idx="2">
+            <a:schemeClr val="accent1"/>
+          </a:effectRef>
+          <a:fontRef idx="minor">
+            <a:schemeClr val="lt1"/>
+          </a:fontRef>
+        </p:style>
+        <p:txBody>
+          <a:bodyPr rtlCol="0" anchor="ctr"/>
+          <a:lstStyle/>
+          <a:p>
+            <a:pPr algn="ctr"/>
+          </a:p>
+        </p:txBody>
+      </p:sp>
+      <p:sp>
+        <p:nvSpPr>
+          <p:cNvPr id="14" name="Rectangle 13"/>
+          <p:cNvSpPr/>
+          <p:nvPr/>
+        </p:nvSpPr>
+        <p:spPr>
+          <a:xfrm>
+            <a:off x="786384" y="3685032"/>
+            <a:ext cx="73152" cy="1051560"/>
+          </a:xfrm>
+          <a:prstGeom prst="rect">
+            <a:avLst/>
+          </a:prstGeom>
+          <a:solidFill>
+            <a:srgbClr val="1F5EA8"/>
+          </a:solidFill>
+          <a:ln>
+            <a:noFill/>
+          </a:ln>
+        </p:spPr>
+        <p:style>
+          <a:lnRef idx="1">
+            <a:schemeClr val="accent1"/>
+          </a:lnRef>
+          <a:fillRef idx="3">
+            <a:schemeClr val="accent1"/>
+          </a:fillRef>
+          <a:effectRef idx="2">
+            <a:schemeClr val="accent1"/>
+          </a:effectRef>
+          <a:fontRef idx="minor">
+            <a:schemeClr val="lt1"/>
+          </a:fontRef>
+        </p:style>
+        <p:txBody>
+          <a:bodyPr rtlCol="0" anchor="ctr"/>
+          <a:lstStyle/>
+          <a:p>
+            <a:pPr algn="ctr"/>
+          </a:p>
+        </p:txBody>
+      </p:sp>
+      <p:sp>
+        <p:nvSpPr>
+          <p:cNvPr id="15" name="TextBox 14"/>
+          <p:cNvSpPr txBox="1"/>
+          <p:nvPr/>
+        </p:nvSpPr>
+        <p:spPr>
+          <a:xfrm>
+            <a:off x="987552" y="3831336"/>
+            <a:ext cx="4572000" cy="694944"/>
+          </a:xfrm>
+          <a:prstGeom prst="rect">
+            <a:avLst/>
+          </a:prstGeom>
+          <a:noFill/>
+        </p:spPr>
+        <p:txBody>
+          <a:bodyPr wrap="square" lIns="73152" rIns="73152" tIns="36576" bIns="36576">
+            <a:spAutoFit/>
+          </a:bodyPr>
+          <a:lstStyle/>
+          <a:p>
+            <a:pPr algn="l"/>
+            <a:r>
+              <a:rPr sz="1100" b="0" i="0">
                 <a:solidFill>
                   <a:srgbClr val="242E38"/>
                 </a:solidFill>
                 <a:latin typeface="Calibri"/>
               </a:rPr>
-              <a:t>Option 3: Phased Implementation - prioritize critical fixes, develop MVP model, iterate based on initial results. (Balanced, scalable)</a:t>
-            </a:r>
-          </a:p>
-        </p:txBody>
-      </p:sp>
-      <p:sp>
-        <p:nvSpPr>
-          <p:cNvPr id="7" name="Rectangle 6"/>
+              <a:t>Financial Impact: Conservative estimate: Replacing an employee costs 50-150% of their annual salary. Reducing attrition by 5% company-wide...</a:t>
+            </a:r>
+          </a:p>
+        </p:txBody>
+      </p:sp>
+      <p:sp>
+        <p:nvSpPr>
+          <p:cNvPr id="16" name="Rectangle 15"/>
           <p:cNvSpPr/>
           <p:nvPr/>
         </p:nvSpPr>
         <p:spPr>
           <a:xfrm>
-            <a:off x="731520" y="6355080"/>
-            <a:ext cx="10698480" cy="18288"/>
+            <a:off x="713232" y="6318504"/>
+            <a:ext cx="10835640" cy="13716"/>
           </a:xfrm>
           <a:prstGeom prst="rect">
             <a:avLst/>
@@ -7976,14 +9230,14 @@
       </p:sp>
       <p:sp>
         <p:nvSpPr>
-          <p:cNvPr id="8" name="TextBox 7"/>
+          <p:cNvPr id="17" name="TextBox 16"/>
           <p:cNvSpPr txBox="1"/>
           <p:nvPr/>
         </p:nvSpPr>
         <p:spPr>
           <a:xfrm>
-            <a:off x="731520" y="6446520"/>
-            <a:ext cx="7772400" cy="274320"/>
+            <a:off x="713232" y="6437376"/>
+            <a:ext cx="7863840" cy="256032"/>
           </a:xfrm>
           <a:prstGeom prst="rect">
             <a:avLst/>
@@ -7991,11 +9245,12 @@
           <a:noFill/>
         </p:spPr>
         <p:txBody>
-          <a:bodyPr wrap="none">
+          <a:bodyPr wrap="square" lIns="73152" rIns="73152" tIns="36576" bIns="36576">
             <a:spAutoFit/>
           </a:bodyPr>
           <a:lstStyle/>
           <a:p>
+            <a:pPr algn="l"/>
             <a:r>
               <a:rPr sz="900" b="0" i="0">
                 <a:solidFill>
@@ -8003,21 +9258,21 @@
                 </a:solidFill>
                 <a:latin typeface="Calibri"/>
               </a:rPr>
-              <a:t>Credit Risk Analytics</a:t>
-            </a:r>
-          </a:p>
-        </p:txBody>
-      </p:sp>
-      <p:sp>
-        <p:nvSpPr>
-          <p:cNvPr id="9" name="TextBox 8"/>
+              <a:t>Understanding &amp; Reducing Employee Attrition</a:t>
+            </a:r>
+          </a:p>
+        </p:txBody>
+      </p:sp>
+      <p:sp>
+        <p:nvSpPr>
+          <p:cNvPr id="18" name="TextBox 17"/>
           <p:cNvSpPr txBox="1"/>
           <p:nvPr/>
         </p:nvSpPr>
         <p:spPr>
           <a:xfrm>
-            <a:off x="9601200" y="6446520"/>
-            <a:ext cx="1828800" cy="274320"/>
+            <a:off x="9646920" y="6437376"/>
+            <a:ext cx="1828800" cy="256032"/>
           </a:xfrm>
           <a:prstGeom prst="rect">
             <a:avLst/>
@@ -8025,12 +9280,12 @@
           <a:noFill/>
         </p:spPr>
         <p:txBody>
-          <a:bodyPr wrap="none">
+          <a:bodyPr wrap="square" lIns="73152" rIns="73152" tIns="36576" bIns="36576">
             <a:spAutoFit/>
           </a:bodyPr>
           <a:lstStyle/>
           <a:p>
-            <a:pPr algn="ctr"/>
+            <a:pPr algn="r"/>
             <a:r>
               <a:rPr sz="900" b="0" i="0">
                 <a:solidFill>
@@ -8040,49 +9295,6 @@
               </a:rPr>
               <a:t>8 / 13</a:t>
             </a:r>
-          </a:p>
-        </p:txBody>
-      </p:sp>
-      <p:sp>
-        <p:nvSpPr>
-          <p:cNvPr id="10" name="Rectangle 9"/>
-          <p:cNvSpPr/>
-          <p:nvPr/>
-        </p:nvSpPr>
-        <p:spPr>
-          <a:xfrm>
-            <a:off x="11475720" y="365760"/>
-            <a:ext cx="274320" cy="274320"/>
-          </a:xfrm>
-          <a:prstGeom prst="rect">
-            <a:avLst/>
-          </a:prstGeom>
-          <a:solidFill>
-            <a:srgbClr val="C89B3C"/>
-          </a:solidFill>
-          <a:ln>
-            <a:noFill/>
-          </a:ln>
-        </p:spPr>
-        <p:style>
-          <a:lnRef idx="1">
-            <a:schemeClr val="accent1"/>
-          </a:lnRef>
-          <a:fillRef idx="3">
-            <a:schemeClr val="accent1"/>
-          </a:fillRef>
-          <a:effectRef idx="2">
-            <a:schemeClr val="accent1"/>
-          </a:effectRef>
-          <a:fontRef idx="minor">
-            <a:schemeClr val="lt1"/>
-          </a:fontRef>
-        </p:style>
-        <p:txBody>
-          <a:bodyPr rtlCol="0" anchor="ctr"/>
-          <a:lstStyle/>
-          <a:p>
-            <a:pPr algn="ctr"/>
           </a:p>
         </p:txBody>
       </p:sp>
@@ -8121,7 +9333,7 @@
         <p:spPr>
           <a:xfrm>
             <a:off x="0" y="0"/>
-            <a:ext cx="411480" cy="6858000"/>
+            <a:ext cx="329184" cy="6858000"/>
           </a:xfrm>
           <a:prstGeom prst="rect">
             <a:avLst/>
@@ -8163,8 +9375,8 @@
         </p:nvSpPr>
         <p:spPr>
           <a:xfrm>
-            <a:off x="731520" y="365760"/>
-            <a:ext cx="10515600" cy="822960"/>
+            <a:off x="658368" y="320040"/>
+            <a:ext cx="10652760" cy="713232"/>
           </a:xfrm>
           <a:prstGeom prst="rect">
             <a:avLst/>
@@ -8172,19 +9384,20 @@
           <a:noFill/>
         </p:spPr>
         <p:txBody>
-          <a:bodyPr wrap="square">
+          <a:bodyPr wrap="square" lIns="73152" rIns="73152" tIns="36576" bIns="36576">
             <a:spAutoFit/>
           </a:bodyPr>
           <a:lstStyle/>
           <a:p>
-            <a:r>
-              <a:rPr sz="2400" b="1" i="0">
+            <a:pPr algn="l"/>
+            <a:r>
+              <a:rPr sz="2100" b="1" i="0">
                 <a:solidFill>
                   <a:srgbClr val="122B45"/>
                 </a:solidFill>
                 <a:latin typeface="Calibri"/>
               </a:rPr>
-              <a:t>Recommendation</a:t>
+              <a:t>Recommendations: A Targeted, Three-Pillar Retention Strategy</a:t>
             </a:r>
           </a:p>
         </p:txBody>
@@ -8197,8 +9410,8 @@
         </p:nvSpPr>
         <p:spPr>
           <a:xfrm>
-            <a:off x="731520" y="1078992"/>
-            <a:ext cx="822960" cy="45720"/>
+            <a:off x="731520" y="1042415"/>
+            <a:ext cx="960120" cy="36576"/>
           </a:xfrm>
           <a:prstGeom prst="rect">
             <a:avLst/>
@@ -8240,14 +9453,14 @@
         </p:nvSpPr>
         <p:spPr>
           <a:xfrm>
-            <a:off x="731520" y="1325880"/>
-            <a:ext cx="10607040" cy="1051560"/>
+            <a:off x="713232" y="1207008"/>
+            <a:ext cx="10652760" cy="640080"/>
           </a:xfrm>
           <a:prstGeom prst="roundRect">
             <a:avLst/>
           </a:prstGeom>
           <a:solidFill>
-            <a:srgbClr val="1F5EA8"/>
+            <a:srgbClr val="377D5D"/>
           </a:solidFill>
           <a:ln>
             <a:noFill/>
@@ -8268,19 +9481,10 @@
           </a:fontRef>
         </p:style>
         <p:txBody>
-          <a:bodyPr rtlCol="0" anchor="ctr" wrap="square" lIns="164592" rIns="164592" tIns="73152" bIns="73152"/>
+          <a:bodyPr rtlCol="0" anchor="ctr"/>
           <a:lstStyle/>
           <a:p>
             <a:pPr algn="ctr"/>
-            <a:r>
-              <a:rPr sz="1200" b="1" i="0">
-                <a:solidFill>
-                  <a:srgbClr val="FFFFFF"/>
-                </a:solidFill>
-                <a:latin typeface="Calibri"/>
-              </a:rPr>
-              <a:t>Implement Phased Approach with immediate focus on critical data quality issues and rapid MVP development.</a:t>
-            </a:r>
           </a:p>
         </p:txBody>
       </p:sp>
@@ -8292,8 +9496,8 @@
         </p:nvSpPr>
         <p:spPr>
           <a:xfrm>
-            <a:off x="822960" y="2651760"/>
-            <a:ext cx="10607040" cy="3108959"/>
+            <a:off x="850392" y="1280160"/>
+            <a:ext cx="10378440" cy="548640"/>
           </a:xfrm>
           <a:prstGeom prst="rect">
             <a:avLst/>
@@ -8301,133 +9505,20 @@
           <a:noFill/>
         </p:spPr>
         <p:txBody>
-          <a:bodyPr wrap="square">
+          <a:bodyPr wrap="square" lIns="73152" rIns="73152" tIns="36576" bIns="36576">
             <a:spAutoFit/>
           </a:bodyPr>
           <a:lstStyle/>
           <a:p>
-            <a:pPr>
-              <a:spcAft>
-                <a:spcPts val="800"/>
-              </a:spcAft>
-            </a:pPr>
+            <a:pPr algn="l"/>
             <a:r>
               <a:rPr sz="1300" b="1" i="0">
                 <a:solidFill>
-                  <a:srgbClr val="1F5EA8"/>
-                </a:solidFill>
-                <a:latin typeface="Calibri"/>
-              </a:rPr>
-              <a:t>▪  </a:t>
-            </a:r>
-            <a:r>
-              <a:rPr sz="1300" b="0" i="0">
-                <a:solidFill>
-                  <a:srgbClr val="242E38"/>
-                </a:solidFill>
-                <a:latin typeface="Calibri"/>
-              </a:rPr>
-              <a:t>Week 1: Correct employment length errors and analyze key outlier distributions.</a:t>
-            </a:r>
-          </a:p>
-          <a:p>
-            <a:pPr>
-              <a:spcAft>
-                <a:spcPts val="800"/>
-              </a:spcAft>
-            </a:pPr>
-            <a:r>
-              <a:rPr sz="1300" b="1" i="0">
-                <a:solidFill>
-                  <a:srgbClr val="1F5EA8"/>
-                </a:solidFill>
-                <a:latin typeface="Calibri"/>
-              </a:rPr>
-              <a:t>▪  </a:t>
-            </a:r>
-            <a:r>
-              <a:rPr sz="1300" b="0" i="0">
-                <a:solidFill>
-                  <a:srgbClr val="242E38"/>
-                </a:solidFill>
-                <a:latin typeface="Calibri"/>
-              </a:rPr>
-              <a:t>Week 2: Develop and validate baseline predictive model with cleaned data.</a:t>
-            </a:r>
-          </a:p>
-          <a:p>
-            <a:pPr>
-              <a:spcAft>
-                <a:spcPts val="800"/>
-              </a:spcAft>
-            </a:pPr>
-            <a:r>
-              <a:rPr sz="1300" b="1" i="0">
-                <a:solidFill>
-                  <a:srgbClr val="1F5EA8"/>
-                </a:solidFill>
-                <a:latin typeface="Calibri"/>
-              </a:rPr>
-              <a:t>▪  </a:t>
-            </a:r>
-            <a:r>
-              <a:rPr sz="1300" b="0" i="0">
-                <a:solidFill>
-                  <a:srgbClr val="242E38"/>
-                </a:solidFill>
-                <a:latin typeface="Calibri"/>
-              </a:rPr>
-              <a:t>Week 3-4: Iterate based on initial results, expand feature engineering, refine model.</a:t>
-            </a:r>
-          </a:p>
-          <a:p>
-            <a:pPr>
-              <a:spcAft>
-                <a:spcPts val="800"/>
-              </a:spcAft>
-            </a:pPr>
-            <a:r>
-              <a:rPr sz="1300" b="1" i="0">
-                <a:solidFill>
-                  <a:srgbClr val="1F5EA8"/>
-                </a:solidFill>
-                <a:latin typeface="Calibri"/>
-              </a:rPr>
-              <a:t>▪  </a:t>
-            </a:r>
-            <a:r>
-              <a:rPr sz="1300" b="0" i="0">
-                <a:solidFill>
-                  <a:srgbClr val="242E38"/>
-                </a:solidFill>
-                <a:latin typeface="Calibri"/>
-              </a:rPr>
-              <a:t>Ongoing: Monitor model performance against market conditions and adjust as needed.</a:t>
-            </a:r>
-          </a:p>
-          <a:p>
-            <a:pPr>
-              <a:spcAft>
-                <a:spcPts val="800"/>
-              </a:spcAft>
-            </a:pPr>
-            <a:r>
-              <a:rPr sz="1300" b="1" i="0">
-                <a:solidFill>
-                  <a:srgbClr val="1F5EA8"/>
-                </a:solidFill>
-                <a:latin typeface="Calibri"/>
-              </a:rPr>
-              <a:t>▪  </a:t>
-            </a:r>
-            <a:r>
-              <a:rPr sz="1300" b="0" i="0">
-                <a:solidFill>
-                  <a:srgbClr val="242E38"/>
-                </a:solidFill>
-                <a:latin typeface="Calibri"/>
-              </a:rPr>
-              <a:t>Expected outcome: 20-30% improvement in default prediction accuracy over current methods.</a:t>
+                  <a:srgbClr val="FFFFFF"/>
+                </a:solidFill>
+                <a:latin typeface="Calibri"/>
+              </a:rPr>
+              <a:t>Move from reactive to proactive retention with initiatives focused on our highest-risk drivers and segments.</a:t>
             </a:r>
           </a:p>
         </p:txBody>
@@ -8440,8 +9531,944 @@
         </p:nvSpPr>
         <p:spPr>
           <a:xfrm>
-            <a:off x="731520" y="6355080"/>
-            <a:ext cx="10698480" cy="18288"/>
+            <a:off x="786384" y="2057400"/>
+            <a:ext cx="3246120" cy="384048"/>
+          </a:xfrm>
+          <a:prstGeom prst="rect">
+            <a:avLst/>
+          </a:prstGeom>
+          <a:solidFill>
+            <a:srgbClr val="122B45"/>
+          </a:solidFill>
+          <a:ln>
+            <a:noFill/>
+          </a:ln>
+        </p:spPr>
+        <p:style>
+          <a:lnRef idx="1">
+            <a:schemeClr val="accent1"/>
+          </a:lnRef>
+          <a:fillRef idx="3">
+            <a:schemeClr val="accent1"/>
+          </a:fillRef>
+          <a:effectRef idx="2">
+            <a:schemeClr val="accent1"/>
+          </a:effectRef>
+          <a:fontRef idx="minor">
+            <a:schemeClr val="lt1"/>
+          </a:fontRef>
+        </p:style>
+        <p:txBody>
+          <a:bodyPr rtlCol="0" anchor="ctr"/>
+          <a:lstStyle/>
+          <a:p>
+            <a:pPr algn="ctr"/>
+          </a:p>
+        </p:txBody>
+      </p:sp>
+      <p:sp>
+        <p:nvSpPr>
+          <p:cNvPr id="8" name="TextBox 7"/>
+          <p:cNvSpPr txBox="1"/>
+          <p:nvPr/>
+        </p:nvSpPr>
+        <p:spPr>
+          <a:xfrm>
+            <a:off x="859536" y="2112264"/>
+            <a:ext cx="3099815" cy="228600"/>
+          </a:xfrm>
+          <a:prstGeom prst="rect">
+            <a:avLst/>
+          </a:prstGeom>
+          <a:noFill/>
+        </p:spPr>
+        <p:txBody>
+          <a:bodyPr wrap="square" lIns="73152" rIns="73152" tIns="36576" bIns="36576">
+            <a:spAutoFit/>
+          </a:bodyPr>
+          <a:lstStyle/>
+          <a:p>
+            <a:pPr algn="ctr"/>
+            <a:r>
+              <a:rPr sz="1000" b="1" i="0">
+                <a:solidFill>
+                  <a:srgbClr val="FFFFFF"/>
+                </a:solidFill>
+                <a:latin typeface="Calibri"/>
+              </a:rPr>
+              <a:t>Action</a:t>
+            </a:r>
+          </a:p>
+        </p:txBody>
+      </p:sp>
+      <p:sp>
+        <p:nvSpPr>
+          <p:cNvPr id="9" name="Rectangle 8"/>
+          <p:cNvSpPr/>
+          <p:nvPr/>
+        </p:nvSpPr>
+        <p:spPr>
+          <a:xfrm>
+            <a:off x="4069080" y="2057400"/>
+            <a:ext cx="3703320" cy="384048"/>
+          </a:xfrm>
+          <a:prstGeom prst="rect">
+            <a:avLst/>
+          </a:prstGeom>
+          <a:solidFill>
+            <a:srgbClr val="122B45"/>
+          </a:solidFill>
+          <a:ln>
+            <a:noFill/>
+          </a:ln>
+        </p:spPr>
+        <p:style>
+          <a:lnRef idx="1">
+            <a:schemeClr val="accent1"/>
+          </a:lnRef>
+          <a:fillRef idx="3">
+            <a:schemeClr val="accent1"/>
+          </a:fillRef>
+          <a:effectRef idx="2">
+            <a:schemeClr val="accent1"/>
+          </a:effectRef>
+          <a:fontRef idx="minor">
+            <a:schemeClr val="lt1"/>
+          </a:fontRef>
+        </p:style>
+        <p:txBody>
+          <a:bodyPr rtlCol="0" anchor="ctr"/>
+          <a:lstStyle/>
+          <a:p>
+            <a:pPr algn="ctr"/>
+          </a:p>
+        </p:txBody>
+      </p:sp>
+      <p:sp>
+        <p:nvSpPr>
+          <p:cNvPr id="10" name="TextBox 9"/>
+          <p:cNvSpPr txBox="1"/>
+          <p:nvPr/>
+        </p:nvSpPr>
+        <p:spPr>
+          <a:xfrm>
+            <a:off x="4142232" y="2112264"/>
+            <a:ext cx="3557015" cy="228600"/>
+          </a:xfrm>
+          <a:prstGeom prst="rect">
+            <a:avLst/>
+          </a:prstGeom>
+          <a:noFill/>
+        </p:spPr>
+        <p:txBody>
+          <a:bodyPr wrap="square" lIns="73152" rIns="73152" tIns="36576" bIns="36576">
+            <a:spAutoFit/>
+          </a:bodyPr>
+          <a:lstStyle/>
+          <a:p>
+            <a:pPr algn="ctr"/>
+            <a:r>
+              <a:rPr sz="1000" b="1" i="0">
+                <a:solidFill>
+                  <a:srgbClr val="FFFFFF"/>
+                </a:solidFill>
+                <a:latin typeface="Calibri"/>
+              </a:rPr>
+              <a:t>Why it matters</a:t>
+            </a:r>
+          </a:p>
+        </p:txBody>
+      </p:sp>
+      <p:sp>
+        <p:nvSpPr>
+          <p:cNvPr id="11" name="Rectangle 10"/>
+          <p:cNvSpPr/>
+          <p:nvPr/>
+        </p:nvSpPr>
+        <p:spPr>
+          <a:xfrm>
+            <a:off x="7818120" y="2057400"/>
+            <a:ext cx="3520440" cy="384048"/>
+          </a:xfrm>
+          <a:prstGeom prst="rect">
+            <a:avLst/>
+          </a:prstGeom>
+          <a:solidFill>
+            <a:srgbClr val="122B45"/>
+          </a:solidFill>
+          <a:ln>
+            <a:noFill/>
+          </a:ln>
+        </p:spPr>
+        <p:style>
+          <a:lnRef idx="1">
+            <a:schemeClr val="accent1"/>
+          </a:lnRef>
+          <a:fillRef idx="3">
+            <a:schemeClr val="accent1"/>
+          </a:fillRef>
+          <a:effectRef idx="2">
+            <a:schemeClr val="accent1"/>
+          </a:effectRef>
+          <a:fontRef idx="minor">
+            <a:schemeClr val="lt1"/>
+          </a:fontRef>
+        </p:style>
+        <p:txBody>
+          <a:bodyPr rtlCol="0" anchor="ctr"/>
+          <a:lstStyle/>
+          <a:p>
+            <a:pPr algn="ctr"/>
+          </a:p>
+        </p:txBody>
+      </p:sp>
+      <p:sp>
+        <p:nvSpPr>
+          <p:cNvPr id="12" name="TextBox 11"/>
+          <p:cNvSpPr txBox="1"/>
+          <p:nvPr/>
+        </p:nvSpPr>
+        <p:spPr>
+          <a:xfrm>
+            <a:off x="7891272" y="2112264"/>
+            <a:ext cx="3374136" cy="228600"/>
+          </a:xfrm>
+          <a:prstGeom prst="rect">
+            <a:avLst/>
+          </a:prstGeom>
+          <a:noFill/>
+        </p:spPr>
+        <p:txBody>
+          <a:bodyPr wrap="square" lIns="73152" rIns="73152" tIns="36576" bIns="36576">
+            <a:spAutoFit/>
+          </a:bodyPr>
+          <a:lstStyle/>
+          <a:p>
+            <a:pPr algn="ctr"/>
+            <a:r>
+              <a:rPr sz="1000" b="1" i="0">
+                <a:solidFill>
+                  <a:srgbClr val="FFFFFF"/>
+                </a:solidFill>
+                <a:latin typeface="Calibri"/>
+              </a:rPr>
+              <a:t>Evidence / impact</a:t>
+            </a:r>
+          </a:p>
+        </p:txBody>
+      </p:sp>
+      <p:sp>
+        <p:nvSpPr>
+          <p:cNvPr id="13" name="Rounded Rectangle 12"/>
+          <p:cNvSpPr/>
+          <p:nvPr/>
+        </p:nvSpPr>
+        <p:spPr>
+          <a:xfrm>
+            <a:off x="786384" y="2606040"/>
+            <a:ext cx="3246120" cy="822960"/>
+          </a:xfrm>
+          <a:prstGeom prst="roundRect">
+            <a:avLst/>
+          </a:prstGeom>
+          <a:solidFill>
+            <a:srgbClr val="FFFFFF"/>
+          </a:solidFill>
+          <a:ln>
+            <a:noFill/>
+          </a:ln>
+        </p:spPr>
+        <p:style>
+          <a:lnRef idx="1">
+            <a:schemeClr val="accent1"/>
+          </a:lnRef>
+          <a:fillRef idx="3">
+            <a:schemeClr val="accent1"/>
+          </a:fillRef>
+          <a:effectRef idx="2">
+            <a:schemeClr val="accent1"/>
+          </a:effectRef>
+          <a:fontRef idx="minor">
+            <a:schemeClr val="lt1"/>
+          </a:fontRef>
+        </p:style>
+        <p:txBody>
+          <a:bodyPr rtlCol="0" anchor="ctr"/>
+          <a:lstStyle/>
+          <a:p>
+            <a:pPr algn="ctr"/>
+          </a:p>
+        </p:txBody>
+      </p:sp>
+      <p:sp>
+        <p:nvSpPr>
+          <p:cNvPr id="14" name="Rounded Rectangle 13"/>
+          <p:cNvSpPr/>
+          <p:nvPr/>
+        </p:nvSpPr>
+        <p:spPr>
+          <a:xfrm>
+            <a:off x="4069080" y="2606040"/>
+            <a:ext cx="3703320" cy="822960"/>
+          </a:xfrm>
+          <a:prstGeom prst="roundRect">
+            <a:avLst/>
+          </a:prstGeom>
+          <a:solidFill>
+            <a:srgbClr val="FFFFFF"/>
+          </a:solidFill>
+          <a:ln>
+            <a:noFill/>
+          </a:ln>
+        </p:spPr>
+        <p:style>
+          <a:lnRef idx="1">
+            <a:schemeClr val="accent1"/>
+          </a:lnRef>
+          <a:fillRef idx="3">
+            <a:schemeClr val="accent1"/>
+          </a:fillRef>
+          <a:effectRef idx="2">
+            <a:schemeClr val="accent1"/>
+          </a:effectRef>
+          <a:fontRef idx="minor">
+            <a:schemeClr val="lt1"/>
+          </a:fontRef>
+        </p:style>
+        <p:txBody>
+          <a:bodyPr rtlCol="0" anchor="ctr"/>
+          <a:lstStyle/>
+          <a:p>
+            <a:pPr algn="ctr"/>
+          </a:p>
+        </p:txBody>
+      </p:sp>
+      <p:sp>
+        <p:nvSpPr>
+          <p:cNvPr id="15" name="Rounded Rectangle 14"/>
+          <p:cNvSpPr/>
+          <p:nvPr/>
+        </p:nvSpPr>
+        <p:spPr>
+          <a:xfrm>
+            <a:off x="7818120" y="2606040"/>
+            <a:ext cx="3520440" cy="822960"/>
+          </a:xfrm>
+          <a:prstGeom prst="roundRect">
+            <a:avLst/>
+          </a:prstGeom>
+          <a:solidFill>
+            <a:srgbClr val="FFFFFF"/>
+          </a:solidFill>
+          <a:ln>
+            <a:noFill/>
+          </a:ln>
+        </p:spPr>
+        <p:style>
+          <a:lnRef idx="1">
+            <a:schemeClr val="accent1"/>
+          </a:lnRef>
+          <a:fillRef idx="3">
+            <a:schemeClr val="accent1"/>
+          </a:fillRef>
+          <a:effectRef idx="2">
+            <a:schemeClr val="accent1"/>
+          </a:effectRef>
+          <a:fontRef idx="minor">
+            <a:schemeClr val="lt1"/>
+          </a:fontRef>
+        </p:style>
+        <p:txBody>
+          <a:bodyPr rtlCol="0" anchor="ctr"/>
+          <a:lstStyle/>
+          <a:p>
+            <a:pPr algn="ctr"/>
+          </a:p>
+        </p:txBody>
+      </p:sp>
+      <p:sp>
+        <p:nvSpPr>
+          <p:cNvPr id="16" name="TextBox 15"/>
+          <p:cNvSpPr txBox="1"/>
+          <p:nvPr/>
+        </p:nvSpPr>
+        <p:spPr>
+          <a:xfrm>
+            <a:off x="859536" y="2715768"/>
+            <a:ext cx="3099815" cy="502920"/>
+          </a:xfrm>
+          <a:prstGeom prst="rect">
+            <a:avLst/>
+          </a:prstGeom>
+          <a:noFill/>
+        </p:spPr>
+        <p:txBody>
+          <a:bodyPr wrap="square" lIns="73152" rIns="73152" tIns="36576" bIns="36576">
+            <a:spAutoFit/>
+          </a:bodyPr>
+          <a:lstStyle/>
+          <a:p>
+            <a:pPr algn="l"/>
+            <a:r>
+              <a:rPr sz="1000" b="0" i="0">
+                <a:solidFill>
+                  <a:srgbClr val="242E38"/>
+                </a:solidFill>
+                <a:latin typeface="Calibri"/>
+              </a:rPr>
+              <a:t>Pillar 1: Enhance Role Fulfillment (Addresses Job Satisfaction)</a:t>
+            </a:r>
+          </a:p>
+        </p:txBody>
+      </p:sp>
+      <p:sp>
+        <p:nvSpPr>
+          <p:cNvPr id="17" name="TextBox 16"/>
+          <p:cNvSpPr txBox="1"/>
+          <p:nvPr/>
+        </p:nvSpPr>
+        <p:spPr>
+          <a:xfrm>
+            <a:off x="4142232" y="2715768"/>
+            <a:ext cx="3557015" cy="502920"/>
+          </a:xfrm>
+          <a:prstGeom prst="rect">
+            <a:avLst/>
+          </a:prstGeom>
+          <a:noFill/>
+        </p:spPr>
+        <p:txBody>
+          <a:bodyPr wrap="square" lIns="73152" rIns="73152" tIns="36576" bIns="36576">
+            <a:spAutoFit/>
+          </a:bodyPr>
+          <a:lstStyle/>
+          <a:p>
+            <a:pPr algn="l"/>
+            <a:r>
+              <a:rPr sz="1000" b="0" i="0">
+                <a:solidFill>
+                  <a:srgbClr val="242E38"/>
+                </a:solidFill>
+                <a:latin typeface="Calibri"/>
+              </a:rPr>
+              <a:t>Launch 'Stay Interviews' and role redesign pilots for Sales Reps &amp; Lab Technicians...</a:t>
+            </a:r>
+          </a:p>
+        </p:txBody>
+      </p:sp>
+      <p:sp>
+        <p:nvSpPr>
+          <p:cNvPr id="18" name="TextBox 17"/>
+          <p:cNvSpPr txBox="1"/>
+          <p:nvPr/>
+        </p:nvSpPr>
+        <p:spPr>
+          <a:xfrm>
+            <a:off x="7891272" y="2715768"/>
+            <a:ext cx="3374136" cy="502920"/>
+          </a:xfrm>
+          <a:prstGeom prst="rect">
+            <a:avLst/>
+          </a:prstGeom>
+          <a:noFill/>
+        </p:spPr>
+        <p:txBody>
+          <a:bodyPr wrap="square" lIns="73152" rIns="73152" tIns="36576" bIns="36576">
+            <a:spAutoFit/>
+          </a:bodyPr>
+          <a:lstStyle/>
+          <a:p>
+            <a:pPr algn="l"/>
+            <a:r>
+              <a:rPr sz="1000" b="0" i="0">
+                <a:solidFill>
+                  <a:srgbClr val="242E38"/>
+                </a:solidFill>
+                <a:latin typeface="Calibri"/>
+              </a:rPr>
+              <a:t>This phased approach targets root causes, is measurable, and can show ROI within 12-18 months.</a:t>
+            </a:r>
+          </a:p>
+        </p:txBody>
+      </p:sp>
+      <p:sp>
+        <p:nvSpPr>
+          <p:cNvPr id="19" name="Rounded Rectangle 18"/>
+          <p:cNvSpPr/>
+          <p:nvPr/>
+        </p:nvSpPr>
+        <p:spPr>
+          <a:xfrm>
+            <a:off x="786384" y="3611880"/>
+            <a:ext cx="3246120" cy="822960"/>
+          </a:xfrm>
+          <a:prstGeom prst="roundRect">
+            <a:avLst/>
+          </a:prstGeom>
+          <a:solidFill>
+            <a:srgbClr val="FFFFFF"/>
+          </a:solidFill>
+          <a:ln>
+            <a:noFill/>
+          </a:ln>
+        </p:spPr>
+        <p:style>
+          <a:lnRef idx="1">
+            <a:schemeClr val="accent1"/>
+          </a:lnRef>
+          <a:fillRef idx="3">
+            <a:schemeClr val="accent1"/>
+          </a:fillRef>
+          <a:effectRef idx="2">
+            <a:schemeClr val="accent1"/>
+          </a:effectRef>
+          <a:fontRef idx="minor">
+            <a:schemeClr val="lt1"/>
+          </a:fontRef>
+        </p:style>
+        <p:txBody>
+          <a:bodyPr rtlCol="0" anchor="ctr"/>
+          <a:lstStyle/>
+          <a:p>
+            <a:pPr algn="ctr"/>
+          </a:p>
+        </p:txBody>
+      </p:sp>
+      <p:sp>
+        <p:nvSpPr>
+          <p:cNvPr id="20" name="Rounded Rectangle 19"/>
+          <p:cNvSpPr/>
+          <p:nvPr/>
+        </p:nvSpPr>
+        <p:spPr>
+          <a:xfrm>
+            <a:off x="4069080" y="3611880"/>
+            <a:ext cx="3703320" cy="822960"/>
+          </a:xfrm>
+          <a:prstGeom prst="roundRect">
+            <a:avLst/>
+          </a:prstGeom>
+          <a:solidFill>
+            <a:srgbClr val="FFFFFF"/>
+          </a:solidFill>
+          <a:ln>
+            <a:noFill/>
+          </a:ln>
+        </p:spPr>
+        <p:style>
+          <a:lnRef idx="1">
+            <a:schemeClr val="accent1"/>
+          </a:lnRef>
+          <a:fillRef idx="3">
+            <a:schemeClr val="accent1"/>
+          </a:fillRef>
+          <a:effectRef idx="2">
+            <a:schemeClr val="accent1"/>
+          </a:effectRef>
+          <a:fontRef idx="minor">
+            <a:schemeClr val="lt1"/>
+          </a:fontRef>
+        </p:style>
+        <p:txBody>
+          <a:bodyPr rtlCol="0" anchor="ctr"/>
+          <a:lstStyle/>
+          <a:p>
+            <a:pPr algn="ctr"/>
+          </a:p>
+        </p:txBody>
+      </p:sp>
+      <p:sp>
+        <p:nvSpPr>
+          <p:cNvPr id="21" name="Rounded Rectangle 20"/>
+          <p:cNvSpPr/>
+          <p:nvPr/>
+        </p:nvSpPr>
+        <p:spPr>
+          <a:xfrm>
+            <a:off x="7818120" y="3611880"/>
+            <a:ext cx="3520440" cy="822960"/>
+          </a:xfrm>
+          <a:prstGeom prst="roundRect">
+            <a:avLst/>
+          </a:prstGeom>
+          <a:solidFill>
+            <a:srgbClr val="FFFFFF"/>
+          </a:solidFill>
+          <a:ln>
+            <a:noFill/>
+          </a:ln>
+        </p:spPr>
+        <p:style>
+          <a:lnRef idx="1">
+            <a:schemeClr val="accent1"/>
+          </a:lnRef>
+          <a:fillRef idx="3">
+            <a:schemeClr val="accent1"/>
+          </a:fillRef>
+          <a:effectRef idx="2">
+            <a:schemeClr val="accent1"/>
+          </a:effectRef>
+          <a:fontRef idx="minor">
+            <a:schemeClr val="lt1"/>
+          </a:fontRef>
+        </p:style>
+        <p:txBody>
+          <a:bodyPr rtlCol="0" anchor="ctr"/>
+          <a:lstStyle/>
+          <a:p>
+            <a:pPr algn="ctr"/>
+          </a:p>
+        </p:txBody>
+      </p:sp>
+      <p:sp>
+        <p:nvSpPr>
+          <p:cNvPr id="22" name="TextBox 21"/>
+          <p:cNvSpPr txBox="1"/>
+          <p:nvPr/>
+        </p:nvSpPr>
+        <p:spPr>
+          <a:xfrm>
+            <a:off x="859536" y="3721608"/>
+            <a:ext cx="3099815" cy="502920"/>
+          </a:xfrm>
+          <a:prstGeom prst="rect">
+            <a:avLst/>
+          </a:prstGeom>
+          <a:noFill/>
+        </p:spPr>
+        <p:txBody>
+          <a:bodyPr wrap="square" lIns="73152" rIns="73152" tIns="36576" bIns="36576">
+            <a:spAutoFit/>
+          </a:bodyPr>
+          <a:lstStyle/>
+          <a:p>
+            <a:pPr algn="l"/>
+            <a:r>
+              <a:rPr sz="1000" b="0" i="0">
+                <a:solidFill>
+                  <a:srgbClr val="242E38"/>
+                </a:solidFill>
+                <a:latin typeface="Calibri"/>
+              </a:rPr>
+              <a:t>Pillar 2: Reform Equity &amp; Progression (Addresses Stock Options &amp; Promotion Stall)</a:t>
+            </a:r>
+          </a:p>
+        </p:txBody>
+      </p:sp>
+      <p:sp>
+        <p:nvSpPr>
+          <p:cNvPr id="23" name="TextBox 22"/>
+          <p:cNvSpPr txBox="1"/>
+          <p:nvPr/>
+        </p:nvSpPr>
+        <p:spPr>
+          <a:xfrm>
+            <a:off x="4142232" y="3721608"/>
+            <a:ext cx="3557015" cy="502920"/>
+          </a:xfrm>
+          <a:prstGeom prst="rect">
+            <a:avLst/>
+          </a:prstGeom>
+          <a:noFill/>
+        </p:spPr>
+        <p:txBody>
+          <a:bodyPr wrap="square" lIns="73152" rIns="73152" tIns="36576" bIns="36576">
+            <a:spAutoFit/>
+          </a:bodyPr>
+          <a:lstStyle/>
+          <a:p>
+            <a:pPr algn="l"/>
+            <a:r>
+              <a:rPr sz="1000" b="0" i="0">
+                <a:solidFill>
+                  <a:srgbClr val="242E38"/>
+                </a:solidFill>
+                <a:latin typeface="Calibri"/>
+              </a:rPr>
+              <a:t>Expand stock option eligibility to high-performing individual...</a:t>
+            </a:r>
+          </a:p>
+        </p:txBody>
+      </p:sp>
+      <p:sp>
+        <p:nvSpPr>
+          <p:cNvPr id="24" name="TextBox 23"/>
+          <p:cNvSpPr txBox="1"/>
+          <p:nvPr/>
+        </p:nvSpPr>
+        <p:spPr>
+          <a:xfrm>
+            <a:off x="7891272" y="3721608"/>
+            <a:ext cx="3374136" cy="502920"/>
+          </a:xfrm>
+          <a:prstGeom prst="rect">
+            <a:avLst/>
+          </a:prstGeom>
+          <a:noFill/>
+        </p:spPr>
+        <p:txBody>
+          <a:bodyPr wrap="square" lIns="73152" rIns="73152" tIns="36576" bIns="36576">
+            <a:spAutoFit/>
+          </a:bodyPr>
+          <a:lstStyle/>
+          <a:p>
+            <a:pPr algn="l"/>
+            <a:r>
+              <a:rPr sz="1000" b="0" i="0">
+                <a:solidFill>
+                  <a:srgbClr val="242E38"/>
+                </a:solidFill>
+                <a:latin typeface="Calibri"/>
+              </a:rPr>
+              <a:t>This phased approach targets root causes, is measurable, and can show ROI within 12-18 months.</a:t>
+            </a:r>
+          </a:p>
+        </p:txBody>
+      </p:sp>
+      <p:sp>
+        <p:nvSpPr>
+          <p:cNvPr id="25" name="Rounded Rectangle 24"/>
+          <p:cNvSpPr/>
+          <p:nvPr/>
+        </p:nvSpPr>
+        <p:spPr>
+          <a:xfrm>
+            <a:off x="786384" y="4617720"/>
+            <a:ext cx="3246120" cy="822960"/>
+          </a:xfrm>
+          <a:prstGeom prst="roundRect">
+            <a:avLst/>
+          </a:prstGeom>
+          <a:solidFill>
+            <a:srgbClr val="FFFFFF"/>
+          </a:solidFill>
+          <a:ln>
+            <a:noFill/>
+          </a:ln>
+        </p:spPr>
+        <p:style>
+          <a:lnRef idx="1">
+            <a:schemeClr val="accent1"/>
+          </a:lnRef>
+          <a:fillRef idx="3">
+            <a:schemeClr val="accent1"/>
+          </a:fillRef>
+          <a:effectRef idx="2">
+            <a:schemeClr val="accent1"/>
+          </a:effectRef>
+          <a:fontRef idx="minor">
+            <a:schemeClr val="lt1"/>
+          </a:fontRef>
+        </p:style>
+        <p:txBody>
+          <a:bodyPr rtlCol="0" anchor="ctr"/>
+          <a:lstStyle/>
+          <a:p>
+            <a:pPr algn="ctr"/>
+          </a:p>
+        </p:txBody>
+      </p:sp>
+      <p:sp>
+        <p:nvSpPr>
+          <p:cNvPr id="26" name="Rounded Rectangle 25"/>
+          <p:cNvSpPr/>
+          <p:nvPr/>
+        </p:nvSpPr>
+        <p:spPr>
+          <a:xfrm>
+            <a:off x="4069080" y="4617720"/>
+            <a:ext cx="3703320" cy="822960"/>
+          </a:xfrm>
+          <a:prstGeom prst="roundRect">
+            <a:avLst/>
+          </a:prstGeom>
+          <a:solidFill>
+            <a:srgbClr val="FFFFFF"/>
+          </a:solidFill>
+          <a:ln>
+            <a:noFill/>
+          </a:ln>
+        </p:spPr>
+        <p:style>
+          <a:lnRef idx="1">
+            <a:schemeClr val="accent1"/>
+          </a:lnRef>
+          <a:fillRef idx="3">
+            <a:schemeClr val="accent1"/>
+          </a:fillRef>
+          <a:effectRef idx="2">
+            <a:schemeClr val="accent1"/>
+          </a:effectRef>
+          <a:fontRef idx="minor">
+            <a:schemeClr val="lt1"/>
+          </a:fontRef>
+        </p:style>
+        <p:txBody>
+          <a:bodyPr rtlCol="0" anchor="ctr"/>
+          <a:lstStyle/>
+          <a:p>
+            <a:pPr algn="ctr"/>
+          </a:p>
+        </p:txBody>
+      </p:sp>
+      <p:sp>
+        <p:nvSpPr>
+          <p:cNvPr id="27" name="Rounded Rectangle 26"/>
+          <p:cNvSpPr/>
+          <p:nvPr/>
+        </p:nvSpPr>
+        <p:spPr>
+          <a:xfrm>
+            <a:off x="7818120" y="4617720"/>
+            <a:ext cx="3520440" cy="822960"/>
+          </a:xfrm>
+          <a:prstGeom prst="roundRect">
+            <a:avLst/>
+          </a:prstGeom>
+          <a:solidFill>
+            <a:srgbClr val="FFFFFF"/>
+          </a:solidFill>
+          <a:ln>
+            <a:noFill/>
+          </a:ln>
+        </p:spPr>
+        <p:style>
+          <a:lnRef idx="1">
+            <a:schemeClr val="accent1"/>
+          </a:lnRef>
+          <a:fillRef idx="3">
+            <a:schemeClr val="accent1"/>
+          </a:fillRef>
+          <a:effectRef idx="2">
+            <a:schemeClr val="accent1"/>
+          </a:effectRef>
+          <a:fontRef idx="minor">
+            <a:schemeClr val="lt1"/>
+          </a:fontRef>
+        </p:style>
+        <p:txBody>
+          <a:bodyPr rtlCol="0" anchor="ctr"/>
+          <a:lstStyle/>
+          <a:p>
+            <a:pPr algn="ctr"/>
+          </a:p>
+        </p:txBody>
+      </p:sp>
+      <p:sp>
+        <p:nvSpPr>
+          <p:cNvPr id="28" name="TextBox 27"/>
+          <p:cNvSpPr txBox="1"/>
+          <p:nvPr/>
+        </p:nvSpPr>
+        <p:spPr>
+          <a:xfrm>
+            <a:off x="859536" y="4727448"/>
+            <a:ext cx="3099815" cy="502920"/>
+          </a:xfrm>
+          <a:prstGeom prst="rect">
+            <a:avLst/>
+          </a:prstGeom>
+          <a:noFill/>
+        </p:spPr>
+        <p:txBody>
+          <a:bodyPr wrap="square" lIns="73152" rIns="73152" tIns="36576" bIns="36576">
+            <a:spAutoFit/>
+          </a:bodyPr>
+          <a:lstStyle/>
+          <a:p>
+            <a:pPr algn="l"/>
+            <a:r>
+              <a:rPr sz="1000" b="0" i="0">
+                <a:solidFill>
+                  <a:srgbClr val="242E38"/>
+                </a:solidFill>
+                <a:latin typeface="Calibri"/>
+              </a:rPr>
+              <a:t>Pillar 3: Support High-Risk Lifestyles (Addresses Travel Impact)</a:t>
+            </a:r>
+          </a:p>
+        </p:txBody>
+      </p:sp>
+      <p:sp>
+        <p:nvSpPr>
+          <p:cNvPr id="29" name="TextBox 28"/>
+          <p:cNvSpPr txBox="1"/>
+          <p:nvPr/>
+        </p:nvSpPr>
+        <p:spPr>
+          <a:xfrm>
+            <a:off x="4142232" y="4727448"/>
+            <a:ext cx="3557015" cy="502920"/>
+          </a:xfrm>
+          <a:prstGeom prst="rect">
+            <a:avLst/>
+          </a:prstGeom>
+          <a:noFill/>
+        </p:spPr>
+        <p:txBody>
+          <a:bodyPr wrap="square" lIns="73152" rIns="73152" tIns="36576" bIns="36576">
+            <a:spAutoFit/>
+          </a:bodyPr>
+          <a:lstStyle/>
+          <a:p>
+            <a:pPr algn="l"/>
+            <a:r>
+              <a:rPr sz="1000" b="0" i="0">
+                <a:solidFill>
+                  <a:srgbClr val="242E38"/>
+                </a:solidFill>
+                <a:latin typeface="Calibri"/>
+              </a:rPr>
+              <a:t>Implement a 'Travel Fatigue' program with additional PTO days and wellness...</a:t>
+            </a:r>
+          </a:p>
+        </p:txBody>
+      </p:sp>
+      <p:sp>
+        <p:nvSpPr>
+          <p:cNvPr id="30" name="TextBox 29"/>
+          <p:cNvSpPr txBox="1"/>
+          <p:nvPr/>
+        </p:nvSpPr>
+        <p:spPr>
+          <a:xfrm>
+            <a:off x="7891272" y="4727448"/>
+            <a:ext cx="3374136" cy="502920"/>
+          </a:xfrm>
+          <a:prstGeom prst="rect">
+            <a:avLst/>
+          </a:prstGeom>
+          <a:noFill/>
+        </p:spPr>
+        <p:txBody>
+          <a:bodyPr wrap="square" lIns="73152" rIns="73152" tIns="36576" bIns="36576">
+            <a:spAutoFit/>
+          </a:bodyPr>
+          <a:lstStyle/>
+          <a:p>
+            <a:pPr algn="l"/>
+            <a:r>
+              <a:rPr sz="1000" b="0" i="0">
+                <a:solidFill>
+                  <a:srgbClr val="242E38"/>
+                </a:solidFill>
+                <a:latin typeface="Calibri"/>
+              </a:rPr>
+              <a:t>This phased approach targets root causes, is measurable, and can show ROI within 12-18 months.</a:t>
+            </a:r>
+          </a:p>
+        </p:txBody>
+      </p:sp>
+      <p:sp>
+        <p:nvSpPr>
+          <p:cNvPr id="31" name="Rectangle 30"/>
+          <p:cNvSpPr/>
+          <p:nvPr/>
+        </p:nvSpPr>
+        <p:spPr>
+          <a:xfrm>
+            <a:off x="713232" y="6318504"/>
+            <a:ext cx="10835640" cy="13716"/>
           </a:xfrm>
           <a:prstGeom prst="rect">
             <a:avLst/>
@@ -8477,14 +10504,14 @@
       </p:sp>
       <p:sp>
         <p:nvSpPr>
-          <p:cNvPr id="8" name="TextBox 7"/>
+          <p:cNvPr id="32" name="TextBox 31"/>
           <p:cNvSpPr txBox="1"/>
           <p:nvPr/>
         </p:nvSpPr>
         <p:spPr>
           <a:xfrm>
-            <a:off x="731520" y="6446520"/>
-            <a:ext cx="7772400" cy="274320"/>
+            <a:off x="713232" y="6437376"/>
+            <a:ext cx="7863840" cy="256032"/>
           </a:xfrm>
           <a:prstGeom prst="rect">
             <a:avLst/>
@@ -8492,11 +10519,12 @@
           <a:noFill/>
         </p:spPr>
         <p:txBody>
-          <a:bodyPr wrap="none">
+          <a:bodyPr wrap="square" lIns="73152" rIns="73152" tIns="36576" bIns="36576">
             <a:spAutoFit/>
           </a:bodyPr>
           <a:lstStyle/>
           <a:p>
+            <a:pPr algn="l"/>
             <a:r>
               <a:rPr sz="900" b="0" i="0">
                 <a:solidFill>
@@ -8504,21 +10532,21 @@
                 </a:solidFill>
                 <a:latin typeface="Calibri"/>
               </a:rPr>
-              <a:t>Credit Risk Analytics</a:t>
-            </a:r>
-          </a:p>
-        </p:txBody>
-      </p:sp>
-      <p:sp>
-        <p:nvSpPr>
-          <p:cNvPr id="9" name="TextBox 8"/>
+              <a:t>Understanding &amp; Reducing Employee Attrition</a:t>
+            </a:r>
+          </a:p>
+        </p:txBody>
+      </p:sp>
+      <p:sp>
+        <p:nvSpPr>
+          <p:cNvPr id="33" name="TextBox 32"/>
           <p:cNvSpPr txBox="1"/>
           <p:nvPr/>
         </p:nvSpPr>
         <p:spPr>
           <a:xfrm>
-            <a:off x="9601200" y="6446520"/>
-            <a:ext cx="1828800" cy="274320"/>
+            <a:off x="9646920" y="6437376"/>
+            <a:ext cx="1828800" cy="256032"/>
           </a:xfrm>
           <a:prstGeom prst="rect">
             <a:avLst/>
@@ -8526,12 +10554,12 @@
           <a:noFill/>
         </p:spPr>
         <p:txBody>
-          <a:bodyPr wrap="none">
+          <a:bodyPr wrap="square" lIns="73152" rIns="73152" tIns="36576" bIns="36576">
             <a:spAutoFit/>
           </a:bodyPr>
           <a:lstStyle/>
           <a:p>
-            <a:pPr algn="ctr"/>
+            <a:pPr algn="r"/>
             <a:r>
               <a:rPr sz="900" b="0" i="0">
                 <a:solidFill>
@@ -8541,49 +10569,6 @@
               </a:rPr>
               <a:t>9 / 13</a:t>
             </a:r>
-          </a:p>
-        </p:txBody>
-      </p:sp>
-      <p:sp>
-        <p:nvSpPr>
-          <p:cNvPr id="10" name="Rectangle 9"/>
-          <p:cNvSpPr/>
-          <p:nvPr/>
-        </p:nvSpPr>
-        <p:spPr>
-          <a:xfrm>
-            <a:off x="11475720" y="365760"/>
-            <a:ext cx="274320" cy="274320"/>
-          </a:xfrm>
-          <a:prstGeom prst="rect">
-            <a:avLst/>
-          </a:prstGeom>
-          <a:solidFill>
-            <a:srgbClr val="C89B3C"/>
-          </a:solidFill>
-          <a:ln>
-            <a:noFill/>
-          </a:ln>
-        </p:spPr>
-        <p:style>
-          <a:lnRef idx="1">
-            <a:schemeClr val="accent1"/>
-          </a:lnRef>
-          <a:fillRef idx="3">
-            <a:schemeClr val="accent1"/>
-          </a:fillRef>
-          <a:effectRef idx="2">
-            <a:schemeClr val="accent1"/>
-          </a:effectRef>
-          <a:fontRef idx="minor">
-            <a:schemeClr val="lt1"/>
-          </a:fontRef>
-        </p:style>
-        <p:txBody>
-          <a:bodyPr rtlCol="0" anchor="ctr"/>
-          <a:lstStyle/>
-          <a:p>
-            <a:pPr algn="ctr"/>
           </a:p>
         </p:txBody>
       </p:sp>

--- a/analytics_report.pptx
+++ b/analytics_report.pptx
@@ -3301,7 +3301,7 @@
                 </a:solidFill>
                 <a:latin typeface="Calibri"/>
               </a:rPr>
-              <a:t>Reducing Preventable Attrition: Targeting the 16% of employees at highest risk</a:t>
+              <a:t>Optimizing Operations with High-Fidelity Weather Intelligence</a:t>
             </a:r>
           </a:p>
         </p:txBody>
@@ -3336,7 +3336,7 @@
                 </a:solidFill>
                 <a:latin typeface="Calibri"/>
               </a:rPr>
-              <a:t>Executive Briefing</a:t>
+              <a:t>Analysis for Business Decision-Makers</a:t>
             </a:r>
           </a:p>
         </p:txBody>
@@ -3371,7 +3371,7 @@
                 </a:solidFill>
                 <a:latin typeface="Calibri"/>
               </a:rPr>
-              <a:t>June 01, 2026</a:t>
+              <a:t>June 26, 2026</a:t>
             </a:r>
           </a:p>
         </p:txBody>
@@ -3462,13 +3462,13 @@
           <a:p>
             <a:pPr algn="l"/>
             <a:r>
-              <a:rPr sz="1800" b="1" i="0">
+              <a:rPr sz="2000" b="1" i="0">
                 <a:solidFill>
                   <a:srgbClr val="15304C"/>
                 </a:solidFill>
                 <a:latin typeface="Calibri"/>
               </a:rPr>
-              <a:t>Priority recommendations: Immediate actions to reduce attrition in the highest-risk segments</a:t>
+              <a:t>Recommendations: Deploy Forecasting Tool and Rule-Based Scheduler</a:t>
             </a:r>
           </a:p>
         </p:txBody>
@@ -3591,7 +3591,7 @@
                 </a:solidFill>
                 <a:latin typeface="Calibri"/>
               </a:rPr>
-              <a:t>Launch a 90-day pilot focused on overtime and travel in Sales, then expand based on measured results</a:t>
+              <a:t>Prioritize implementing the high-accuracy model for solar energy and a simplified scheduler for outdoor operations</a:t>
             </a:r>
           </a:p>
         </p:txBody>
@@ -3749,7 +3749,7 @@
                 </a:solidFill>
                 <a:latin typeface="Calibri"/>
               </a:rPr>
-              <a:t>Action: Launch an immediate audit and action plan for overtime practices in the Sales</a:t>
+              <a:t>Action: Deploy the regression model for day-ahead solar radiation forecasting to</a:t>
             </a:r>
           </a:p>
         </p:txBody>
@@ -3784,7 +3784,7 @@
                 </a:solidFill>
                 <a:latin typeface="Calibri"/>
               </a:rPr>
-              <a:t>Owner: business owner | Trigger: segment enters the agreed</a:t>
+              <a:t>Track pilot outcome, adoption, guardrails, and stop/go criteria before scaling.</a:t>
             </a:r>
           </a:p>
         </p:txBody>
@@ -3819,7 +3819,7 @@
                 </a:solidFill>
                 <a:latin typeface="Calibri"/>
               </a:rPr>
-              <a:t>Trigger + guardrail required</a:t>
+              <a:t>Validation required</a:t>
             </a:r>
           </a:p>
         </p:txBody>
@@ -3977,7 +3977,7 @@
                 </a:solidFill>
                 <a:latin typeface="Calibri"/>
               </a:rPr>
-              <a:t>Action: Review and enhance support policies for employees who travel frequently</a:t>
+              <a:t>Action: Develop a simplified, rule-based scheduling tool for outdoor operations</a:t>
             </a:r>
           </a:p>
         </p:txBody>
@@ -4012,7 +4012,7 @@
                 </a:solidFill>
                 <a:latin typeface="Calibri"/>
               </a:rPr>
-              <a:t>Owner: business owner | Trigger: segment enters the agreed intervention</a:t>
+              <a:t>Track pilot outcome, adoption, guardrails, and stop/go criteria before scaling.</a:t>
             </a:r>
           </a:p>
         </p:txBody>
@@ -4047,7 +4047,7 @@
                 </a:solidFill>
                 <a:latin typeface="Calibri"/>
               </a:rPr>
-              <a:t>Trigger + guardrail required</a:t>
+              <a:t>Validation required</a:t>
             </a:r>
           </a:p>
         </p:txBody>
@@ -4205,7 +4205,7 @@
                 </a:solidFill>
                 <a:latin typeface="Calibri"/>
               </a:rPr>
-              <a:t>Action: Initiate a retention-focused review with the HR and Sales department leadership</a:t>
+              <a:t>Action: Initiate a data collection and model replication project for two adjacent</a:t>
             </a:r>
           </a:p>
         </p:txBody>
@@ -4240,7 +4240,7 @@
                 </a:solidFill>
                 <a:latin typeface="Calibri"/>
               </a:rPr>
-              <a:t>Owner: business owner | Trigger: segment enters the agreed</a:t>
+              <a:t>Owner: business</a:t>
             </a:r>
           </a:p>
         </p:txBody>
@@ -4275,7 +4275,7 @@
                 </a:solidFill>
                 <a:latin typeface="Calibri"/>
               </a:rPr>
-              <a:t>Trigger + guardrail required</a:t>
+              <a:t>Validation required</a:t>
             </a:r>
           </a:p>
         </p:txBody>
@@ -4353,7 +4353,7 @@
                 </a:solidFill>
                 <a:latin typeface="Calibri"/>
               </a:rPr>
-              <a:t>Reducing Preventable Attrition</a:t>
+              <a:t>Optimizing Operations with High-Fidelity Weather Intelligence</a:t>
             </a:r>
           </a:p>
         </p:txBody>
@@ -4443,13 +4443,13 @@
           <a:p>
             <a:pPr algn="l"/>
             <a:r>
-              <a:rPr sz="1800" b="1" i="0">
+              <a:rPr sz="2000" b="1" i="0">
                 <a:solidFill>
                   <a:srgbClr val="15304C"/>
                 </a:solidFill>
                 <a:latin typeface="Calibri"/>
               </a:rPr>
-              <a:t>Limitations and responsible use: Model identifies high-risk groups, not individual fate</a:t>
+              <a:t>Limitations: Geographic Specificity and Clear-Sky Focus Require Managed Expansion</a:t>
             </a:r>
           </a:p>
         </p:txBody>
@@ -4572,7 +4572,7 @@
                 </a:solidFill>
                 <a:latin typeface="Calibri"/>
               </a:rPr>
-              <a:t>Use insights to guide supportive program design for segments, not for individual performance management or automated decisions</a:t>
+              <a:t>The model's high performance is tied to a single location and predicts ideal conditions, not actual weather</a:t>
             </a:r>
           </a:p>
         </p:txBody>
@@ -4687,7 +4687,7 @@
                 </a:solidFill>
                 <a:latin typeface="Calibri"/>
               </a:rPr>
-              <a:t>Explanatory model only: test accuracy 81.9% trails the baseline 83.9%; use the rules to</a:t>
+              <a:t>Exploratory screening only: validate precision, recall, F1, and support before operational use</a:t>
             </a:r>
           </a:p>
         </p:txBody>
@@ -4802,7 +4802,7 @@
                 </a:solidFill>
                 <a:latin typeface="Calibri"/>
               </a:rPr>
-              <a:t>The predictive model's accuracy (81.9% test accuracy) is insufficient for reliably scoring individual employee</a:t>
+              <a:t>The model is geographically specific to a single point (021d49N, 039d18E)</a:t>
             </a:r>
           </a:p>
         </p:txBody>
@@ -4917,7 +4917,7 @@
                 </a:solidFill>
                 <a:latin typeface="Calibri"/>
               </a:rPr>
-              <a:t>The data is a static snapshot; it does not capture the temporal trends or</a:t>
+              <a:t>The model predicts clear-sky radiation (CLRSKY_SFC_SW_DWN), not actual radiation under cloudy conditions</a:t>
             </a:r>
           </a:p>
         </p:txBody>
@@ -5032,7 +5032,7 @@
                 </a:solidFill>
                 <a:latin typeface="Calibri"/>
               </a:rPr>
-              <a:t>Analysis shows correlation, not causation. While overtime and attrition are strongly linked</a:t>
+              <a:t>The dataset ends in December 2023. Future climate trends or anomalies may alter underlying</a:t>
             </a:r>
           </a:p>
         </p:txBody>
@@ -5110,7 +5110,7 @@
                 </a:solidFill>
                 <a:latin typeface="Calibri"/>
               </a:rPr>
-              <a:t>Reducing Preventable Attrition</a:t>
+              <a:t>Optimizing Operations with High-Fidelity Weather Intelligence</a:t>
             </a:r>
           </a:p>
         </p:txBody>
@@ -5249,7 +5249,7 @@
                 </a:solidFill>
                 <a:latin typeface="Calibri"/>
               </a:rPr>
-              <a:t>Summary: Preventable attrition is concentrated and addressable</a:t>
+              <a:t>Summary: Actionable Weather Intelligence from a Robust, Interpretable Model</a:t>
             </a:r>
           </a:p>
         </p:txBody>
@@ -5327,7 +5327,7 @@
                 </a:solidFill>
                 <a:latin typeface="Calibri"/>
               </a:rPr>
-              <a:t>By targeting the 16% of employees in high-risk segments defined by overtime and travel, we can launch focused, high-impact retention programs within the next.</a:t>
+              <a:t>Implement the high-accuracy solar radiation forecast and rule-based scheduler to reduce uncertainty in energy and outdoor operations.</a:t>
             </a:r>
           </a:p>
         </p:txBody>
@@ -5375,7 +5375,7 @@
                 </a:solidFill>
                 <a:latin typeface="Calibri"/>
               </a:rPr>
-              <a:t>Sales department attrition is 25.8%, highest among departments</a:t>
+              <a:t>Temperature shows clear warming trend and seasonal cycles over 17-year period</a:t>
             </a:r>
           </a:p>
           <a:p>
@@ -5400,7 +5400,7 @@
                 </a:solidFill>
                 <a:latin typeface="Calibri"/>
               </a:rPr>
-              <a:t>Approve and fund the 60-day overtime audit in Sales and the 90-day travel policy review as the highest-priority</a:t>
+              <a:t>Immediately deploy the high-accuracy solar radiation forecasting model for solar energy operations in the original</a:t>
             </a:r>
           </a:p>
           <a:p>
@@ -5425,7 +5425,7 @@
                 </a:solidFill>
                 <a:latin typeface="Calibri"/>
               </a:rPr>
-              <a:t>Employee attrition is a manageable cost center, not an inevitable fact</a:t>
+              <a:t>The weather data analysis has delivered a robust, interpretable predictive model that directly addresses the need</a:t>
             </a:r>
           </a:p>
         </p:txBody>
@@ -5556,7 +5556,7 @@
                 </a:solidFill>
                 <a:latin typeface="Calibri"/>
               </a:rPr>
-              <a:t>Analysis is based on a clean snapshot of 1,470 employees with 35 attributes</a:t>
+              <a:t>Foundation: A Complete, High-Quality Dataset Spanning 17 Years</a:t>
             </a:r>
           </a:p>
         </p:txBody>
@@ -5679,7 +5679,7 @@
                 </a:solidFill>
                 <a:latin typeface="Calibri"/>
               </a:rPr>
-              <a:t>The dataset provides a robust foundation for segmentation, revealing clear patterns in who leaves and why.</a:t>
+              <a:t>148,320 hourly records provide a robust, clean basis for modeling solar radiation and its key weather drivers.</a:t>
             </a:r>
           </a:p>
         </p:txBody>
@@ -5759,7 +5759,7 @@
                 </a:solidFill>
                 <a:latin typeface="Calibri"/>
               </a:rPr>
-              <a:t>1470</a:t>
+              <a:t>148320</a:t>
             </a:r>
           </a:p>
         </p:txBody>
@@ -5874,7 +5874,7 @@
                 </a:solidFill>
                 <a:latin typeface="Calibri"/>
               </a:rPr>
-              <a:t>35</a:t>
+              <a:t>8</a:t>
             </a:r>
           </a:p>
         </p:txBody>
@@ -5989,7 +5989,7 @@
                 </a:solidFill>
                 <a:latin typeface="Calibri"/>
               </a:rPr>
-              <a:t>Attrition</a:t>
+              <a:t>CLRSKY_SFC_SW_DWN</a:t>
             </a:r>
           </a:p>
         </p:txBody>
@@ -6152,7 +6152,7 @@
                 </a:solidFill>
                 <a:latin typeface="Calibri"/>
               </a:rPr>
-              <a:t>hr attrition</a:t>
+              <a:t>weather</a:t>
             </a:r>
           </a:p>
           <a:p>
@@ -6177,7 +6177,7 @@
                 </a:solidFill>
                 <a:latin typeface="Calibri"/>
               </a:rPr>
-              <a:t>Key fields include Age, Attrition, BusinessTravel, DailyRate, Department, DistanceFromHome, Education, EducationField</a:t>
+              <a:t>Key fields include YEAR, MO, DY, HR, CLRSKY_SFC_SW_DWN, T2M, RH2M, WS10M</a:t>
             </a:r>
           </a:p>
           <a:p>
@@ -6202,7 +6202,7 @@
                 </a:solidFill>
                 <a:latin typeface="Calibri"/>
               </a:rPr>
-              <a:t>Target field is Attrition</a:t>
+              <a:t>Target field is CLRSKY_SFC_SW_DWN</a:t>
             </a:r>
           </a:p>
         </p:txBody>
@@ -6330,7 +6330,7 @@
                 </a:solidFill>
                 <a:latin typeface="Calibri"/>
               </a:rPr>
-              <a:t>Dataset has 1470 rows and 35 columns with no missing values or duplicate rows.</a:t>
+              <a:t>Dataset has 148,320 hourly weather records from 2007 to 2023 with no missing values or duplicates.</a:t>
             </a:r>
           </a:p>
           <a:p>
@@ -6355,7 +6355,7 @@
                 </a:solidFill>
                 <a:latin typeface="Calibri"/>
               </a:rPr>
-              <a:t>Remove or flag constant columns: EmployeeCount, Over18...</a:t>
+              <a:t>Combine YEAR, MO, DY, HR into a single datetime column for time series analysis</a:t>
             </a:r>
           </a:p>
           <a:p>
@@ -6380,7 +6380,7 @@
                 </a:solidFill>
                 <a:latin typeface="Calibri"/>
               </a:rPr>
-              <a:t>Consider outlier treatment for columns like MonthlyIncome, TrainingTimesLastYear...</a:t>
+              <a:t>Investigate outliers in T2M and WS10M for data validity or extreme weather events</a:t>
             </a:r>
           </a:p>
           <a:p>
@@ -6405,7 +6405,7 @@
                 </a:solidFill>
                 <a:latin typeface="Calibri"/>
               </a:rPr>
-              <a:t>Ensure categorical variables (e.g., BusinessTravel, Department) are properly encoded for machine learning models</a:t>
+              <a:t>YEAR, MO, DY, HR are discrete numeric columns representing date and time components...</a:t>
             </a:r>
           </a:p>
         </p:txBody>
@@ -6483,7 +6483,7 @@
                 </a:solidFill>
                 <a:latin typeface="Calibri"/>
               </a:rPr>
-              <a:t>Reducing Preventable Attrition</a:t>
+              <a:t>Optimizing Operations with High-Fidelity Weather Intelligence</a:t>
             </a:r>
           </a:p>
         </p:txBody>
@@ -6573,13 +6573,13 @@
           <a:p>
             <a:pPr algn="l"/>
             <a:r>
-              <a:rPr sz="2300" b="1" i="0">
+              <a:rPr sz="1800" b="1" i="0">
                 <a:solidFill>
                   <a:srgbClr val="15304C"/>
                 </a:solidFill>
                 <a:latin typeface="Calibri"/>
               </a:rPr>
-              <a:t>Unplanned attrition costs exceed 150% of salary</a:t>
+              <a:t>Market Context: Weather Data is a Critical Input for Energy, Agriculture, and Logistics</a:t>
             </a:r>
           </a:p>
         </p:txBody>
@@ -6702,7 +6702,7 @@
                 </a:solidFill>
                 <a:latin typeface="Calibri"/>
               </a:rPr>
-              <a:t>Replacing employees is expensive and disruptive; preventing predictable turnover in key roles protects institutional knowledge and operational stability.</a:t>
+              <a:t>Short-range forecasting drives daily operations; solar radiation prediction is directly linked to renewable energy yield and outdoor activity scheduling.</a:t>
             </a:r>
           </a:p>
         </p:txBody>
@@ -6795,7 +6795,7 @@
                 </a:solidFill>
                 <a:latin typeface="Calibri"/>
               </a:rPr>
-              <a:t>The average attrition rate in the UK in 2025 was 19%, above the European average of 17.4%, representing</a:t>
+              <a:t>Short-range weather forecasting (1-3 days) holds a 34.24% market share in 2026 and is expected to depict the</a:t>
             </a:r>
           </a:p>
           <a:p>
@@ -6820,7 +6820,7 @@
                 </a:solidFill>
                 <a:latin typeface="Calibri"/>
               </a:rPr>
-              <a:t>For India's top-5 IT services companies, the attrition rate has stabilized at approximately 13% as of FY2025...</a:t>
+              <a:t>The short-range forecasting segment is anticipated to witness a significant CAGR of over 7% from 2026 to 2033</a:t>
             </a:r>
           </a:p>
           <a:p>
@@ -6845,7 +6845,7 @@
                 </a:solidFill>
                 <a:latin typeface="Calibri"/>
               </a:rPr>
-              <a:t>Consulting, legal, and IT roles have traditionally experienced high turnover</a:t>
+              <a:t>Extreme weather is ranked among the top risks for global business in 2026, just behind geopolitical conflict, per</a:t>
             </a:r>
           </a:p>
           <a:p>
@@ -6870,7 +6870,7 @@
                 </a:solidFill>
                 <a:latin typeface="Calibri"/>
               </a:rPr>
-              <a:t>Artificial intelligence is transforming attrition management from reactive to predictive</a:t>
+              <a:t>Extreme weather events are pressing global risks that necessitate business strategies for climate volatility and...</a:t>
             </a:r>
           </a:p>
         </p:txBody>
@@ -6985,7 +6985,7 @@
                 </a:solidFill>
                 <a:latin typeface="Calibri"/>
               </a:rPr>
-              <a:t>Replacing employees is expensive and disruptive; preventing predictable turnover in key roles protects institutional knowledge and operational stability.</a:t>
+              <a:t>Short-range forecasting drives daily operations; solar radiation prediction is directly linked to renewable energy yield and outdoor activity scheduling.</a:t>
             </a:r>
           </a:p>
         </p:txBody>
@@ -7063,7 +7063,7 @@
                 </a:solidFill>
                 <a:latin typeface="Calibri"/>
               </a:rPr>
-              <a:t>Reducing Preventable Attrition</a:t>
+              <a:t>Optimizing Operations with High-Fidelity Weather Intelligence</a:t>
             </a:r>
           </a:p>
         </p:txBody>
@@ -7153,13 +7153,13 @@
           <a:p>
             <a:pPr algn="l"/>
             <a:r>
-              <a:rPr sz="2300" b="1" i="0">
+              <a:rPr sz="2000" b="1" i="0">
                 <a:solidFill>
                   <a:srgbClr val="15304C"/>
                 </a:solidFill>
                 <a:latin typeface="Calibri"/>
               </a:rPr>
-              <a:t>Sales ranks highest on Attrition Rate at 20.6%</a:t>
+              <a:t>Monthly temperature shows warming trend from 2007-2023 with seasonal cycles</a:t>
             </a:r>
           </a:p>
         </p:txBody>
@@ -7216,7 +7216,7 @@
         <p:spPr>
           <a:xfrm>
             <a:off x="749808" y="1371600"/>
-            <a:ext cx="3657600" cy="4526280"/>
+            <a:ext cx="6583680" cy="4526280"/>
           </a:xfrm>
           <a:prstGeom prst="roundRect">
             <a:avLst/>
@@ -7252,184 +7252,40 @@
           </a:p>
         </p:txBody>
       </p:sp>
-      <p:sp>
-        <p:nvSpPr>
-          <p:cNvPr id="5" name="TextBox 4"/>
-          <p:cNvSpPr txBox="1"/>
-          <p:nvPr/>
-        </p:nvSpPr>
-        <p:spPr>
-          <a:xfrm>
-            <a:off x="987552" y="1664208"/>
-            <a:ext cx="3063240" cy="320040"/>
-          </a:xfrm>
-          <a:prstGeom prst="rect">
-            <a:avLst/>
-          </a:prstGeom>
-          <a:noFill/>
-        </p:spPr>
-        <p:txBody>
-          <a:bodyPr wrap="square" lIns="54864" rIns="54864" tIns="27432" bIns="27432">
-            <a:spAutoFit/>
-          </a:bodyPr>
-          <a:lstStyle/>
-          <a:p>
-            <a:pPr algn="l"/>
-            <a:r>
-              <a:rPr sz="1400" b="1" i="0">
-                <a:solidFill>
-                  <a:srgbClr val="15304C"/>
-                </a:solidFill>
-                <a:latin typeface="Calibri"/>
-              </a:rPr>
-              <a:t>Readout</a:t>
-            </a:r>
-          </a:p>
-        </p:txBody>
-      </p:sp>
-      <p:sp>
-        <p:nvSpPr>
-          <p:cNvPr id="6" name="TextBox 5"/>
-          <p:cNvSpPr txBox="1"/>
-          <p:nvPr/>
-        </p:nvSpPr>
-        <p:spPr>
-          <a:xfrm>
-            <a:off x="987552" y="2084831"/>
-            <a:ext cx="3054096" cy="841248"/>
-          </a:xfrm>
-          <a:prstGeom prst="rect">
-            <a:avLst/>
-          </a:prstGeom>
-          <a:noFill/>
-        </p:spPr>
-        <p:txBody>
-          <a:bodyPr wrap="square" lIns="54864" rIns="54864" tIns="27432" bIns="27432">
-            <a:spAutoFit/>
-          </a:bodyPr>
-          <a:lstStyle/>
-          <a:p>
-            <a:pPr algn="l"/>
-            <a:r>
-              <a:rPr sz="1200" b="1" i="0">
-                <a:solidFill>
-                  <a:srgbClr val="1F2730"/>
-                </a:solidFill>
-                <a:latin typeface="Calibri"/>
-              </a:rPr>
-              <a:t>Sales department attrition is 25.8%, highest among departments.</a:t>
-            </a:r>
-          </a:p>
-        </p:txBody>
-      </p:sp>
-      <p:sp>
-        <p:nvSpPr>
-          <p:cNvPr id="7" name="TextBox 6"/>
-          <p:cNvSpPr txBox="1"/>
-          <p:nvPr/>
-        </p:nvSpPr>
-        <p:spPr>
-          <a:xfrm>
-            <a:off x="950976" y="3127248"/>
-            <a:ext cx="3127248" cy="1920240"/>
-          </a:xfrm>
-          <a:prstGeom prst="rect">
-            <a:avLst/>
-          </a:prstGeom>
-          <a:noFill/>
-        </p:spPr>
-        <p:txBody>
-          <a:bodyPr wrap="square" lIns="36576" rIns="36576" tIns="18288" bIns="18288">
-            <a:spAutoFit/>
-          </a:bodyPr>
-          <a:lstStyle/>
-          <a:p>
-            <a:pPr>
-              <a:spcAft>
-                <a:spcPts val="700"/>
-              </a:spcAft>
-            </a:pPr>
-            <a:r>
-              <a:rPr sz="1000" b="1">
-                <a:solidFill>
-                  <a:srgbClr val="2C65A4"/>
-                </a:solidFill>
-                <a:latin typeface="Calibri"/>
-              </a:rPr>
-              <a:t>- </a:t>
-            </a:r>
-            <a:r>
-              <a:rPr sz="1000">
-                <a:solidFill>
-                  <a:srgbClr val="1F2730"/>
-                </a:solidFill>
-                <a:latin typeface="Calibri"/>
-              </a:rPr>
-              <a:t>Sales department attrition is 25.8%, highest among departments</a:t>
-            </a:r>
-          </a:p>
-          <a:p>
-            <a:pPr>
-              <a:spcAft>
-                <a:spcPts val="700"/>
-              </a:spcAft>
-            </a:pPr>
-            <a:r>
-              <a:rPr sz="1000" b="1">
-                <a:solidFill>
-                  <a:srgbClr val="2C65A4"/>
-                </a:solidFill>
-                <a:latin typeface="Calibri"/>
-              </a:rPr>
-              <a:t>- </a:t>
-            </a:r>
-            <a:r>
-              <a:rPr sz="1000">
-                <a:solidFill>
-                  <a:srgbClr val="1F2730"/>
-                </a:solidFill>
-                <a:latin typeface="Calibri"/>
-              </a:rPr>
-              <a:t>Focus retention efforts on Sales department</a:t>
-            </a:r>
-          </a:p>
-          <a:p>
-            <a:pPr>
-              <a:spcAft>
-                <a:spcPts val="700"/>
-              </a:spcAft>
-            </a:pPr>
-            <a:r>
-              <a:rPr sz="1000" b="1">
-                <a:solidFill>
-                  <a:srgbClr val="2C65A4"/>
-                </a:solidFill>
-                <a:latin typeface="Calibri"/>
-              </a:rPr>
-              <a:t>- </a:t>
-            </a:r>
-            <a:r>
-              <a:rPr sz="1000">
-                <a:solidFill>
-                  <a:srgbClr val="1F2730"/>
-                </a:solidFill>
-                <a:latin typeface="Calibri"/>
-              </a:rPr>
-              <a:t>Attrition Rate by Department</a:t>
-            </a:r>
-          </a:p>
-        </p:txBody>
-      </p:sp>
-      <p:sp>
-        <p:nvSpPr>
-          <p:cNvPr id="8" name="Rounded Rectangle 7"/>
+      <p:pic>
+        <p:nvPicPr>
+          <p:cNvPr id="5" name="Picture 4" descr="figure_1_20260626_181544.png"/>
+          <p:cNvPicPr>
+            <a:picLocks noChangeAspect="1"/>
+          </p:cNvPicPr>
+          <p:nvPr/>
+        </p:nvPicPr>
+        <p:blipFill>
+          <a:blip r:embed="rId2"/>
+          <a:stretch>
+            <a:fillRect/>
+          </a:stretch>
+        </p:blipFill>
+        <p:spPr>
+          <a:xfrm>
+            <a:off x="886967" y="1902675"/>
+            <a:ext cx="6309360" cy="3464128"/>
+          </a:xfrm>
+          <a:prstGeom prst="rect">
+            <a:avLst/>
+          </a:prstGeom>
+        </p:spPr>
+      </p:pic>
+      <p:sp>
+        <p:nvSpPr>
+          <p:cNvPr id="6" name="Rounded Rectangle 5"/>
           <p:cNvSpPr/>
           <p:nvPr/>
         </p:nvSpPr>
         <p:spPr>
           <a:xfrm>
-            <a:off x="4709160" y="1371600"/>
-            <a:ext cx="6583680" cy="4526280"/>
+            <a:off x="7635240" y="1371600"/>
+            <a:ext cx="3657600" cy="4526280"/>
           </a:xfrm>
           <a:prstGeom prst="roundRect">
             <a:avLst/>
@@ -7467,14 +7323,84 @@
       </p:sp>
       <p:sp>
         <p:nvSpPr>
+          <p:cNvPr id="7" name="TextBox 6"/>
+          <p:cNvSpPr txBox="1"/>
+          <p:nvPr/>
+        </p:nvSpPr>
+        <p:spPr>
+          <a:xfrm>
+            <a:off x="7882127" y="1664208"/>
+            <a:ext cx="3063240" cy="320040"/>
+          </a:xfrm>
+          <a:prstGeom prst="rect">
+            <a:avLst/>
+          </a:prstGeom>
+          <a:noFill/>
+        </p:spPr>
+        <p:txBody>
+          <a:bodyPr wrap="square" lIns="54864" rIns="54864" tIns="27432" bIns="27432">
+            <a:spAutoFit/>
+          </a:bodyPr>
+          <a:lstStyle/>
+          <a:p>
+            <a:pPr algn="l"/>
+            <a:r>
+              <a:rPr sz="1400" b="1" i="0">
+                <a:solidFill>
+                  <a:srgbClr val="15304C"/>
+                </a:solidFill>
+                <a:latin typeface="Calibri"/>
+              </a:rPr>
+              <a:t>Insight</a:t>
+            </a:r>
+          </a:p>
+        </p:txBody>
+      </p:sp>
+      <p:sp>
+        <p:nvSpPr>
+          <p:cNvPr id="8" name="TextBox 7"/>
+          <p:cNvSpPr txBox="1"/>
+          <p:nvPr/>
+        </p:nvSpPr>
+        <p:spPr>
+          <a:xfrm>
+            <a:off x="7882127" y="2084831"/>
+            <a:ext cx="3054096" cy="841248"/>
+          </a:xfrm>
+          <a:prstGeom prst="rect">
+            <a:avLst/>
+          </a:prstGeom>
+          <a:noFill/>
+        </p:spPr>
+        <p:txBody>
+          <a:bodyPr wrap="square" lIns="54864" rIns="54864" tIns="27432" bIns="27432">
+            <a:spAutoFit/>
+          </a:bodyPr>
+          <a:lstStyle/>
+          <a:p>
+            <a:pPr algn="l"/>
+            <a:r>
+              <a:rPr sz="1200" b="1" i="0">
+                <a:solidFill>
+                  <a:srgbClr val="1F2730"/>
+                </a:solidFill>
+                <a:latin typeface="Calibri"/>
+              </a:rPr>
+              <a:t>Monthly temperature shows warming trend from 2007-2023 with seasonal cycles.</a:t>
+            </a:r>
+          </a:p>
+        </p:txBody>
+      </p:sp>
+      <p:sp>
+        <p:nvSpPr>
           <p:cNvPr id="9" name="TextBox 8"/>
           <p:cNvSpPr txBox="1"/>
           <p:nvPr/>
         </p:nvSpPr>
         <p:spPr>
           <a:xfrm>
-            <a:off x="4892040" y="1554480"/>
-            <a:ext cx="6217920" cy="256032"/>
+            <a:off x="7845552" y="3127248"/>
+            <a:ext cx="3127248" cy="1920240"/>
           </a:xfrm>
           <a:prstGeom prst="rect">
             <a:avLst/>
@@ -7482,34 +7408,47 @@
           <a:noFill/>
         </p:spPr>
         <p:txBody>
-          <a:bodyPr wrap="square" lIns="9144" rIns="9144" tIns="0" bIns="0">
+          <a:bodyPr wrap="square" lIns="36576" rIns="36576" tIns="18288" bIns="18288">
             <a:spAutoFit/>
           </a:bodyPr>
           <a:lstStyle/>
           <a:p>
-            <a:pPr algn="l"/>
+            <a:pPr>
+              <a:spcAft>
+                <a:spcPts val="700"/>
+              </a:spcAft>
+            </a:pPr>
             <a:r>
               <a:rPr sz="1000" b="1">
                 <a:solidFill>
-                  <a:srgbClr val="15304C"/>
-                </a:solidFill>
-                <a:latin typeface="Calibri"/>
-              </a:rPr>
-              <a:t>Attrition Rate by Department</a:t>
-            </a:r>
-          </a:p>
-        </p:txBody>
-      </p:sp>
-      <p:sp>
-        <p:nvSpPr>
-          <p:cNvPr id="10" name="reconstructed_chart_gridline"/>
+                  <a:srgbClr val="2C65A4"/>
+                </a:solidFill>
+                <a:latin typeface="Calibri"/>
+              </a:rPr>
+              <a:t>- </a:t>
+            </a:r>
+            <a:r>
+              <a:rPr sz="1000">
+                <a:solidFill>
+                  <a:srgbClr val="1F2730"/>
+                </a:solidFill>
+                <a:latin typeface="Calibri"/>
+              </a:rPr>
+              <a:t>Monthly temperature shows warming trend from 2007-2023 with seasonal cycles</a:t>
+            </a:r>
+          </a:p>
+        </p:txBody>
+      </p:sp>
+      <p:sp>
+        <p:nvSpPr>
+          <p:cNvPr id="10" name="Rectangle 9"/>
           <p:cNvSpPr/>
           <p:nvPr/>
         </p:nvSpPr>
         <p:spPr>
           <a:xfrm>
-            <a:off x="5193792" y="2011680"/>
-            <a:ext cx="5742432" cy="5486"/>
+            <a:off x="658368" y="6291072"/>
+            <a:ext cx="10881360" cy="10972"/>
           </a:xfrm>
           <a:prstGeom prst="rect">
             <a:avLst/>
@@ -7545,631 +7484,7 @@
       </p:sp>
       <p:sp>
         <p:nvSpPr>
-          <p:cNvPr id="11" name="reconstructed_chart_gridline"/>
-          <p:cNvSpPr/>
-          <p:nvPr/>
-        </p:nvSpPr>
-        <p:spPr>
-          <a:xfrm>
-            <a:off x="5193792" y="3020568"/>
-            <a:ext cx="5742432" cy="5486"/>
-          </a:xfrm>
-          <a:prstGeom prst="rect">
-            <a:avLst/>
-          </a:prstGeom>
-          <a:solidFill>
-            <a:srgbClr val="D1D7DC"/>
-          </a:solidFill>
-          <a:ln>
-            <a:noFill/>
-          </a:ln>
-        </p:spPr>
-        <p:style>
-          <a:lnRef idx="1">
-            <a:schemeClr val="accent1"/>
-          </a:lnRef>
-          <a:fillRef idx="3">
-            <a:schemeClr val="accent1"/>
-          </a:fillRef>
-          <a:effectRef idx="2">
-            <a:schemeClr val="accent1"/>
-          </a:effectRef>
-          <a:fontRef idx="minor">
-            <a:schemeClr val="lt1"/>
-          </a:fontRef>
-        </p:style>
-        <p:txBody>
-          <a:bodyPr rtlCol="0" anchor="ctr"/>
-          <a:lstStyle/>
-          <a:p>
-            <a:pPr algn="ctr"/>
-          </a:p>
-        </p:txBody>
-      </p:sp>
-      <p:sp>
-        <p:nvSpPr>
-          <p:cNvPr id="12" name="reconstructed_chart_gridline"/>
-          <p:cNvSpPr/>
-          <p:nvPr/>
-        </p:nvSpPr>
-        <p:spPr>
-          <a:xfrm>
-            <a:off x="5193792" y="4029456"/>
-            <a:ext cx="5742432" cy="5486"/>
-          </a:xfrm>
-          <a:prstGeom prst="rect">
-            <a:avLst/>
-          </a:prstGeom>
-          <a:solidFill>
-            <a:srgbClr val="D1D7DC"/>
-          </a:solidFill>
-          <a:ln>
-            <a:noFill/>
-          </a:ln>
-        </p:spPr>
-        <p:style>
-          <a:lnRef idx="1">
-            <a:schemeClr val="accent1"/>
-          </a:lnRef>
-          <a:fillRef idx="3">
-            <a:schemeClr val="accent1"/>
-          </a:fillRef>
-          <a:effectRef idx="2">
-            <a:schemeClr val="accent1"/>
-          </a:effectRef>
-          <a:fontRef idx="minor">
-            <a:schemeClr val="lt1"/>
-          </a:fontRef>
-        </p:style>
-        <p:txBody>
-          <a:bodyPr rtlCol="0" anchor="ctr"/>
-          <a:lstStyle/>
-          <a:p>
-            <a:pPr algn="ctr"/>
-          </a:p>
-        </p:txBody>
-      </p:sp>
-      <p:sp>
-        <p:nvSpPr>
-          <p:cNvPr id="13" name="reconstructed_chart_gridline"/>
-          <p:cNvSpPr/>
-          <p:nvPr/>
-        </p:nvSpPr>
-        <p:spPr>
-          <a:xfrm>
-            <a:off x="5193792" y="5038344"/>
-            <a:ext cx="5742432" cy="5486"/>
-          </a:xfrm>
-          <a:prstGeom prst="rect">
-            <a:avLst/>
-          </a:prstGeom>
-          <a:solidFill>
-            <a:srgbClr val="D1D7DC"/>
-          </a:solidFill>
-          <a:ln>
-            <a:noFill/>
-          </a:ln>
-        </p:spPr>
-        <p:style>
-          <a:lnRef idx="1">
-            <a:schemeClr val="accent1"/>
-          </a:lnRef>
-          <a:fillRef idx="3">
-            <a:schemeClr val="accent1"/>
-          </a:fillRef>
-          <a:effectRef idx="2">
-            <a:schemeClr val="accent1"/>
-          </a:effectRef>
-          <a:fontRef idx="minor">
-            <a:schemeClr val="lt1"/>
-          </a:fontRef>
-        </p:style>
-        <p:txBody>
-          <a:bodyPr rtlCol="0" anchor="ctr"/>
-          <a:lstStyle/>
-          <a:p>
-            <a:pPr algn="ctr"/>
-          </a:p>
-        </p:txBody>
-      </p:sp>
-      <p:sp>
-        <p:nvSpPr>
-          <p:cNvPr id="14" name="reconstructed_chart_axis"/>
-          <p:cNvSpPr/>
-          <p:nvPr/>
-        </p:nvSpPr>
-        <p:spPr>
-          <a:xfrm>
-            <a:off x="5193792" y="5038344"/>
-            <a:ext cx="5742432" cy="10972"/>
-          </a:xfrm>
-          <a:prstGeom prst="rect">
-            <a:avLst/>
-          </a:prstGeom>
-          <a:solidFill>
-            <a:srgbClr val="D1D7DC"/>
-          </a:solidFill>
-          <a:ln>
-            <a:noFill/>
-          </a:ln>
-        </p:spPr>
-        <p:style>
-          <a:lnRef idx="1">
-            <a:schemeClr val="accent1"/>
-          </a:lnRef>
-          <a:fillRef idx="3">
-            <a:schemeClr val="accent1"/>
-          </a:fillRef>
-          <a:effectRef idx="2">
-            <a:schemeClr val="accent1"/>
-          </a:effectRef>
-          <a:fontRef idx="minor">
-            <a:schemeClr val="lt1"/>
-          </a:fontRef>
-        </p:style>
-        <p:txBody>
-          <a:bodyPr rtlCol="0" anchor="ctr"/>
-          <a:lstStyle/>
-          <a:p>
-            <a:pPr algn="ctr"/>
-          </a:p>
-        </p:txBody>
-      </p:sp>
-      <p:sp>
-        <p:nvSpPr>
-          <p:cNvPr id="15" name="reconstructed_chart_bar"/>
-          <p:cNvSpPr/>
-          <p:nvPr/>
-        </p:nvSpPr>
-        <p:spPr>
-          <a:xfrm>
-            <a:off x="5193792" y="2957229"/>
-            <a:ext cx="1865376" cy="2081114"/>
-          </a:xfrm>
-          <a:prstGeom prst="rect">
-            <a:avLst/>
-          </a:prstGeom>
-          <a:solidFill>
-            <a:srgbClr val="2C65A4"/>
-          </a:solidFill>
-          <a:ln>
-            <a:noFill/>
-          </a:ln>
-        </p:spPr>
-        <p:style>
-          <a:lnRef idx="1">
-            <a:schemeClr val="accent1"/>
-          </a:lnRef>
-          <a:fillRef idx="3">
-            <a:schemeClr val="accent1"/>
-          </a:fillRef>
-          <a:effectRef idx="2">
-            <a:schemeClr val="accent1"/>
-          </a:effectRef>
-          <a:fontRef idx="minor">
-            <a:schemeClr val="lt1"/>
-          </a:fontRef>
-        </p:style>
-        <p:txBody>
-          <a:bodyPr rtlCol="0" anchor="ctr"/>
-          <a:lstStyle/>
-          <a:p>
-            <a:pPr algn="ctr"/>
-          </a:p>
-        </p:txBody>
-      </p:sp>
-      <p:sp>
-        <p:nvSpPr>
-          <p:cNvPr id="16" name="TextBox 15"/>
-          <p:cNvSpPr txBox="1"/>
-          <p:nvPr/>
-        </p:nvSpPr>
-        <p:spPr>
-          <a:xfrm>
-            <a:off x="5157216" y="2737773"/>
-            <a:ext cx="1938528" cy="155448"/>
-          </a:xfrm>
-          <a:prstGeom prst="rect">
-            <a:avLst/>
-          </a:prstGeom>
-          <a:noFill/>
-        </p:spPr>
-        <p:txBody>
-          <a:bodyPr wrap="square" lIns="9144" rIns="9144" tIns="0" bIns="0">
-            <a:spAutoFit/>
-          </a:bodyPr>
-          <a:lstStyle/>
-          <a:p>
-            <a:pPr algn="ctr"/>
-            <a:r>
-              <a:rPr sz="700" b="0">
-                <a:solidFill>
-                  <a:srgbClr val="5E6974"/>
-                </a:solidFill>
-                <a:latin typeface="Calibri"/>
-              </a:rPr>
-              <a:t>0.206278</a:t>
-            </a:r>
-          </a:p>
-        </p:txBody>
-      </p:sp>
-      <p:sp>
-        <p:nvSpPr>
-          <p:cNvPr id="17" name="TextBox 16"/>
-          <p:cNvSpPr txBox="1"/>
-          <p:nvPr/>
-        </p:nvSpPr>
-        <p:spPr>
-          <a:xfrm>
-            <a:off x="5138928" y="5093208"/>
-            <a:ext cx="1975104" cy="347472"/>
-          </a:xfrm>
-          <a:prstGeom prst="rect">
-            <a:avLst/>
-          </a:prstGeom>
-          <a:noFill/>
-        </p:spPr>
-        <p:txBody>
-          <a:bodyPr wrap="square" lIns="9144" rIns="9144" tIns="0" bIns="0">
-            <a:spAutoFit/>
-          </a:bodyPr>
-          <a:lstStyle/>
-          <a:p>
-            <a:pPr algn="ctr"/>
-            <a:r>
-              <a:rPr sz="700" b="0">
-                <a:solidFill>
-                  <a:srgbClr val="5E6974"/>
-                </a:solidFill>
-                <a:latin typeface="Calibri"/>
-              </a:rPr>
-              <a:t>Sales</a:t>
-            </a:r>
-          </a:p>
-        </p:txBody>
-      </p:sp>
-      <p:sp>
-        <p:nvSpPr>
-          <p:cNvPr id="18" name="reconstructed_chart_bar"/>
-          <p:cNvSpPr/>
-          <p:nvPr/>
-        </p:nvSpPr>
-        <p:spPr>
-          <a:xfrm>
-            <a:off x="7132320" y="3116652"/>
-            <a:ext cx="1865376" cy="1921691"/>
-          </a:xfrm>
-          <a:prstGeom prst="rect">
-            <a:avLst/>
-          </a:prstGeom>
-          <a:solidFill>
-            <a:srgbClr val="35807F"/>
-          </a:solidFill>
-          <a:ln>
-            <a:noFill/>
-          </a:ln>
-        </p:spPr>
-        <p:style>
-          <a:lnRef idx="1">
-            <a:schemeClr val="accent1"/>
-          </a:lnRef>
-          <a:fillRef idx="3">
-            <a:schemeClr val="accent1"/>
-          </a:fillRef>
-          <a:effectRef idx="2">
-            <a:schemeClr val="accent1"/>
-          </a:effectRef>
-          <a:fontRef idx="minor">
-            <a:schemeClr val="lt1"/>
-          </a:fontRef>
-        </p:style>
-        <p:txBody>
-          <a:bodyPr rtlCol="0" anchor="ctr"/>
-          <a:lstStyle/>
-          <a:p>
-            <a:pPr algn="ctr"/>
-          </a:p>
-        </p:txBody>
-      </p:sp>
-      <p:sp>
-        <p:nvSpPr>
-          <p:cNvPr id="19" name="TextBox 18"/>
-          <p:cNvSpPr txBox="1"/>
-          <p:nvPr/>
-        </p:nvSpPr>
-        <p:spPr>
-          <a:xfrm>
-            <a:off x="7095744" y="2897196"/>
-            <a:ext cx="1938528" cy="155448"/>
-          </a:xfrm>
-          <a:prstGeom prst="rect">
-            <a:avLst/>
-          </a:prstGeom>
-          <a:noFill/>
-        </p:spPr>
-        <p:txBody>
-          <a:bodyPr wrap="square" lIns="9144" rIns="9144" tIns="0" bIns="0">
-            <a:spAutoFit/>
-          </a:bodyPr>
-          <a:lstStyle/>
-          <a:p>
-            <a:pPr algn="ctr"/>
-            <a:r>
-              <a:rPr sz="700" b="0">
-                <a:solidFill>
-                  <a:srgbClr val="5E6974"/>
-                </a:solidFill>
-                <a:latin typeface="Calibri"/>
-              </a:rPr>
-              <a:t>0.190476</a:t>
-            </a:r>
-          </a:p>
-        </p:txBody>
-      </p:sp>
-      <p:sp>
-        <p:nvSpPr>
-          <p:cNvPr id="20" name="TextBox 19"/>
-          <p:cNvSpPr txBox="1"/>
-          <p:nvPr/>
-        </p:nvSpPr>
-        <p:spPr>
-          <a:xfrm>
-            <a:off x="7077456" y="5093208"/>
-            <a:ext cx="1975104" cy="347472"/>
-          </a:xfrm>
-          <a:prstGeom prst="rect">
-            <a:avLst/>
-          </a:prstGeom>
-          <a:noFill/>
-        </p:spPr>
-        <p:txBody>
-          <a:bodyPr wrap="square" lIns="9144" rIns="9144" tIns="0" bIns="0">
-            <a:spAutoFit/>
-          </a:bodyPr>
-          <a:lstStyle/>
-          <a:p>
-            <a:pPr algn="ctr"/>
-            <a:r>
-              <a:rPr sz="700" b="0">
-                <a:solidFill>
-                  <a:srgbClr val="5E6974"/>
-                </a:solidFill>
-                <a:latin typeface="Calibri"/>
-              </a:rPr>
-              <a:t>Human Resources</a:t>
-            </a:r>
-          </a:p>
-        </p:txBody>
-      </p:sp>
-      <p:sp>
-        <p:nvSpPr>
-          <p:cNvPr id="21" name="reconstructed_chart_bar"/>
-          <p:cNvSpPr/>
-          <p:nvPr/>
-        </p:nvSpPr>
-        <p:spPr>
-          <a:xfrm>
-            <a:off x="9070848" y="3642068"/>
-            <a:ext cx="1865376" cy="1396275"/>
-          </a:xfrm>
-          <a:prstGeom prst="rect">
-            <a:avLst/>
-          </a:prstGeom>
-          <a:solidFill>
-            <a:srgbClr val="BB9241"/>
-          </a:solidFill>
-          <a:ln>
-            <a:noFill/>
-          </a:ln>
-        </p:spPr>
-        <p:style>
-          <a:lnRef idx="1">
-            <a:schemeClr val="accent1"/>
-          </a:lnRef>
-          <a:fillRef idx="3">
-            <a:schemeClr val="accent1"/>
-          </a:fillRef>
-          <a:effectRef idx="2">
-            <a:schemeClr val="accent1"/>
-          </a:effectRef>
-          <a:fontRef idx="minor">
-            <a:schemeClr val="lt1"/>
-          </a:fontRef>
-        </p:style>
-        <p:txBody>
-          <a:bodyPr rtlCol="0" anchor="ctr"/>
-          <a:lstStyle/>
-          <a:p>
-            <a:pPr algn="ctr"/>
-          </a:p>
-        </p:txBody>
-      </p:sp>
-      <p:sp>
-        <p:nvSpPr>
-          <p:cNvPr id="22" name="TextBox 21"/>
-          <p:cNvSpPr txBox="1"/>
-          <p:nvPr/>
-        </p:nvSpPr>
-        <p:spPr>
-          <a:xfrm>
-            <a:off x="9034272" y="3422612"/>
-            <a:ext cx="1938528" cy="155448"/>
-          </a:xfrm>
-          <a:prstGeom prst="rect">
-            <a:avLst/>
-          </a:prstGeom>
-          <a:noFill/>
-        </p:spPr>
-        <p:txBody>
-          <a:bodyPr wrap="square" lIns="9144" rIns="9144" tIns="0" bIns="0">
-            <a:spAutoFit/>
-          </a:bodyPr>
-          <a:lstStyle/>
-          <a:p>
-            <a:pPr algn="ctr"/>
-            <a:r>
-              <a:rPr sz="700" b="0">
-                <a:solidFill>
-                  <a:srgbClr val="5E6974"/>
-                </a:solidFill>
-                <a:latin typeface="Calibri"/>
-              </a:rPr>
-              <a:t>0.138398</a:t>
-            </a:r>
-          </a:p>
-        </p:txBody>
-      </p:sp>
-      <p:sp>
-        <p:nvSpPr>
-          <p:cNvPr id="23" name="TextBox 22"/>
-          <p:cNvSpPr txBox="1"/>
-          <p:nvPr/>
-        </p:nvSpPr>
-        <p:spPr>
-          <a:xfrm>
-            <a:off x="9015984" y="5093208"/>
-            <a:ext cx="1975104" cy="347472"/>
-          </a:xfrm>
-          <a:prstGeom prst="rect">
-            <a:avLst/>
-          </a:prstGeom>
-          <a:noFill/>
-        </p:spPr>
-        <p:txBody>
-          <a:bodyPr wrap="square" lIns="9144" rIns="9144" tIns="0" bIns="0">
-            <a:spAutoFit/>
-          </a:bodyPr>
-          <a:lstStyle/>
-          <a:p>
-            <a:pPr algn="ctr"/>
-            <a:r>
-              <a:rPr sz="700" b="0">
-                <a:solidFill>
-                  <a:srgbClr val="5E6974"/>
-                </a:solidFill>
-                <a:latin typeface="Calibri"/>
-              </a:rPr>
-              <a:t>Research &amp;...</a:t>
-            </a:r>
-          </a:p>
-        </p:txBody>
-      </p:sp>
-      <p:sp>
-        <p:nvSpPr>
-          <p:cNvPr id="24" name="TextBox 23"/>
-          <p:cNvSpPr txBox="1"/>
-          <p:nvPr/>
-        </p:nvSpPr>
-        <p:spPr>
-          <a:xfrm>
-            <a:off x="5257800" y="5550408"/>
-            <a:ext cx="5486400" cy="146304"/>
-          </a:xfrm>
-          <a:prstGeom prst="rect">
-            <a:avLst/>
-          </a:prstGeom>
-          <a:noFill/>
-        </p:spPr>
-        <p:txBody>
-          <a:bodyPr wrap="square" lIns="9144" rIns="9144" tIns="0" bIns="0">
-            <a:spAutoFit/>
-          </a:bodyPr>
-          <a:lstStyle/>
-          <a:p>
-            <a:pPr algn="ctr"/>
-            <a:r>
-              <a:rPr sz="700" b="0">
-                <a:solidFill>
-                  <a:srgbClr val="5E6974"/>
-                </a:solidFill>
-                <a:latin typeface="Calibri"/>
-              </a:rPr>
-              <a:t>Department</a:t>
-            </a:r>
-          </a:p>
-        </p:txBody>
-      </p:sp>
-      <p:sp>
-        <p:nvSpPr>
-          <p:cNvPr id="25" name="TextBox 24"/>
-          <p:cNvSpPr txBox="1"/>
-          <p:nvPr/>
-        </p:nvSpPr>
-        <p:spPr>
-          <a:xfrm>
-            <a:off x="4882896" y="1865376"/>
-            <a:ext cx="1463040" cy="146304"/>
-          </a:xfrm>
-          <a:prstGeom prst="rect">
-            <a:avLst/>
-          </a:prstGeom>
-          <a:noFill/>
-        </p:spPr>
-        <p:txBody>
-          <a:bodyPr wrap="square" lIns="9144" rIns="9144" tIns="0" bIns="0">
-            <a:spAutoFit/>
-          </a:bodyPr>
-          <a:lstStyle/>
-          <a:p>
-            <a:pPr algn="l"/>
-            <a:r>
-              <a:rPr sz="700" b="0">
-                <a:solidFill>
-                  <a:srgbClr val="5E6974"/>
-                </a:solidFill>
-                <a:latin typeface="Calibri"/>
-              </a:rPr>
-              <a:t>Attrition Rate</a:t>
-            </a:r>
-          </a:p>
-        </p:txBody>
-      </p:sp>
-      <p:sp>
-        <p:nvSpPr>
-          <p:cNvPr id="26" name="Rectangle 25"/>
-          <p:cNvSpPr/>
-          <p:nvPr/>
-        </p:nvSpPr>
-        <p:spPr>
-          <a:xfrm>
-            <a:off x="658368" y="6291072"/>
-            <a:ext cx="10881360" cy="10972"/>
-          </a:xfrm>
-          <a:prstGeom prst="rect">
-            <a:avLst/>
-          </a:prstGeom>
-          <a:solidFill>
-            <a:srgbClr val="D1D7DC"/>
-          </a:solidFill>
-          <a:ln>
-            <a:noFill/>
-          </a:ln>
-        </p:spPr>
-        <p:style>
-          <a:lnRef idx="1">
-            <a:schemeClr val="accent1"/>
-          </a:lnRef>
-          <a:fillRef idx="3">
-            <a:schemeClr val="accent1"/>
-          </a:fillRef>
-          <a:effectRef idx="2">
-            <a:schemeClr val="accent1"/>
-          </a:effectRef>
-          <a:fontRef idx="minor">
-            <a:schemeClr val="lt1"/>
-          </a:fontRef>
-        </p:style>
-        <p:txBody>
-          <a:bodyPr rtlCol="0" anchor="ctr"/>
-          <a:lstStyle/>
-          <a:p>
-            <a:pPr algn="ctr"/>
-          </a:p>
-        </p:txBody>
-      </p:sp>
-      <p:sp>
-        <p:nvSpPr>
-          <p:cNvPr id="27" name="TextBox 26"/>
+          <p:cNvPr id="11" name="TextBox 10"/>
           <p:cNvSpPr txBox="1"/>
           <p:nvPr/>
         </p:nvSpPr>
@@ -8197,14 +7512,14 @@
                 </a:solidFill>
                 <a:latin typeface="Calibri"/>
               </a:rPr>
-              <a:t>Reducing Preventable Attrition</a:t>
-            </a:r>
-          </a:p>
-        </p:txBody>
-      </p:sp>
-      <p:sp>
-        <p:nvSpPr>
-          <p:cNvPr id="28" name="TextBox 27"/>
+              <a:t>Optimizing Operations with High-Fidelity Weather Intelligence</a:t>
+            </a:r>
+          </a:p>
+        </p:txBody>
+      </p:sp>
+      <p:sp>
+        <p:nvSpPr>
+          <p:cNvPr id="12" name="TextBox 11"/>
           <p:cNvSpPr txBox="1"/>
           <p:nvPr/>
         </p:nvSpPr>
@@ -8287,13 +7602,13 @@
           <a:p>
             <a:pPr algn="l"/>
             <a:r>
-              <a:rPr sz="2300" b="1" i="0">
+              <a:rPr sz="2000" b="1" i="0">
                 <a:solidFill>
                   <a:srgbClr val="15304C"/>
                 </a:solidFill>
                 <a:latin typeface="Calibri"/>
               </a:rPr>
-              <a:t>Overtime employees have 30.5% attrition rate</a:t>
+              <a:t>Clear seasonal pattern with peak temperatures in summer months (June-August)</a:t>
             </a:r>
           </a:p>
         </p:txBody>
@@ -8350,7 +7665,7 @@
         <p:spPr>
           <a:xfrm>
             <a:off x="749808" y="1371600"/>
-            <a:ext cx="6583680" cy="4526280"/>
+            <a:ext cx="3657600" cy="4526280"/>
           </a:xfrm>
           <a:prstGeom prst="roundRect">
             <a:avLst/>
@@ -8394,8 +7709,8 @@
         </p:nvSpPr>
         <p:spPr>
           <a:xfrm>
-            <a:off x="932688" y="1554480"/>
-            <a:ext cx="6217920" cy="256032"/>
+            <a:off x="987552" y="1664208"/>
+            <a:ext cx="3063240" cy="320040"/>
           </a:xfrm>
           <a:prstGeom prst="rect">
             <a:avLst/>
@@ -8403,292 +7718,34 @@
           <a:noFill/>
         </p:spPr>
         <p:txBody>
-          <a:bodyPr wrap="square" lIns="9144" rIns="9144" tIns="0" bIns="0">
+          <a:bodyPr wrap="square" lIns="54864" rIns="54864" tIns="27432" bIns="27432">
             <a:spAutoFit/>
           </a:bodyPr>
           <a:lstStyle/>
           <a:p>
             <a:pPr algn="l"/>
             <a:r>
-              <a:rPr sz="1000" b="1">
+              <a:rPr sz="1400" b="1" i="0">
                 <a:solidFill>
                   <a:srgbClr val="15304C"/>
                 </a:solidFill>
                 <a:latin typeface="Calibri"/>
               </a:rPr>
-              <a:t>Attrition Rate by Overtime Status</a:t>
-            </a:r>
-          </a:p>
-        </p:txBody>
-      </p:sp>
-      <p:sp>
-        <p:nvSpPr>
-          <p:cNvPr id="6" name="reconstructed_chart_gridline"/>
-          <p:cNvSpPr/>
-          <p:nvPr/>
-        </p:nvSpPr>
-        <p:spPr>
-          <a:xfrm>
-            <a:off x="1234440" y="2011680"/>
-            <a:ext cx="5742432" cy="5486"/>
-          </a:xfrm>
-          <a:prstGeom prst="rect">
-            <a:avLst/>
-          </a:prstGeom>
-          <a:solidFill>
-            <a:srgbClr val="D1D7DC"/>
-          </a:solidFill>
-          <a:ln>
-            <a:noFill/>
-          </a:ln>
-        </p:spPr>
-        <p:style>
-          <a:lnRef idx="1">
-            <a:schemeClr val="accent1"/>
-          </a:lnRef>
-          <a:fillRef idx="3">
-            <a:schemeClr val="accent1"/>
-          </a:fillRef>
-          <a:effectRef idx="2">
-            <a:schemeClr val="accent1"/>
-          </a:effectRef>
-          <a:fontRef idx="minor">
-            <a:schemeClr val="lt1"/>
-          </a:fontRef>
-        </p:style>
-        <p:txBody>
-          <a:bodyPr rtlCol="0" anchor="ctr"/>
-          <a:lstStyle/>
-          <a:p>
-            <a:pPr algn="ctr"/>
-          </a:p>
-        </p:txBody>
-      </p:sp>
-      <p:sp>
-        <p:nvSpPr>
-          <p:cNvPr id="7" name="reconstructed_chart_gridline"/>
-          <p:cNvSpPr/>
-          <p:nvPr/>
-        </p:nvSpPr>
-        <p:spPr>
-          <a:xfrm>
-            <a:off x="1234440" y="3020568"/>
-            <a:ext cx="5742432" cy="5486"/>
-          </a:xfrm>
-          <a:prstGeom prst="rect">
-            <a:avLst/>
-          </a:prstGeom>
-          <a:solidFill>
-            <a:srgbClr val="D1D7DC"/>
-          </a:solidFill>
-          <a:ln>
-            <a:noFill/>
-          </a:ln>
-        </p:spPr>
-        <p:style>
-          <a:lnRef idx="1">
-            <a:schemeClr val="accent1"/>
-          </a:lnRef>
-          <a:fillRef idx="3">
-            <a:schemeClr val="accent1"/>
-          </a:fillRef>
-          <a:effectRef idx="2">
-            <a:schemeClr val="accent1"/>
-          </a:effectRef>
-          <a:fontRef idx="minor">
-            <a:schemeClr val="lt1"/>
-          </a:fontRef>
-        </p:style>
-        <p:txBody>
-          <a:bodyPr rtlCol="0" anchor="ctr"/>
-          <a:lstStyle/>
-          <a:p>
-            <a:pPr algn="ctr"/>
-          </a:p>
-        </p:txBody>
-      </p:sp>
-      <p:sp>
-        <p:nvSpPr>
-          <p:cNvPr id="8" name="reconstructed_chart_gridline"/>
-          <p:cNvSpPr/>
-          <p:nvPr/>
-        </p:nvSpPr>
-        <p:spPr>
-          <a:xfrm>
-            <a:off x="1234440" y="4029456"/>
-            <a:ext cx="5742432" cy="5486"/>
-          </a:xfrm>
-          <a:prstGeom prst="rect">
-            <a:avLst/>
-          </a:prstGeom>
-          <a:solidFill>
-            <a:srgbClr val="D1D7DC"/>
-          </a:solidFill>
-          <a:ln>
-            <a:noFill/>
-          </a:ln>
-        </p:spPr>
-        <p:style>
-          <a:lnRef idx="1">
-            <a:schemeClr val="accent1"/>
-          </a:lnRef>
-          <a:fillRef idx="3">
-            <a:schemeClr val="accent1"/>
-          </a:fillRef>
-          <a:effectRef idx="2">
-            <a:schemeClr val="accent1"/>
-          </a:effectRef>
-          <a:fontRef idx="minor">
-            <a:schemeClr val="lt1"/>
-          </a:fontRef>
-        </p:style>
-        <p:txBody>
-          <a:bodyPr rtlCol="0" anchor="ctr"/>
-          <a:lstStyle/>
-          <a:p>
-            <a:pPr algn="ctr"/>
-          </a:p>
-        </p:txBody>
-      </p:sp>
-      <p:sp>
-        <p:nvSpPr>
-          <p:cNvPr id="9" name="reconstructed_chart_gridline"/>
-          <p:cNvSpPr/>
-          <p:nvPr/>
-        </p:nvSpPr>
-        <p:spPr>
-          <a:xfrm>
-            <a:off x="1234440" y="5038344"/>
-            <a:ext cx="5742432" cy="5486"/>
-          </a:xfrm>
-          <a:prstGeom prst="rect">
-            <a:avLst/>
-          </a:prstGeom>
-          <a:solidFill>
-            <a:srgbClr val="D1D7DC"/>
-          </a:solidFill>
-          <a:ln>
-            <a:noFill/>
-          </a:ln>
-        </p:spPr>
-        <p:style>
-          <a:lnRef idx="1">
-            <a:schemeClr val="accent1"/>
-          </a:lnRef>
-          <a:fillRef idx="3">
-            <a:schemeClr val="accent1"/>
-          </a:fillRef>
-          <a:effectRef idx="2">
-            <a:schemeClr val="accent1"/>
-          </a:effectRef>
-          <a:fontRef idx="minor">
-            <a:schemeClr val="lt1"/>
-          </a:fontRef>
-        </p:style>
-        <p:txBody>
-          <a:bodyPr rtlCol="0" anchor="ctr"/>
-          <a:lstStyle/>
-          <a:p>
-            <a:pPr algn="ctr"/>
-          </a:p>
-        </p:txBody>
-      </p:sp>
-      <p:sp>
-        <p:nvSpPr>
-          <p:cNvPr id="10" name="reconstructed_chart_axis"/>
-          <p:cNvSpPr/>
-          <p:nvPr/>
-        </p:nvSpPr>
-        <p:spPr>
-          <a:xfrm>
-            <a:off x="1234440" y="5038344"/>
-            <a:ext cx="5742432" cy="10972"/>
-          </a:xfrm>
-          <a:prstGeom prst="rect">
-            <a:avLst/>
-          </a:prstGeom>
-          <a:solidFill>
-            <a:srgbClr val="D1D7DC"/>
-          </a:solidFill>
-          <a:ln>
-            <a:noFill/>
-          </a:ln>
-        </p:spPr>
-        <p:style>
-          <a:lnRef idx="1">
-            <a:schemeClr val="accent1"/>
-          </a:lnRef>
-          <a:fillRef idx="3">
-            <a:schemeClr val="accent1"/>
-          </a:fillRef>
-          <a:effectRef idx="2">
-            <a:schemeClr val="accent1"/>
-          </a:effectRef>
-          <a:fontRef idx="minor">
-            <a:schemeClr val="lt1"/>
-          </a:fontRef>
-        </p:style>
-        <p:txBody>
-          <a:bodyPr rtlCol="0" anchor="ctr"/>
-          <a:lstStyle/>
-          <a:p>
-            <a:pPr algn="ctr"/>
-          </a:p>
-        </p:txBody>
-      </p:sp>
-      <p:sp>
-        <p:nvSpPr>
-          <p:cNvPr id="11" name="reconstructed_chart_bar"/>
-          <p:cNvSpPr/>
-          <p:nvPr/>
-        </p:nvSpPr>
-        <p:spPr>
-          <a:xfrm>
-            <a:off x="1234440" y="2728330"/>
-            <a:ext cx="2834640" cy="2310013"/>
-          </a:xfrm>
-          <a:prstGeom prst="rect">
-            <a:avLst/>
-          </a:prstGeom>
-          <a:solidFill>
-            <a:srgbClr val="2C65A4"/>
-          </a:solidFill>
-          <a:ln>
-            <a:noFill/>
-          </a:ln>
-        </p:spPr>
-        <p:style>
-          <a:lnRef idx="1">
-            <a:schemeClr val="accent1"/>
-          </a:lnRef>
-          <a:fillRef idx="3">
-            <a:schemeClr val="accent1"/>
-          </a:fillRef>
-          <a:effectRef idx="2">
-            <a:schemeClr val="accent1"/>
-          </a:effectRef>
-          <a:fontRef idx="minor">
-            <a:schemeClr val="lt1"/>
-          </a:fontRef>
-        </p:style>
-        <p:txBody>
-          <a:bodyPr rtlCol="0" anchor="ctr"/>
-          <a:lstStyle/>
-          <a:p>
-            <a:pPr algn="ctr"/>
-          </a:p>
-        </p:txBody>
-      </p:sp>
-      <p:sp>
-        <p:nvSpPr>
-          <p:cNvPr id="12" name="TextBox 11"/>
+              <a:t>Readout</a:t>
+            </a:r>
+          </a:p>
+        </p:txBody>
+      </p:sp>
+      <p:sp>
+        <p:nvSpPr>
+          <p:cNvPr id="6" name="TextBox 5"/>
           <p:cNvSpPr txBox="1"/>
           <p:nvPr/>
         </p:nvSpPr>
         <p:spPr>
           <a:xfrm>
-            <a:off x="1197864" y="2508874"/>
-            <a:ext cx="2907792" cy="155448"/>
+            <a:off x="987552" y="2084831"/>
+            <a:ext cx="3054096" cy="841248"/>
           </a:xfrm>
           <a:prstGeom prst="rect">
             <a:avLst/>
@@ -8696,34 +7753,34 @@
           <a:noFill/>
         </p:spPr>
         <p:txBody>
-          <a:bodyPr wrap="square" lIns="9144" rIns="9144" tIns="0" bIns="0">
+          <a:bodyPr wrap="square" lIns="54864" rIns="54864" tIns="27432" bIns="27432">
             <a:spAutoFit/>
           </a:bodyPr>
           <a:lstStyle/>
           <a:p>
-            <a:pPr algn="ctr"/>
-            <a:r>
-              <a:rPr sz="700" b="0">
-                <a:solidFill>
-                  <a:srgbClr val="5E6974"/>
-                </a:solidFill>
-                <a:latin typeface="Calibri"/>
-              </a:rPr>
-              <a:t>0.305288</a:t>
-            </a:r>
-          </a:p>
-        </p:txBody>
-      </p:sp>
-      <p:sp>
-        <p:nvSpPr>
-          <p:cNvPr id="13" name="TextBox 12"/>
+            <a:pPr algn="l"/>
+            <a:r>
+              <a:rPr sz="1200" b="1" i="0">
+                <a:solidFill>
+                  <a:srgbClr val="1F2730"/>
+                </a:solidFill>
+                <a:latin typeface="Calibri"/>
+              </a:rPr>
+              <a:t>Clear seasonal pattern with peak temperatures in summer months (June-August).</a:t>
+            </a:r>
+          </a:p>
+        </p:txBody>
+      </p:sp>
+      <p:sp>
+        <p:nvSpPr>
+          <p:cNvPr id="7" name="TextBox 6"/>
           <p:cNvSpPr txBox="1"/>
           <p:nvPr/>
         </p:nvSpPr>
         <p:spPr>
           <a:xfrm>
-            <a:off x="1179576" y="5093208"/>
-            <a:ext cx="2944368" cy="347472"/>
+            <a:off x="950976" y="3127248"/>
+            <a:ext cx="3127248" cy="1920240"/>
           </a:xfrm>
           <a:prstGeom prst="rect">
             <a:avLst/>
@@ -8731,217 +7788,47 @@
           <a:noFill/>
         </p:spPr>
         <p:txBody>
-          <a:bodyPr wrap="square" lIns="9144" rIns="9144" tIns="0" bIns="0">
+          <a:bodyPr wrap="square" lIns="36576" rIns="36576" tIns="18288" bIns="18288">
             <a:spAutoFit/>
           </a:bodyPr>
           <a:lstStyle/>
           <a:p>
-            <a:pPr algn="ctr"/>
-            <a:r>
-              <a:rPr sz="700" b="0">
-                <a:solidFill>
-                  <a:srgbClr val="5E6974"/>
-                </a:solidFill>
-                <a:latin typeface="Calibri"/>
-              </a:rPr>
-              <a:t>Yes</a:t>
-            </a:r>
-          </a:p>
-        </p:txBody>
-      </p:sp>
-      <p:sp>
-        <p:nvSpPr>
-          <p:cNvPr id="14" name="reconstructed_chart_bar"/>
+            <a:pPr>
+              <a:spcAft>
+                <a:spcPts val="700"/>
+              </a:spcAft>
+            </a:pPr>
+            <a:r>
+              <a:rPr sz="1000" b="1">
+                <a:solidFill>
+                  <a:srgbClr val="2C65A4"/>
+                </a:solidFill>
+                <a:latin typeface="Calibri"/>
+              </a:rPr>
+              <a:t>- </a:t>
+            </a:r>
+            <a:r>
+              <a:rPr sz="1000">
+                <a:solidFill>
+                  <a:srgbClr val="1F2730"/>
+                </a:solidFill>
+                <a:latin typeface="Calibri"/>
+              </a:rPr>
+              <a:t>Clear seasonal pattern with peak temperatures in summer months (June-August)</a:t>
+            </a:r>
+          </a:p>
+        </p:txBody>
+      </p:sp>
+      <p:sp>
+        <p:nvSpPr>
+          <p:cNvPr id="8" name="Rounded Rectangle 7"/>
           <p:cNvSpPr/>
           <p:nvPr/>
         </p:nvSpPr>
         <p:spPr>
           <a:xfrm>
-            <a:off x="4142232" y="4248654"/>
-            <a:ext cx="2834640" cy="789689"/>
-          </a:xfrm>
-          <a:prstGeom prst="rect">
-            <a:avLst/>
-          </a:prstGeom>
-          <a:solidFill>
-            <a:srgbClr val="35807F"/>
-          </a:solidFill>
-          <a:ln>
-            <a:noFill/>
-          </a:ln>
-        </p:spPr>
-        <p:style>
-          <a:lnRef idx="1">
-            <a:schemeClr val="accent1"/>
-          </a:lnRef>
-          <a:fillRef idx="3">
-            <a:schemeClr val="accent1"/>
-          </a:fillRef>
-          <a:effectRef idx="2">
-            <a:schemeClr val="accent1"/>
-          </a:effectRef>
-          <a:fontRef idx="minor">
-            <a:schemeClr val="lt1"/>
-          </a:fontRef>
-        </p:style>
-        <p:txBody>
-          <a:bodyPr rtlCol="0" anchor="ctr"/>
-          <a:lstStyle/>
-          <a:p>
-            <a:pPr algn="ctr"/>
-          </a:p>
-        </p:txBody>
-      </p:sp>
-      <p:sp>
-        <p:nvSpPr>
-          <p:cNvPr id="15" name="TextBox 14"/>
-          <p:cNvSpPr txBox="1"/>
-          <p:nvPr/>
-        </p:nvSpPr>
-        <p:spPr>
-          <a:xfrm>
-            <a:off x="4105656" y="4029198"/>
-            <a:ext cx="2907792" cy="155448"/>
-          </a:xfrm>
-          <a:prstGeom prst="rect">
-            <a:avLst/>
-          </a:prstGeom>
-          <a:noFill/>
-        </p:spPr>
-        <p:txBody>
-          <a:bodyPr wrap="square" lIns="9144" rIns="9144" tIns="0" bIns="0">
-            <a:spAutoFit/>
-          </a:bodyPr>
-          <a:lstStyle/>
-          <a:p>
-            <a:pPr algn="ctr"/>
-            <a:r>
-              <a:rPr sz="700" b="0">
-                <a:solidFill>
-                  <a:srgbClr val="5E6974"/>
-                </a:solidFill>
-                <a:latin typeface="Calibri"/>
-              </a:rPr>
-              <a:t>0.104364</a:t>
-            </a:r>
-          </a:p>
-        </p:txBody>
-      </p:sp>
-      <p:sp>
-        <p:nvSpPr>
-          <p:cNvPr id="16" name="TextBox 15"/>
-          <p:cNvSpPr txBox="1"/>
-          <p:nvPr/>
-        </p:nvSpPr>
-        <p:spPr>
-          <a:xfrm>
-            <a:off x="4087368" y="5093208"/>
-            <a:ext cx="2944368" cy="347472"/>
-          </a:xfrm>
-          <a:prstGeom prst="rect">
-            <a:avLst/>
-          </a:prstGeom>
-          <a:noFill/>
-        </p:spPr>
-        <p:txBody>
-          <a:bodyPr wrap="square" lIns="9144" rIns="9144" tIns="0" bIns="0">
-            <a:spAutoFit/>
-          </a:bodyPr>
-          <a:lstStyle/>
-          <a:p>
-            <a:pPr algn="ctr"/>
-            <a:r>
-              <a:rPr sz="700" b="0">
-                <a:solidFill>
-                  <a:srgbClr val="5E6974"/>
-                </a:solidFill>
-                <a:latin typeface="Calibri"/>
-              </a:rPr>
-              <a:t>No</a:t>
-            </a:r>
-          </a:p>
-        </p:txBody>
-      </p:sp>
-      <p:sp>
-        <p:nvSpPr>
-          <p:cNvPr id="17" name="TextBox 16"/>
-          <p:cNvSpPr txBox="1"/>
-          <p:nvPr/>
-        </p:nvSpPr>
-        <p:spPr>
-          <a:xfrm>
-            <a:off x="1298448" y="5550408"/>
-            <a:ext cx="5486400" cy="146304"/>
-          </a:xfrm>
-          <a:prstGeom prst="rect">
-            <a:avLst/>
-          </a:prstGeom>
-          <a:noFill/>
-        </p:spPr>
-        <p:txBody>
-          <a:bodyPr wrap="square" lIns="9144" rIns="9144" tIns="0" bIns="0">
-            <a:spAutoFit/>
-          </a:bodyPr>
-          <a:lstStyle/>
-          <a:p>
-            <a:pPr algn="ctr"/>
-            <a:r>
-              <a:rPr sz="700" b="0">
-                <a:solidFill>
-                  <a:srgbClr val="5E6974"/>
-                </a:solidFill>
-                <a:latin typeface="Calibri"/>
-              </a:rPr>
-              <a:t>Overtime</a:t>
-            </a:r>
-          </a:p>
-        </p:txBody>
-      </p:sp>
-      <p:sp>
-        <p:nvSpPr>
-          <p:cNvPr id="18" name="TextBox 17"/>
-          <p:cNvSpPr txBox="1"/>
-          <p:nvPr/>
-        </p:nvSpPr>
-        <p:spPr>
-          <a:xfrm>
-            <a:off x="923544" y="1865376"/>
-            <a:ext cx="1463040" cy="146304"/>
-          </a:xfrm>
-          <a:prstGeom prst="rect">
-            <a:avLst/>
-          </a:prstGeom>
-          <a:noFill/>
-        </p:spPr>
-        <p:txBody>
-          <a:bodyPr wrap="square" lIns="9144" rIns="9144" tIns="0" bIns="0">
-            <a:spAutoFit/>
-          </a:bodyPr>
-          <a:lstStyle/>
-          <a:p>
-            <a:pPr algn="l"/>
-            <a:r>
-              <a:rPr sz="700" b="0">
-                <a:solidFill>
-                  <a:srgbClr val="5E6974"/>
-                </a:solidFill>
-                <a:latin typeface="Calibri"/>
-              </a:rPr>
-              <a:t>Attrition Rate</a:t>
-            </a:r>
-          </a:p>
-        </p:txBody>
-      </p:sp>
-      <p:sp>
-        <p:nvSpPr>
-          <p:cNvPr id="19" name="Rounded Rectangle 18"/>
-          <p:cNvSpPr/>
-          <p:nvPr/>
-        </p:nvSpPr>
-        <p:spPr>
-          <a:xfrm>
-            <a:off x="7635240" y="1371600"/>
-            <a:ext cx="3657600" cy="4526280"/>
+            <a:off x="4709160" y="1371600"/>
+            <a:ext cx="6583680" cy="4526280"/>
           </a:xfrm>
           <a:prstGeom prst="roundRect">
             <a:avLst/>
@@ -8977,177 +7864,33 @@
           </a:p>
         </p:txBody>
       </p:sp>
-      <p:sp>
-        <p:nvSpPr>
-          <p:cNvPr id="20" name="TextBox 19"/>
-          <p:cNvSpPr txBox="1"/>
-          <p:nvPr/>
-        </p:nvSpPr>
-        <p:spPr>
-          <a:xfrm>
-            <a:off x="7882127" y="1664208"/>
-            <a:ext cx="3063240" cy="320040"/>
-          </a:xfrm>
-          <a:prstGeom prst="rect">
-            <a:avLst/>
-          </a:prstGeom>
-          <a:noFill/>
-        </p:spPr>
-        <p:txBody>
-          <a:bodyPr wrap="square" lIns="54864" rIns="54864" tIns="27432" bIns="27432">
-            <a:spAutoFit/>
-          </a:bodyPr>
-          <a:lstStyle/>
-          <a:p>
-            <a:pPr algn="l"/>
-            <a:r>
-              <a:rPr sz="1400" b="1" i="0">
-                <a:solidFill>
-                  <a:srgbClr val="15304C"/>
-                </a:solidFill>
-                <a:latin typeface="Calibri"/>
-              </a:rPr>
-              <a:t>Insight</a:t>
-            </a:r>
-          </a:p>
-        </p:txBody>
-      </p:sp>
-      <p:sp>
-        <p:nvSpPr>
-          <p:cNvPr id="21" name="TextBox 20"/>
-          <p:cNvSpPr txBox="1"/>
-          <p:nvPr/>
-        </p:nvSpPr>
-        <p:spPr>
-          <a:xfrm>
-            <a:off x="7882127" y="2084831"/>
-            <a:ext cx="3054096" cy="841248"/>
-          </a:xfrm>
-          <a:prstGeom prst="rect">
-            <a:avLst/>
-          </a:prstGeom>
-          <a:noFill/>
-        </p:spPr>
-        <p:txBody>
-          <a:bodyPr wrap="square" lIns="54864" rIns="54864" tIns="27432" bIns="27432">
-            <a:spAutoFit/>
-          </a:bodyPr>
-          <a:lstStyle/>
-          <a:p>
-            <a:pPr algn="l"/>
-            <a:r>
-              <a:rPr sz="1200" b="1" i="0">
-                <a:solidFill>
-                  <a:srgbClr val="1F2730"/>
-                </a:solidFill>
-                <a:latin typeface="Calibri"/>
-              </a:rPr>
-              <a:t>Overtime employees have 30.5% attrition rate.</a:t>
-            </a:r>
-          </a:p>
-        </p:txBody>
-      </p:sp>
-      <p:sp>
-        <p:nvSpPr>
-          <p:cNvPr id="22" name="TextBox 21"/>
-          <p:cNvSpPr txBox="1"/>
-          <p:nvPr/>
-        </p:nvSpPr>
-        <p:spPr>
-          <a:xfrm>
-            <a:off x="7845552" y="3127248"/>
-            <a:ext cx="3127248" cy="1920240"/>
-          </a:xfrm>
-          <a:prstGeom prst="rect">
-            <a:avLst/>
-          </a:prstGeom>
-          <a:noFill/>
-        </p:spPr>
-        <p:txBody>
-          <a:bodyPr wrap="square" lIns="36576" rIns="36576" tIns="18288" bIns="18288">
-            <a:spAutoFit/>
-          </a:bodyPr>
-          <a:lstStyle/>
-          <a:p>
-            <a:pPr>
-              <a:spcAft>
-                <a:spcPts val="700"/>
-              </a:spcAft>
-            </a:pPr>
-            <a:r>
-              <a:rPr sz="1000" b="1">
-                <a:solidFill>
-                  <a:srgbClr val="2C65A4"/>
-                </a:solidFill>
-                <a:latin typeface="Calibri"/>
-              </a:rPr>
-              <a:t>- </a:t>
-            </a:r>
-            <a:r>
-              <a:rPr sz="1000">
-                <a:solidFill>
-                  <a:srgbClr val="1F2730"/>
-                </a:solidFill>
-                <a:latin typeface="Calibri"/>
-              </a:rPr>
-              <a:t>Overtime employees have 30.5% attrition rate</a:t>
-            </a:r>
-          </a:p>
-          <a:p>
-            <a:pPr>
-              <a:spcAft>
-                <a:spcPts val="700"/>
-              </a:spcAft>
-            </a:pPr>
-            <a:r>
-              <a:rPr sz="1000" b="1">
-                <a:solidFill>
-                  <a:srgbClr val="2C65A4"/>
-                </a:solidFill>
-                <a:latin typeface="Calibri"/>
-              </a:rPr>
-              <a:t>- </a:t>
-            </a:r>
-            <a:r>
-              <a:rPr sz="1000">
-                <a:solidFill>
-                  <a:srgbClr val="1F2730"/>
-                </a:solidFill>
-                <a:latin typeface="Calibri"/>
-              </a:rPr>
-              <a:t>Manage overtime workload to reduce attrition</a:t>
-            </a:r>
-          </a:p>
-          <a:p>
-            <a:pPr>
-              <a:spcAft>
-                <a:spcPts val="700"/>
-              </a:spcAft>
-            </a:pPr>
-            <a:r>
-              <a:rPr sz="1000" b="1">
-                <a:solidFill>
-                  <a:srgbClr val="2C65A4"/>
-                </a:solidFill>
-                <a:latin typeface="Calibri"/>
-              </a:rPr>
-              <a:t>- </a:t>
-            </a:r>
-            <a:r>
-              <a:rPr sz="1000">
-                <a:solidFill>
-                  <a:srgbClr val="1F2730"/>
-                </a:solidFill>
-                <a:latin typeface="Calibri"/>
-              </a:rPr>
-              <a:t>Attrition Rate by Overtime Status</a:t>
-            </a:r>
-          </a:p>
-        </p:txBody>
-      </p:sp>
-      <p:sp>
-        <p:nvSpPr>
-          <p:cNvPr id="23" name="Rectangle 22"/>
+      <p:pic>
+        <p:nvPicPr>
+          <p:cNvPr id="9" name="Picture 8" descr="figure_2_20260626_181544.png"/>
+          <p:cNvPicPr>
+            <a:picLocks noChangeAspect="1"/>
+          </p:cNvPicPr>
+          <p:nvPr/>
+        </p:nvPicPr>
+        <p:blipFill>
+          <a:blip r:embed="rId2"/>
+          <a:stretch>
+            <a:fillRect/>
+          </a:stretch>
+        </p:blipFill>
+        <p:spPr>
+          <a:xfrm>
+            <a:off x="4846320" y="1583322"/>
+            <a:ext cx="6309360" cy="4102835"/>
+          </a:xfrm>
+          <a:prstGeom prst="rect">
+            <a:avLst/>
+          </a:prstGeom>
+        </p:spPr>
+      </p:pic>
+      <p:sp>
+        <p:nvSpPr>
+          <p:cNvPr id="10" name="Rectangle 9"/>
           <p:cNvSpPr/>
           <p:nvPr/>
         </p:nvSpPr>
@@ -9190,7 +7933,7 @@
       </p:sp>
       <p:sp>
         <p:nvSpPr>
-          <p:cNvPr id="24" name="TextBox 23"/>
+          <p:cNvPr id="11" name="TextBox 10"/>
           <p:cNvSpPr txBox="1"/>
           <p:nvPr/>
         </p:nvSpPr>
@@ -9218,14 +7961,14 @@
                 </a:solidFill>
                 <a:latin typeface="Calibri"/>
               </a:rPr>
-              <a:t>Reducing Preventable Attrition</a:t>
-            </a:r>
-          </a:p>
-        </p:txBody>
-      </p:sp>
-      <p:sp>
-        <p:nvSpPr>
-          <p:cNvPr id="25" name="TextBox 24"/>
+              <a:t>Optimizing Operations with High-Fidelity Weather Intelligence</a:t>
+            </a:r>
+          </a:p>
+        </p:txBody>
+      </p:sp>
+      <p:sp>
+        <p:nvSpPr>
+          <p:cNvPr id="12" name="TextBox 11"/>
           <p:cNvSpPr txBox="1"/>
           <p:nvPr/>
         </p:nvSpPr>
@@ -9314,7 +8057,7 @@
                 </a:solidFill>
                 <a:latin typeface="Calibri"/>
               </a:rPr>
-              <a:t>Sales department has the highest attrition rate (25.8%), followed by HR (23.1%)</a:t>
+              <a:t>Solar radiation follows expected diurnal cycle, peaking at midday hours</a:t>
             </a:r>
           </a:p>
         </p:txBody>
@@ -9409,7 +8152,7 @@
       </p:sp>
       <p:pic>
         <p:nvPicPr>
-          <p:cNvPr id="5" name="Picture 4" descr="figure_1_20260601_235322.png"/>
+          <p:cNvPr id="5" name="Picture 4" descr="figure_3_20260626_181544.png"/>
           <p:cNvPicPr>
             <a:picLocks noChangeAspect="1"/>
           </p:cNvPicPr>
@@ -9423,8 +8166,8 @@
         </p:blipFill>
         <p:spPr>
           <a:xfrm>
-            <a:off x="886967" y="1741931"/>
-            <a:ext cx="6309360" cy="3785616"/>
+            <a:off x="886967" y="1599822"/>
+            <a:ext cx="6309360" cy="4069834"/>
           </a:xfrm>
           <a:prstGeom prst="rect">
             <a:avLst/>
@@ -9541,7 +8284,7 @@
                 </a:solidFill>
                 <a:latin typeface="Calibri"/>
               </a:rPr>
-              <a:t>Sales department has the highest attrition rate (25.8%), followed by HR (23.1%).</a:t>
+              <a:t>Solar radiation follows expected diurnal cycle, peaking at midday hours.</a:t>
             </a:r>
           </a:p>
         </p:txBody>
@@ -9589,7 +8332,7 @@
                 </a:solidFill>
                 <a:latin typeface="Calibri"/>
               </a:rPr>
-              <a:t>Sales department has the highest attrition rate (25.8%), followed by HR (23.1%)</a:t>
+              <a:t>Solar radiation follows expected diurnal cycle, peaking at midday hours</a:t>
             </a:r>
           </a:p>
         </p:txBody>
@@ -9667,7 +8410,7 @@
                 </a:solidFill>
                 <a:latin typeface="Calibri"/>
               </a:rPr>
-              <a:t>Reducing Preventable Attrition</a:t>
+              <a:t>Optimizing Operations with High-Fidelity Weather Intelligence</a:t>
             </a:r>
           </a:p>
         </p:txBody>
@@ -9757,13 +8500,13 @@
           <a:p>
             <a:pPr algn="l"/>
             <a:r>
-              <a:rPr sz="2000" b="1" i="0">
+              <a:rPr sz="2300" b="1" i="0">
                 <a:solidFill>
                   <a:srgbClr val="15304C"/>
                 </a:solidFill>
                 <a:latin typeface="Calibri"/>
               </a:rPr>
-              <a:t>Exploratory tree splits on TotalWorkingYears, JobRole Research Scientist, and Age</a:t>
+              <a:t>Exploratory tree splits on T2M, RH2M, and hour of day</a:t>
             </a:r>
           </a:p>
         </p:txBody>
@@ -9819,8 +8562,8 @@
         </p:nvSpPr>
         <p:spPr>
           <a:xfrm>
-            <a:off x="822960" y="1298448"/>
-            <a:ext cx="10469880" cy="4187952"/>
+            <a:off x="749808" y="1371600"/>
+            <a:ext cx="6583680" cy="4526280"/>
           </a:xfrm>
           <a:prstGeom prst="roundRect">
             <a:avLst/>
@@ -9858,7 +8601,7 @@
       </p:sp>
       <p:pic>
         <p:nvPicPr>
-          <p:cNvPr id="5" name="shared_decision_tree_image" descr="decision_tree_rules_20260601_235322.png"/>
+          <p:cNvPr id="5" name="shared_decision_tree_image" descr="decision_tree_rules_20260626_181544.png"/>
           <p:cNvPicPr>
             <a:picLocks noChangeAspect="1"/>
           </p:cNvPicPr>
@@ -9872,8 +8615,8 @@
         </p:blipFill>
         <p:spPr>
           <a:xfrm>
-            <a:off x="4195080" y="1458467"/>
-            <a:ext cx="3725640" cy="3611880"/>
+            <a:off x="2004336" y="1531619"/>
+            <a:ext cx="4074624" cy="3950208"/>
           </a:xfrm>
           <a:prstGeom prst="rect">
             <a:avLst/>
@@ -9888,8 +8631,8 @@
         </p:nvSpPr>
         <p:spPr>
           <a:xfrm>
-            <a:off x="987552" y="5212080"/>
-            <a:ext cx="10140696" cy="164592"/>
+            <a:off x="914400" y="5623560"/>
+            <a:ext cx="6254496" cy="164592"/>
           </a:xfrm>
           <a:prstGeom prst="rect">
             <a:avLst/>
@@ -9910,7 +8653,7 @@
                 </a:solidFill>
                 <a:latin typeface="Calibri"/>
               </a:rPr>
-              <a:t>Train Accuracy: 88.5% | Test Accuracy: 81.9% | Baseline Accuracy: 83.9%</a:t>
+              <a:t>Train R2: 0.922 | Test R2: 0.922</a:t>
             </a:r>
           </a:p>
         </p:txBody>
@@ -9923,14 +8666,14 @@
         </p:nvSpPr>
         <p:spPr>
           <a:xfrm>
-            <a:off x="960120" y="5614416"/>
-            <a:ext cx="10149840" cy="438912"/>
+            <a:off x="7635240" y="1371600"/>
+            <a:ext cx="3657600" cy="4526280"/>
           </a:xfrm>
           <a:prstGeom prst="roundRect">
             <a:avLst/>
           </a:prstGeom>
           <a:solidFill>
-            <a:srgbClr val="E8EFF7"/>
+            <a:srgbClr val="FFFFFF"/>
           </a:solidFill>
           <a:ln w="7620">
             <a:solidFill>
@@ -9968,8 +8711,8 @@
         </p:nvSpPr>
         <p:spPr>
           <a:xfrm>
-            <a:off x="1115568" y="5705856"/>
-            <a:ext cx="9784080" cy="219456"/>
+            <a:off x="7882127" y="1664208"/>
+            <a:ext cx="3063240" cy="320040"/>
           </a:xfrm>
           <a:prstGeom prst="rect">
             <a:avLst/>
@@ -9982,22 +8725,155 @@
           </a:bodyPr>
           <a:lstStyle/>
           <a:p>
-            <a:pPr algn="ctr"/>
-            <a:r>
-              <a:rPr sz="1100" b="1" i="0">
+            <a:pPr algn="l"/>
+            <a:r>
+              <a:rPr sz="1400" b="1" i="0">
                 <a:solidFill>
                   <a:srgbClr val="15304C"/>
                 </a:solidFill>
                 <a:latin typeface="Calibri"/>
               </a:rPr>
-              <a:t>Explanatory model only: test accuracy 81.9% trails the baseline 83.9%; use the rules to guide investigation, not production prediction.</a:t>
-            </a:r>
-          </a:p>
-        </p:txBody>
-      </p:sp>
-      <p:sp>
-        <p:nvSpPr>
-          <p:cNvPr id="9" name="Rectangle 8"/>
+              <a:t>Insight</a:t>
+            </a:r>
+          </a:p>
+        </p:txBody>
+      </p:sp>
+      <p:sp>
+        <p:nvSpPr>
+          <p:cNvPr id="9" name="TextBox 8"/>
+          <p:cNvSpPr txBox="1"/>
+          <p:nvPr/>
+        </p:nvSpPr>
+        <p:spPr>
+          <a:xfrm>
+            <a:off x="7882127" y="2084831"/>
+            <a:ext cx="3054096" cy="841248"/>
+          </a:xfrm>
+          <a:prstGeom prst="rect">
+            <a:avLst/>
+          </a:prstGeom>
+          <a:noFill/>
+        </p:spPr>
+        <p:txBody>
+          <a:bodyPr wrap="square" lIns="54864" rIns="54864" tIns="27432" bIns="27432">
+            <a:spAutoFit/>
+          </a:bodyPr>
+          <a:lstStyle/>
+          <a:p>
+            <a:pPr algn="l"/>
+            <a:r>
+              <a:rPr sz="1200" b="1" i="0">
+                <a:solidFill>
+                  <a:srgbClr val="1F2730"/>
+                </a:solidFill>
+                <a:latin typeface="Calibri"/>
+              </a:rPr>
+              <a:t>Exploratory screening only: validate precision, recall, F1, and support before operational use.</a:t>
+            </a:r>
+          </a:p>
+        </p:txBody>
+      </p:sp>
+      <p:sp>
+        <p:nvSpPr>
+          <p:cNvPr id="10" name="TextBox 9"/>
+          <p:cNvSpPr txBox="1"/>
+          <p:nvPr/>
+        </p:nvSpPr>
+        <p:spPr>
+          <a:xfrm>
+            <a:off x="7845552" y="3127248"/>
+            <a:ext cx="3127248" cy="1920240"/>
+          </a:xfrm>
+          <a:prstGeom prst="rect">
+            <a:avLst/>
+          </a:prstGeom>
+          <a:noFill/>
+        </p:spPr>
+        <p:txBody>
+          <a:bodyPr wrap="square" lIns="36576" rIns="36576" tIns="18288" bIns="18288">
+            <a:spAutoFit/>
+          </a:bodyPr>
+          <a:lstStyle/>
+          <a:p>
+            <a:pPr>
+              <a:spcAft>
+                <a:spcPts val="700"/>
+              </a:spcAft>
+            </a:pPr>
+            <a:r>
+              <a:rPr sz="1000" b="1">
+                <a:solidFill>
+                  <a:srgbClr val="2C65A4"/>
+                </a:solidFill>
+                <a:latin typeface="Calibri"/>
+              </a:rPr>
+              <a:t>- </a:t>
+            </a:r>
+            <a:r>
+              <a:rPr sz="1000">
+                <a:solidFill>
+                  <a:srgbClr val="1F2730"/>
+                </a:solidFill>
+                <a:latin typeface="Calibri"/>
+              </a:rPr>
+              <a:t>Exploratory tree splits on T2M, RH2M, and hour of day</a:t>
+            </a:r>
+          </a:p>
+          <a:p>
+            <a:pPr>
+              <a:spcAft>
+                <a:spcPts val="700"/>
+              </a:spcAft>
+            </a:pPr>
+            <a:r>
+              <a:rPr sz="1000" b="1">
+                <a:solidFill>
+                  <a:srgbClr val="2C65A4"/>
+                </a:solidFill>
+                <a:latin typeface="Calibri"/>
+              </a:rPr>
+              <a:t>- </a:t>
+            </a:r>
+            <a:r>
+              <a:rPr sz="1000">
+                <a:solidFill>
+                  <a:srgbClr val="1F2730"/>
+                </a:solidFill>
+                <a:latin typeface="Calibri"/>
+              </a:rPr>
+              <a:t>Exploratory screening only: validate precision, recall, F1, and support before operational use.</a:t>
+            </a:r>
+          </a:p>
+          <a:p>
+            <a:pPr>
+              <a:spcAft>
+                <a:spcPts val="700"/>
+              </a:spcAft>
+            </a:pPr>
+            <a:r>
+              <a:rPr sz="1000" b="1">
+                <a:solidFill>
+                  <a:srgbClr val="2C65A4"/>
+                </a:solidFill>
+                <a:latin typeface="Calibri"/>
+              </a:rPr>
+              <a:t>- </a:t>
+            </a:r>
+            <a:r>
+              <a:rPr sz="1000">
+                <a:solidFill>
+                  <a:srgbClr val="1F2730"/>
+                </a:solidFill>
+                <a:latin typeface="Calibri"/>
+              </a:rPr>
+              <a:t>Solar Radiation Prediction Rules</a:t>
+            </a:r>
+          </a:p>
+        </p:txBody>
+      </p:sp>
+      <p:sp>
+        <p:nvSpPr>
+          <p:cNvPr id="11" name="Rectangle 10"/>
           <p:cNvSpPr/>
           <p:nvPr/>
         </p:nvSpPr>
@@ -10040,7 +8916,7 @@
       </p:sp>
       <p:sp>
         <p:nvSpPr>
-          <p:cNvPr id="10" name="TextBox 9"/>
+          <p:cNvPr id="12" name="TextBox 11"/>
           <p:cNvSpPr txBox="1"/>
           <p:nvPr/>
         </p:nvSpPr>
@@ -10068,14 +8944,14 @@
                 </a:solidFill>
                 <a:latin typeface="Calibri"/>
               </a:rPr>
-              <a:t>Reducing Preventable Attrition</a:t>
-            </a:r>
-          </a:p>
-        </p:txBody>
-      </p:sp>
-      <p:sp>
-        <p:nvSpPr>
-          <p:cNvPr id="11" name="TextBox 10"/>
+              <a:t>Optimizing Operations with High-Fidelity Weather Intelligence</a:t>
+            </a:r>
+          </a:p>
+        </p:txBody>
+      </p:sp>
+      <p:sp>
+        <p:nvSpPr>
+          <p:cNvPr id="13" name="TextBox 12"/>
           <p:cNvSpPr txBox="1"/>
           <p:nvPr/>
         </p:nvSpPr>
@@ -10158,13 +9034,13 @@
           <a:p>
             <a:pPr algn="l"/>
             <a:r>
-              <a:rPr sz="2000" b="1" i="0">
+              <a:rPr sz="2300" b="1" i="0">
                 <a:solidFill>
                   <a:srgbClr val="15304C"/>
                 </a:solidFill>
                 <a:latin typeface="Calibri"/>
               </a:rPr>
-              <a:t>Three core evidence-based findings on what drives attrition</a:t>
+              <a:t>Decision tree rules summarize model logic</a:t>
             </a:r>
           </a:p>
         </p:txBody>
@@ -10287,7 +9163,7 @@
                 </a:solidFill>
                 <a:latin typeface="Calibri"/>
               </a:rPr>
-              <a:t>Attrition is predictable and concentrated, driven by specific work conditions rather than diffuse employee dissatisfaction.</a:t>
+              <a:t>Exploratory screening only: validate precision, recall, F1, and support before operational use.</a:t>
             </a:r>
           </a:p>
         </p:txBody>
@@ -10445,7 +9321,7 @@
                 </a:solidFill>
                 <a:latin typeface="Calibri"/>
               </a:rPr>
-              <a:t>Sales department attrition is 25.8%, highest among departments</a:t>
+              <a:t>Decision tree rules summarize model logic</a:t>
             </a:r>
           </a:p>
         </p:txBody>
@@ -10603,172 +9479,14 @@
                 </a:solidFill>
                 <a:latin typeface="Calibri"/>
               </a:rPr>
-              <a:t>Frequent travelers have 24.5% attrition rate</a:t>
-            </a:r>
-          </a:p>
-        </p:txBody>
-      </p:sp>
-      <p:sp>
-        <p:nvSpPr>
-          <p:cNvPr id="14" name="Rounded Rectangle 13"/>
-          <p:cNvSpPr/>
-          <p:nvPr/>
-        </p:nvSpPr>
-        <p:spPr>
-          <a:xfrm>
-            <a:off x="7936992" y="2240280"/>
-            <a:ext cx="3154680" cy="3063240"/>
-          </a:xfrm>
-          <a:prstGeom prst="roundRect">
-            <a:avLst/>
-          </a:prstGeom>
-          <a:solidFill>
-            <a:srgbClr val="FFFFFF"/>
-          </a:solidFill>
-          <a:ln w="7620">
-            <a:solidFill>
-              <a:srgbClr val="D1D7DC"/>
-            </a:solidFill>
-          </a:ln>
-        </p:spPr>
-        <p:style>
-          <a:lnRef idx="1">
-            <a:schemeClr val="accent1"/>
-          </a:lnRef>
-          <a:fillRef idx="3">
-            <a:schemeClr val="accent1"/>
-          </a:fillRef>
-          <a:effectRef idx="2">
-            <a:schemeClr val="accent1"/>
-          </a:effectRef>
-          <a:fontRef idx="minor">
-            <a:schemeClr val="lt1"/>
-          </a:fontRef>
-        </p:style>
-        <p:txBody>
-          <a:bodyPr rtlCol="0" anchor="ctr"/>
-          <a:lstStyle/>
-          <a:p>
-            <a:pPr algn="ctr"/>
-          </a:p>
-        </p:txBody>
-      </p:sp>
-      <p:sp>
-        <p:nvSpPr>
-          <p:cNvPr id="15" name="Rectangle 14"/>
-          <p:cNvSpPr/>
-          <p:nvPr/>
-        </p:nvSpPr>
-        <p:spPr>
-          <a:xfrm>
-            <a:off x="7936992" y="2240280"/>
-            <a:ext cx="73152" cy="3063240"/>
-          </a:xfrm>
-          <a:prstGeom prst="rect">
-            <a:avLst/>
-          </a:prstGeom>
-          <a:solidFill>
-            <a:srgbClr val="BB9241"/>
-          </a:solidFill>
-          <a:ln>
-            <a:noFill/>
-          </a:ln>
-        </p:spPr>
-        <p:style>
-          <a:lnRef idx="1">
-            <a:schemeClr val="accent1"/>
-          </a:lnRef>
-          <a:fillRef idx="3">
-            <a:schemeClr val="accent1"/>
-          </a:fillRef>
-          <a:effectRef idx="2">
-            <a:schemeClr val="accent1"/>
-          </a:effectRef>
-          <a:fontRef idx="minor">
-            <a:schemeClr val="lt1"/>
-          </a:fontRef>
-        </p:style>
-        <p:txBody>
-          <a:bodyPr rtlCol="0" anchor="ctr"/>
-          <a:lstStyle/>
-          <a:p>
-            <a:pPr algn="ctr"/>
-          </a:p>
-        </p:txBody>
-      </p:sp>
-      <p:sp>
-        <p:nvSpPr>
-          <p:cNvPr id="16" name="TextBox 15"/>
-          <p:cNvSpPr txBox="1"/>
-          <p:nvPr/>
-        </p:nvSpPr>
-        <p:spPr>
-          <a:xfrm>
-            <a:off x="8165592" y="2578608"/>
-            <a:ext cx="2606040" cy="256032"/>
-          </a:xfrm>
-          <a:prstGeom prst="rect">
-            <a:avLst/>
-          </a:prstGeom>
-          <a:noFill/>
-        </p:spPr>
-        <p:txBody>
-          <a:bodyPr wrap="square" lIns="54864" rIns="54864" tIns="27432" bIns="27432">
-            <a:spAutoFit/>
-          </a:bodyPr>
-          <a:lstStyle/>
-          <a:p>
-            <a:pPr algn="l"/>
-            <a:r>
-              <a:rPr sz="1100" b="1" i="0">
-                <a:solidFill>
-                  <a:srgbClr val="5E6974"/>
-                </a:solidFill>
-                <a:latin typeface="Calibri"/>
-              </a:rPr>
-              <a:t>Finding 3</a:t>
-            </a:r>
-          </a:p>
-        </p:txBody>
-      </p:sp>
-      <p:sp>
-        <p:nvSpPr>
-          <p:cNvPr id="17" name="TextBox 16"/>
-          <p:cNvSpPr txBox="1"/>
-          <p:nvPr/>
-        </p:nvSpPr>
-        <p:spPr>
-          <a:xfrm>
-            <a:off x="8165592" y="2999232"/>
-            <a:ext cx="2606040" cy="1280160"/>
-          </a:xfrm>
-          <a:prstGeom prst="rect">
-            <a:avLst/>
-          </a:prstGeom>
-          <a:noFill/>
-        </p:spPr>
-        <p:txBody>
-          <a:bodyPr wrap="square" lIns="54864" rIns="54864" tIns="27432" bIns="27432">
-            <a:spAutoFit/>
-          </a:bodyPr>
-          <a:lstStyle/>
-          <a:p>
-            <a:pPr algn="l"/>
-            <a:r>
-              <a:rPr sz="1200" b="0" i="0">
-                <a:solidFill>
-                  <a:srgbClr val="1F2730"/>
-                </a:solidFill>
-                <a:latin typeface="Calibri"/>
-              </a:rPr>
-              <a:t>Overtime employees have 30.5% attrition rate</a:t>
-            </a:r>
-          </a:p>
-        </p:txBody>
-      </p:sp>
-      <p:sp>
-        <p:nvSpPr>
-          <p:cNvPr id="18" name="Rectangle 17"/>
+              <a:t>Exploratory screening only: validate precision, recall, F1, and support before operational use.</a:t>
+            </a:r>
+          </a:p>
+        </p:txBody>
+      </p:sp>
+      <p:sp>
+        <p:nvSpPr>
+          <p:cNvPr id="14" name="Rectangle 13"/>
           <p:cNvSpPr/>
           <p:nvPr/>
         </p:nvSpPr>
@@ -10811,7 +9529,7 @@
       </p:sp>
       <p:sp>
         <p:nvSpPr>
-          <p:cNvPr id="19" name="TextBox 18"/>
+          <p:cNvPr id="15" name="TextBox 14"/>
           <p:cNvSpPr txBox="1"/>
           <p:nvPr/>
         </p:nvSpPr>
@@ -10839,14 +9557,14 @@
                 </a:solidFill>
                 <a:latin typeface="Calibri"/>
               </a:rPr>
-              <a:t>Reducing Preventable Attrition</a:t>
-            </a:r>
-          </a:p>
-        </p:txBody>
-      </p:sp>
-      <p:sp>
-        <p:nvSpPr>
-          <p:cNvPr id="20" name="TextBox 19"/>
+              <a:t>Optimizing Operations with High-Fidelity Weather Intelligence</a:t>
+            </a:r>
+          </a:p>
+        </p:txBody>
+      </p:sp>
+      <p:sp>
+        <p:nvSpPr>
+          <p:cNvPr id="16" name="TextBox 15"/>
           <p:cNvSpPr txBox="1"/>
           <p:nvPr/>
         </p:nvSpPr>
@@ -11216,7 +9934,7 @@
                 </a:solidFill>
                 <a:latin typeface="Calibri"/>
               </a:rPr>
-              <a:t>Segment employees by model-extracted rule fields: TotalWorkingYears, JobRole Research Scientist, Age</a:t>
+              <a:t>Segment records by model-extracted rule fields: T2M, RH2M, hour of day</a:t>
             </a:r>
           </a:p>
         </p:txBody>
@@ -11374,7 +10092,7 @@
                 </a:solidFill>
                 <a:latin typeface="Calibri"/>
               </a:rPr>
-              <a:t>Use manager and HR review as the channel for high-risk rule segments</a:t>
+              <a:t>Use owner review as the channel for high-risk rule segments</a:t>
             </a:r>
           </a:p>
         </p:txBody>
@@ -11610,7 +10328,7 @@
                 </a:solidFill>
                 <a:latin typeface="Calibri"/>
               </a:rPr>
-              <a:t>Reducing Preventable Attrition</a:t>
+              <a:t>Optimizing Operations with High-Fidelity Weather Intelligence</a:t>
             </a:r>
           </a:p>
         </p:txBody>
